--- a/submission/IssueLift_Submission.pptx
+++ b/submission/IssueLift_Submission.pptx
@@ -1480,7 +1480,7 @@
     <p:bg>
       <p:bgPr>
         <a:solidFill>
-          <a:srgbClr val="F7F6FF"/>
+          <a:srgbClr val="0B1020"/>
         </a:solidFill>
       </p:bgPr>
     </p:bg>
@@ -1525,7 +1525,7 @@
             <a:r>
               <a:rPr lang="en-US" sz="1200" b="1" dirty="0">
                 <a:solidFill>
-                  <a:srgbClr val="7057F5"/>
+                  <a:srgbClr val="A78BFA"/>
                 </a:solidFill>
                 <a:latin typeface="Arial" pitchFamily="34" charset="0"/>
                 <a:ea typeface="Arial" pitchFamily="34" charset="-122"/>
@@ -1564,7 +1564,7 @@
             <a:r>
               <a:rPr lang="en-US" sz="4400" b="1" dirty="0">
                 <a:solidFill>
-                  <a:srgbClr val="17152D"/>
+                  <a:srgbClr val="F1F5F9"/>
                 </a:solidFill>
                 <a:latin typeface="Arial" pitchFamily="34" charset="0"/>
                 <a:ea typeface="Arial" pitchFamily="34" charset="-122"/>
@@ -1603,7 +1603,7 @@
             <a:r>
               <a:rPr lang="en-US" sz="2000" dirty="0">
                 <a:solidFill>
-                  <a:srgbClr val="477BFF"/>
+                  <a:srgbClr val="60A5FA"/>
                 </a:solidFill>
                 <a:latin typeface="Arial" pitchFamily="34" charset="0"/>
                 <a:ea typeface="Arial" pitchFamily="34" charset="-122"/>
@@ -1667,7 +1667,7 @@
             <a:r>
               <a:rPr lang="en-US" sz="1400" b="1" dirty="0">
                 <a:solidFill>
-                  <a:srgbClr val="7057F5"/>
+                  <a:srgbClr val="A78BFA"/>
                 </a:solidFill>
                 <a:latin typeface="Arial" pitchFamily="34" charset="0"/>
                 <a:ea typeface="Arial" pitchFamily="34" charset="-122"/>
@@ -1709,7 +1709,7 @@
             <a:r>
               <a:rPr lang="en-US" sz="1300" dirty="0">
                 <a:solidFill>
-                  <a:srgbClr val="17152D"/>
+                  <a:srgbClr val="F1F5F9"/>
                 </a:solidFill>
                 <a:latin typeface="Arial" pitchFamily="34" charset="0"/>
                 <a:ea typeface="Arial" pitchFamily="34" charset="-122"/>
@@ -1738,7 +1738,7 @@
             <a:r>
               <a:rPr lang="en-US" sz="1300" dirty="0">
                 <a:solidFill>
-                  <a:srgbClr val="17152D"/>
+                  <a:srgbClr val="F1F5F9"/>
                 </a:solidFill>
                 <a:latin typeface="Arial" pitchFamily="34" charset="0"/>
                 <a:ea typeface="Arial" pitchFamily="34" charset="-122"/>
@@ -1767,7 +1767,7 @@
             <a:r>
               <a:rPr lang="en-US" sz="1300" dirty="0">
                 <a:solidFill>
-                  <a:srgbClr val="17152D"/>
+                  <a:srgbClr val="F1F5F9"/>
                 </a:solidFill>
                 <a:latin typeface="Arial" pitchFamily="34" charset="0"/>
                 <a:ea typeface="Arial" pitchFamily="34" charset="-122"/>
@@ -1793,7 +1793,7 @@
     <p:bg>
       <p:bgPr>
         <a:solidFill>
-          <a:srgbClr val="F7F6FF"/>
+          <a:srgbClr val="0B1020"/>
         </a:solidFill>
       </p:bgPr>
     </p:bg>
@@ -1838,7 +1838,7 @@
             <a:r>
               <a:rPr lang="en-US" sz="1200" b="1" dirty="0">
                 <a:solidFill>
-                  <a:srgbClr val="7057F5"/>
+                  <a:srgbClr val="A78BFA"/>
                 </a:solidFill>
                 <a:latin typeface="Arial" pitchFamily="34" charset="0"/>
                 <a:ea typeface="Arial" pitchFamily="34" charset="-122"/>
@@ -1877,7 +1877,7 @@
             <a:r>
               <a:rPr lang="en-US" sz="2600" b="1" dirty="0">
                 <a:solidFill>
-                  <a:srgbClr val="17152D"/>
+                  <a:srgbClr val="F1F5F9"/>
                 </a:solidFill>
                 <a:latin typeface="Arial" pitchFamily="34" charset="0"/>
                 <a:ea typeface="Arial" pitchFamily="34" charset="-122"/>
@@ -3257,7 +3257,7 @@
     <p:bg>
       <p:bgPr>
         <a:solidFill>
-          <a:srgbClr val="F7F6FF"/>
+          <a:srgbClr val="0B1020"/>
         </a:solidFill>
       </p:bgPr>
     </p:bg>
@@ -3302,7 +3302,7 @@
             <a:r>
               <a:rPr lang="en-US" sz="1200" b="1" dirty="0">
                 <a:solidFill>
-                  <a:srgbClr val="7057F5"/>
+                  <a:srgbClr val="A78BFA"/>
                 </a:solidFill>
                 <a:latin typeface="Arial" pitchFamily="34" charset="0"/>
                 <a:ea typeface="Arial" pitchFamily="34" charset="-122"/>
@@ -3341,7 +3341,7 @@
             <a:r>
               <a:rPr lang="en-US" sz="2600" b="1" dirty="0">
                 <a:solidFill>
-                  <a:srgbClr val="17152D"/>
+                  <a:srgbClr val="F1F5F9"/>
                 </a:solidFill>
                 <a:latin typeface="Arial" pitchFamily="34" charset="0"/>
                 <a:ea typeface="Arial" pitchFamily="34" charset="-122"/>
@@ -3405,7 +3405,7 @@
             <a:r>
               <a:rPr lang="en-US" sz="1600" b="1" dirty="0">
                 <a:solidFill>
-                  <a:srgbClr val="7057F5"/>
+                  <a:srgbClr val="A78BFA"/>
                 </a:solidFill>
               </a:rPr>
               <a:t>1. Explicit vs. Inferred</a:t>
@@ -3444,7 +3444,7 @@
             <a:r>
               <a:rPr lang="en-US" sz="1200" dirty="0">
                 <a:solidFill>
-                  <a:srgbClr val="17152D"/>
+                  <a:srgbClr val="F1F5F9"/>
                 </a:solidFill>
               </a:rPr>
               <a:t>• Explicit Quotes: Direct issue excerpts are retained verbatim as AC-01, AC-02, etc. and linked to GitHub.</a:t>
@@ -3470,7 +3470,7 @@
             <a:r>
               <a:rPr lang="en-US" sz="1200" dirty="0">
                 <a:solidFill>
-                  <a:srgbClr val="17152D"/>
+                  <a:srgbClr val="F1F5F9"/>
                 </a:solidFill>
               </a:rPr>
               <a:t>• AI-Proposed: Missing requirements are clearly labelled AI-INFERRED. Never masquerade as maintainer approved.</a:t>
@@ -3496,7 +3496,7 @@
             <a:r>
               <a:rPr lang="en-US" sz="1200" dirty="0">
                 <a:solidFill>
-                  <a:srgbClr val="17152D"/>
+                  <a:srgbClr val="F1F5F9"/>
                 </a:solidFill>
               </a:rPr>
               <a:t>• In-Memory Editing: Contributor can edit criteria or toggle "Needs Clarification" without database overhead.</a:t>
@@ -3557,7 +3557,7 @@
             <a:r>
               <a:rPr lang="en-US" sz="1600" b="1" dirty="0">
                 <a:solidFill>
-                  <a:srgbClr val="477BFF"/>
+                  <a:srgbClr val="60A5FA"/>
                 </a:solidFill>
               </a:rPr>
               <a:t>2. Readiness Gate</a:t>
@@ -3596,7 +3596,7 @@
             <a:r>
               <a:rPr lang="en-US" sz="1200" dirty="0">
                 <a:solidFill>
-                  <a:srgbClr val="17152D"/>
+                  <a:srgbClr val="F1F5F9"/>
                 </a:solidFill>
               </a:rPr>
               <a:t>• ACTIONABLE: Issue open, unassigned, candidate source files identified, test evidence mapped.</a:t>
@@ -3622,7 +3622,7 @@
             <a:r>
               <a:rPr lang="en-US" sz="1200" dirty="0">
                 <a:solidFill>
-                  <a:srgbClr val="17152D"/>
+                  <a:srgbClr val="F1F5F9"/>
                 </a:solidFill>
               </a:rPr>
               <a:t>• CLARIFY FIRST: Closed on GitHub, assigned to another engineer, or ambiguous criteria require maintainer confirmation.</a:t>
@@ -3648,7 +3648,7 @@
             <a:r>
               <a:rPr lang="en-US" sz="1200" dirty="0">
                 <a:solidFill>
-                  <a:srgbClr val="17152D"/>
+                  <a:srgbClr val="F1F5F9"/>
                 </a:solidFill>
               </a:rPr>
               <a:t>• EVIDENCE-LIMITED: Truncated repository tree or missing setup documentation disclosed honestly.</a:t>
@@ -3709,7 +3709,7 @@
             <a:r>
               <a:rPr lang="en-US" sz="1600" b="1" dirty="0">
                 <a:solidFill>
-                  <a:srgbClr val="26C7C9"/>
+                  <a:srgbClr val="2DD4BF"/>
                 </a:solidFill>
               </a:rPr>
               <a:t>3. Copy-Ready Handoff</a:t>
@@ -3748,7 +3748,7 @@
             <a:r>
               <a:rPr lang="en-US" sz="1200" dirty="0">
                 <a:solidFill>
-                  <a:srgbClr val="17152D"/>
+                  <a:srgbClr val="F1F5F9"/>
                 </a:solidFill>
               </a:rPr>
               <a:t>• Specific Question: Cites the exact triggering ambiguity from the issue, not generic conversational filler.</a:t>
@@ -3774,7 +3774,7 @@
             <a:r>
               <a:rPr lang="en-US" sz="1200" dirty="0">
                 <a:solidFill>
-                  <a:srgbClr val="17152D"/>
+                  <a:srgbClr val="F1F5F9"/>
                 </a:solidFill>
               </a:rPr>
               <a:t>• Proposed Additions: Drafts concrete acceptance criteria additions for maintainer blessing.</a:t>
@@ -3800,7 +3800,7 @@
             <a:r>
               <a:rPr lang="en-US" sz="1200" dirty="0">
                 <a:solidFill>
-                  <a:srgbClr val="17152D"/>
+                  <a:srgbClr val="F1F5F9"/>
                 </a:solidFill>
               </a:rPr>
               <a:t>• Never Auto-Posts: Contributor edits and copies to clipboard manually. Respects maintainer space.</a:t>
@@ -3823,7 +3823,7 @@
     <p:bg>
       <p:bgPr>
         <a:solidFill>
-          <a:srgbClr val="F7F6FF"/>
+          <a:srgbClr val="0B1020"/>
         </a:solidFill>
       </p:bgPr>
     </p:bg>
@@ -3868,7 +3868,7 @@
             <a:r>
               <a:rPr lang="en-US" sz="1200" b="1" dirty="0">
                 <a:solidFill>
-                  <a:srgbClr val="7057F5"/>
+                  <a:srgbClr val="A78BFA"/>
                 </a:solidFill>
                 <a:latin typeface="Arial" pitchFamily="34" charset="0"/>
                 <a:ea typeface="Arial" pitchFamily="34" charset="-122"/>
@@ -3907,7 +3907,7 @@
             <a:r>
               <a:rPr lang="en-US" sz="2600" b="1" dirty="0">
                 <a:solidFill>
-                  <a:srgbClr val="17152D"/>
+                  <a:srgbClr val="F1F5F9"/>
                 </a:solidFill>
                 <a:latin typeface="Arial" pitchFamily="34" charset="0"/>
                 <a:ea typeface="Arial" pitchFamily="34" charset="-122"/>
@@ -3971,7 +3971,7 @@
             <a:r>
               <a:rPr lang="en-US" sz="1500" b="1" dirty="0">
                 <a:solidFill>
-                  <a:srgbClr val="7057F5"/>
+                  <a:srgbClr val="A78BFA"/>
                 </a:solidFill>
               </a:rPr>
               <a:t>4-NODE VERIFIED EVIDENCE CHAINS &amp; HONEST CAVEATS</a:t>
@@ -4010,7 +4010,7 @@
             <a:r>
               <a:rPr lang="en-US" sz="1300" dirty="0">
                 <a:solidFill>
-                  <a:srgbClr val="17152D"/>
+                  <a:srgbClr val="F1F5F9"/>
                 </a:solidFill>
               </a:rPr>
               <a:t>1. Requirement Node: Explicit issue quote (e.g. AC-01) with link back to GitHub discussion.</a:t>
@@ -4036,7 +4036,7 @@
             <a:r>
               <a:rPr lang="en-US" sz="1300" dirty="0">
                 <a:solidFill>
-                  <a:srgbClr val="17152D"/>
+                  <a:srgbClr val="F1F5F9"/>
                 </a:solidFill>
               </a:rPr>
               <a:t>2. Candidate Implementation Node: File path confirmed in fetched repository tree. Path existence is VERIFIED; relevance remains AI-INFERRED until validated.</a:t>
@@ -4062,7 +4062,7 @@
             <a:r>
               <a:rPr lang="en-US" sz="1300" dirty="0">
                 <a:solidFill>
-                  <a:srgbClr val="17152D"/>
+                  <a:srgbClr val="F1F5F9"/>
                 </a:solidFill>
               </a:rPr>
               <a:t>3. Candidate Test Node: Test file or spec candidate identified. Status: TEST EVIDENCE FOUND, or NO TEST EVIDENCE FOUND IN SCANNED FILES.</a:t>
@@ -4088,7 +4088,7 @@
             <a:r>
               <a:rPr lang="en-US" sz="1300" dirty="0">
                 <a:solidFill>
-                  <a:srgbClr val="17152D"/>
+                  <a:srgbClr val="F1F5F9"/>
                 </a:solidFill>
               </a:rPr>
               <a:t>4. Documented Test Command: Documented npm/cargo/pytest command extracted from README/CONTRIBUTING with direct file citation.</a:t>
@@ -4114,7 +4114,7 @@
             <a:r>
               <a:rPr lang="en-US" sz="1300" dirty="0">
                 <a:solidFill>
-                  <a:srgbClr val="17152D"/>
+                  <a:srgbClr val="F1F5F9"/>
                 </a:solidFill>
               </a:rPr>
               <a:t>• TEST GAP RADAR: When no test evidence is identified in the scanned files, IssueLift generates a Test Gap card explaining what was checked, why uncertainty exists, and proposing a manual verification scenario. It NEVER claims "no tests exist" or fabricates coverage percentages.</a:t>
@@ -4137,7 +4137,7 @@
     <p:bg>
       <p:bgPr>
         <a:solidFill>
-          <a:srgbClr val="F7F6FF"/>
+          <a:srgbClr val="0B1020"/>
         </a:solidFill>
       </p:bgPr>
     </p:bg>
@@ -4182,7 +4182,7 @@
             <a:r>
               <a:rPr lang="en-US" sz="1200" b="1" dirty="0">
                 <a:solidFill>
-                  <a:srgbClr val="7057F5"/>
+                  <a:srgbClr val="A78BFA"/>
                 </a:solidFill>
                 <a:latin typeface="Arial" pitchFamily="34" charset="0"/>
                 <a:ea typeface="Arial" pitchFamily="34" charset="-122"/>
@@ -4221,7 +4221,7 @@
             <a:r>
               <a:rPr lang="en-US" sz="2600" b="1" dirty="0">
                 <a:solidFill>
-                  <a:srgbClr val="17152D"/>
+                  <a:srgbClr val="F1F5F9"/>
                 </a:solidFill>
                 <a:latin typeface="Arial" pitchFamily="34" charset="0"/>
                 <a:ea typeface="Arial" pitchFamily="34" charset="-122"/>
@@ -4285,7 +4285,7 @@
             <a:r>
               <a:rPr lang="en-US" sz="1600" b="1" dirty="0">
                 <a:solidFill>
-                  <a:srgbClr val="477BFF"/>
+                  <a:srgbClr val="60A5FA"/>
                 </a:solidFill>
               </a:rPr>
               <a:t>Gemma 4 Reasoning Engine</a:t>
@@ -4324,7 +4324,7 @@
             <a:r>
               <a:rPr lang="en-US" sz="1200" dirty="0">
                 <a:solidFill>
-                  <a:srgbClr val="17152D"/>
+                  <a:srgbClr val="F1F5F9"/>
                 </a:solidFill>
               </a:rPr>
               <a:t>• Server-Side Integration: Official @google/genai SDK on Next.js server route handlers.</a:t>
@@ -4350,7 +4350,7 @@
             <a:r>
               <a:rPr lang="en-US" sz="1200" dirty="0">
                 <a:solidFill>
-                  <a:srgbClr val="17152D"/>
+                  <a:srgbClr val="F1F5F9"/>
                 </a:solidFill>
               </a:rPr>
               <a:t>• Verified Model: gemma-4-26b-a4b-it via Google AI Studio free tier.</a:t>
@@ -4376,7 +4376,7 @@
             <a:r>
               <a:rPr lang="en-US" sz="1200" dirty="0">
                 <a:solidFill>
-                  <a:srgbClr val="17152D"/>
+                  <a:srgbClr val="F1F5F9"/>
                 </a:solidFill>
               </a:rPr>
               <a:t>• Secret Isolation: GEMMA_API_KEY is never leaked to browser, git, or client bundles.</a:t>
@@ -4402,7 +4402,7 @@
             <a:r>
               <a:rPr lang="en-US" sz="1200" dirty="0">
                 <a:solidFill>
-                  <a:srgbClr val="17152D"/>
+                  <a:srgbClr val="F1F5F9"/>
                 </a:solidFill>
               </a:rPr>
               <a:t>• Prompt Injection Defense: Issue body and comments are explicitly isolated as untrusted data.</a:t>
@@ -4428,7 +4428,7 @@
             <a:r>
               <a:rPr lang="en-US" sz="1200" dirty="0">
                 <a:solidFill>
-                  <a:srgbClr val="17152D"/>
+                  <a:srgbClr val="F1F5F9"/>
                 </a:solidFill>
               </a:rPr>
               <a:t>• Structured Zod Schema: Validates requirement criteria, status rationales, and handoff questions.</a:t>
@@ -4489,7 +4489,7 @@
             <a:r>
               <a:rPr lang="en-US" sz="1600" b="1" dirty="0">
                 <a:solidFill>
-                  <a:srgbClr val="26C7C9"/>
+                  <a:srgbClr val="2DD4BF"/>
                 </a:solidFill>
               </a:rPr>
               <a:t>Deterministic Claim Gate</a:t>
@@ -4528,7 +4528,7 @@
             <a:r>
               <a:rPr lang="en-US" sz="1200" dirty="0">
                 <a:solidFill>
-                  <a:srgbClr val="17152D"/>
+                  <a:srgbClr val="F1F5F9"/>
                 </a:solidFill>
               </a:rPr>
               <a:t>• Real Tree Validation: Checks every candidate path against the fetched repository tree.</a:t>
@@ -4554,7 +4554,7 @@
             <a:r>
               <a:rPr lang="en-US" sz="1200" dirty="0">
                 <a:solidFill>
-                  <a:srgbClr val="17152D"/>
+                  <a:srgbClr val="F1F5F9"/>
                 </a:solidFill>
               </a:rPr>
               <a:t>• Hallucination Rejection: Nonexistent paths and hallucinated source IDs are demoted to UNKNOWN and logged in the audit ledger.</a:t>
@@ -4580,7 +4580,7 @@
             <a:r>
               <a:rPr lang="en-US" sz="1200" dirty="0">
                 <a:solidFill>
-                  <a:srgbClr val="17152D"/>
+                  <a:srgbClr val="F1F5F9"/>
                 </a:solidFill>
               </a:rPr>
               <a:t>• Safe Missing-Key Fallback: If GEMMA_API_KEY is absent, the deterministic baseline compiler activates. Zero broken screens or dummy results.</a:t>
@@ -4606,7 +4606,7 @@
             <a:r>
               <a:rPr lang="en-US" sz="1200" dirty="0">
                 <a:solidFill>
-                  <a:srgbClr val="17152D"/>
+                  <a:srgbClr val="F1F5F9"/>
                 </a:solidFill>
               </a:rPr>
               <a:t>• Zero Code Execution: Never runs repository scripts, never executes scanned code on server.</a:t>
@@ -4629,7 +4629,7 @@
     <p:bg>
       <p:bgPr>
         <a:solidFill>
-          <a:srgbClr val="F7F6FF"/>
+          <a:srgbClr val="0B1020"/>
         </a:solidFill>
       </p:bgPr>
     </p:bg>
@@ -4674,7 +4674,7 @@
             <a:r>
               <a:rPr lang="en-US" sz="1200" b="1" dirty="0">
                 <a:solidFill>
-                  <a:srgbClr val="7057F5"/>
+                  <a:srgbClr val="A78BFA"/>
                 </a:solidFill>
                 <a:latin typeface="Arial" pitchFamily="34" charset="0"/>
                 <a:ea typeface="Arial" pitchFamily="34" charset="-122"/>
@@ -4713,7 +4713,7 @@
             <a:r>
               <a:rPr lang="en-US" sz="2600" b="1" dirty="0">
                 <a:solidFill>
-                  <a:srgbClr val="17152D"/>
+                  <a:srgbClr val="F1F5F9"/>
                 </a:solidFill>
                 <a:latin typeface="Arial" pitchFamily="34" charset="0"/>
                 <a:ea typeface="Arial" pitchFamily="34" charset="-122"/>
@@ -6879,7 +6879,7 @@
     <p:bg>
       <p:bgPr>
         <a:solidFill>
-          <a:srgbClr val="F7F6FF"/>
+          <a:srgbClr val="0B1020"/>
         </a:solidFill>
       </p:bgPr>
     </p:bg>
@@ -6924,7 +6924,7 @@
             <a:r>
               <a:rPr lang="en-US" sz="1200" b="1" dirty="0">
                 <a:solidFill>
-                  <a:srgbClr val="7057F5"/>
+                  <a:srgbClr val="A78BFA"/>
                 </a:solidFill>
                 <a:latin typeface="Arial" pitchFamily="34" charset="0"/>
                 <a:ea typeface="Arial" pitchFamily="34" charset="-122"/>
@@ -6963,7 +6963,7 @@
             <a:r>
               <a:rPr lang="en-US" sz="2800" b="1" dirty="0">
                 <a:solidFill>
-                  <a:srgbClr val="17152D"/>
+                  <a:srgbClr val="F1F5F9"/>
                 </a:solidFill>
                 <a:latin typeface="Arial" pitchFamily="34" charset="0"/>
                 <a:ea typeface="Arial" pitchFamily="34" charset="-122"/>
@@ -6994,7 +6994,7 @@
           </a:solidFill>
           <a:ln w="25400">
             <a:solidFill>
-              <a:srgbClr val="7057F5"/>
+              <a:srgbClr val="A78BFA"/>
             </a:solidFill>
             <a:prstDash val="solid"/>
           </a:ln>
@@ -7030,7 +7030,7 @@
             <a:r>
               <a:rPr lang="en-US" sz="1500" i="1" dirty="0">
                 <a:solidFill>
-                  <a:srgbClr val="17152D"/>
+                  <a:srgbClr val="F1F5F9"/>
                 </a:solidFill>
               </a:rPr>
               <a:t>"IssueLift turns an open issue into a reviewable Contribution Contract and evidence-to-test map before coding begins. The deterministic Claim Gate can be inspected and improved; the public ProofBench lets contributors add counterexamples whenever a path, citation, requirement or test-evidence label is wrong. This makes reliability rules—not only UI code—open to community inspection and extension. We claim no impact numbers until measured."</a:t>
@@ -7066,7 +7066,7 @@
             <a:r>
               <a:rPr lang="en-US" sz="1300" b="1" dirty="0">
                 <a:solidFill>
-                  <a:srgbClr val="7057F5"/>
+                  <a:srgbClr val="A78BFA"/>
                 </a:solidFill>
               </a:rPr>
               <a:t>COMMUNITY PARTICIPATION WITHOUT TOUCHING MODEL WEIGHTS</a:t>
@@ -7105,7 +7105,7 @@
             <a:r>
               <a:rPr lang="en-US" sz="1200" dirty="0">
                 <a:solidFill>
-                  <a:srgbClr val="17152D"/>
+                  <a:srgbClr val="F1F5F9"/>
                 </a:solidFill>
               </a:rPr>
               <a:t>1. Inspectable Reliability: Proprietary AI tools hide reasoning failures behind opaque confidence scores. IssueLift makes every invariant inspectable in public fixtures.</a:t>
@@ -7131,7 +7131,7 @@
             <a:r>
               <a:rPr lang="en-US" sz="1200" dirty="0">
                 <a:solidFill>
-                  <a:srgbClr val="17152D"/>
+                  <a:srgbClr val="F1F5F9"/>
                 </a:solidFill>
               </a:rPr>
               <a:t>2. Community Counterexamples: A newcomer who finds a hallucinated path or mislabeled test file can submit a fixture in eval/fixtures/ without retraining an LLM.</a:t>
@@ -7157,7 +7157,7 @@
             <a:r>
               <a:rPr lang="en-US" sz="1200" dirty="0">
                 <a:solidFill>
-                  <a:srgbClr val="17152D"/>
+                  <a:srgbClr val="F1F5F9"/>
                 </a:solidFill>
               </a:rPr>
               <a:t>3. Sustainable Maintainer Health: Instead of flooding repositories with automated PR spam, open innovation here means higher signal: questions asked early, tests identified first.</a:t>
@@ -7180,7 +7180,7 @@
     <p:bg>
       <p:bgPr>
         <a:solidFill>
-          <a:srgbClr val="F7F6FF"/>
+          <a:srgbClr val="0B1020"/>
         </a:solidFill>
       </p:bgPr>
     </p:bg>
@@ -7225,7 +7225,7 @@
             <a:r>
               <a:rPr lang="en-US" sz="1200" b="1" dirty="0">
                 <a:solidFill>
-                  <a:srgbClr val="7057F5"/>
+                  <a:srgbClr val="A78BFA"/>
                 </a:solidFill>
                 <a:latin typeface="Arial" pitchFamily="34" charset="0"/>
                 <a:ea typeface="Arial" pitchFamily="34" charset="-122"/>
@@ -7264,7 +7264,7 @@
             <a:r>
               <a:rPr lang="en-US" sz="2600" b="1" dirty="0">
                 <a:solidFill>
-                  <a:srgbClr val="17152D"/>
+                  <a:srgbClr val="F1F5F9"/>
                 </a:solidFill>
                 <a:latin typeface="Arial" pitchFamily="34" charset="0"/>
                 <a:ea typeface="Arial" pitchFamily="34" charset="-122"/>

--- a/submission/IssueLift_Submission.pptx
+++ b/submission/IssueLift_Submission.pptx
@@ -1506,8 +1506,8 @@
         </p:nvSpPr>
         <p:spPr>
           <a:xfrm>
-            <a:off x="731520" y="548640"/>
-            <a:ext cx="10515600" cy="365760"/>
+            <a:off x="731520" y="457200"/>
+            <a:ext cx="10515600" cy="320040"/>
           </a:xfrm>
           <a:prstGeom prst="rect">
             <a:avLst/>
@@ -1545,8 +1545,8 @@
         </p:nvSpPr>
         <p:spPr>
           <a:xfrm>
-            <a:off x="731520" y="1005840"/>
-            <a:ext cx="10515600" cy="914400"/>
+            <a:off x="731520" y="868680"/>
+            <a:ext cx="10515600" cy="822960"/>
           </a:xfrm>
           <a:prstGeom prst="rect">
             <a:avLst/>
@@ -1562,7 +1562,7 @@
               <a:buNone/>
             </a:pPr>
             <a:r>
-              <a:rPr lang="en-US" sz="4400" b="1" dirty="0">
+              <a:rPr lang="en-US" sz="4200" b="1" dirty="0">
                 <a:solidFill>
                   <a:srgbClr val="F1F5F9"/>
                 </a:solidFill>
@@ -1572,7 +1572,7 @@
               </a:rPr>
               <a:t>IssueLift v1.3</a:t>
             </a:r>
-            <a:endParaRPr lang="en-US" sz="4400" dirty="0"/>
+            <a:endParaRPr lang="en-US" sz="4200" dirty="0"/>
           </a:p>
         </p:txBody>
       </p:sp>
@@ -1584,8 +1584,8 @@
         </p:nvSpPr>
         <p:spPr>
           <a:xfrm>
-            <a:off x="731520" y="1920240"/>
-            <a:ext cx="10515600" cy="548640"/>
+            <a:off x="731520" y="1737360"/>
+            <a:ext cx="10515600" cy="457200"/>
           </a:xfrm>
           <a:prstGeom prst="rect">
             <a:avLst/>
@@ -1601,7 +1601,7 @@
               <a:buNone/>
             </a:pPr>
             <a:r>
-              <a:rPr lang="en-US" sz="2000" dirty="0">
+              <a:rPr lang="en-US" sz="1800" dirty="0">
                 <a:solidFill>
                   <a:srgbClr val="60A5FA"/>
                 </a:solidFill>
@@ -1611,30 +1611,69 @@
               </a:rPr>
               <a:t>From Issue URL to a Proven Next Step Before Anyone Edits Code</a:t>
             </a:r>
-            <a:endParaRPr lang="en-US" sz="2000" dirty="0"/>
+            <a:endParaRPr lang="en-US" sz="1800" dirty="0"/>
           </a:p>
         </p:txBody>
       </p:sp>
       <p:sp>
         <p:nvSpPr>
-          <p:cNvPr id="5" name="Shape 3"/>
+          <p:cNvPr id="5" name="Text 3"/>
+          <p:cNvSpPr/>
+          <p:nvPr/>
+        </p:nvSpPr>
+        <p:spPr>
+          <a:xfrm>
+            <a:off x="731520" y="2240280"/>
+            <a:ext cx="10515600" cy="320040"/>
+          </a:xfrm>
+          <a:prstGeom prst="rect">
+            <a:avLst/>
+          </a:prstGeom>
+          <a:noFill/>
+          <a:ln/>
+        </p:spPr>
+        <p:txBody>
+          <a:bodyPr wrap="square" rtlCol="0" anchor="ctr"/>
+          <a:lstStyle/>
+          <a:p>
+            <a:pPr indent="0" marL="0">
+              <a:buNone/>
+            </a:pPr>
+            <a:r>
+              <a:rPr lang="en-US" sz="1200" b="1" dirty="0">
+                <a:solidFill>
+                  <a:srgbClr val="2DD4BF"/>
+                </a:solidFill>
+                <a:latin typeface="Arial" pitchFamily="34" charset="0"/>
+                <a:ea typeface="Arial" pitchFamily="34" charset="-122"/>
+                <a:cs typeface="Arial" pitchFamily="34" charset="-120"/>
+              </a:rPr>
+              <a:t>Live App: https://issue-lift.vercel.app/   •   GitHub: https://github.com/rudraarcadeskills-art/IssueLift</a:t>
+            </a:r>
+            <a:endParaRPr lang="en-US" sz="1200" dirty="0"/>
+          </a:p>
+        </p:txBody>
+      </p:sp>
+      <p:sp>
+        <p:nvSpPr>
+          <p:cNvPr id="6" name="Shape 4"/>
           <p:cNvSpPr/>
           <p:nvPr/>
         </p:nvSpPr>
         <p:spPr>
           <a:xfrm>
             <a:off x="731520" y="2651760"/>
-            <a:ext cx="10698480" cy="3200400"/>
+            <a:ext cx="10698480" cy="3474720"/>
           </a:xfrm>
           <a:prstGeom prst="rect">
             <a:avLst/>
           </a:prstGeom>
           <a:solidFill>
-            <a:srgbClr val="FFFFFF"/>
+            <a:srgbClr val="121A2B"/>
           </a:solidFill>
           <a:ln w="12700">
             <a:solidFill>
-              <a:srgbClr val="E2DFF4"/>
+              <a:srgbClr val="232F48"/>
             </a:solidFill>
             <a:prstDash val="solid"/>
           </a:ln>
@@ -1642,14 +1681,14 @@
       </p:sp>
       <p:sp>
         <p:nvSpPr>
-          <p:cNvPr id="6" name="Text 4"/>
+          <p:cNvPr id="7" name="Text 5"/>
           <p:cNvSpPr/>
           <p:nvPr/>
         </p:nvSpPr>
         <p:spPr>
           <a:xfrm>
-            <a:off x="1097280" y="2926080"/>
-            <a:ext cx="10058400" cy="365760"/>
+            <a:off x="1097280" y="2880360"/>
+            <a:ext cx="10058400" cy="320040"/>
           </a:xfrm>
           <a:prstGeom prst="rect">
             <a:avLst/>
@@ -1673,7 +1712,7 @@
                 <a:ea typeface="Arial" pitchFamily="34" charset="-122"/>
                 <a:cs typeface="Arial" pitchFamily="34" charset="-120"/>
               </a:rPr>
-              <a:t>THE CORE PROMISE &amp; INNOVATION</a:t>
+              <a:t>THE CORE PROMISE &amp; PRE-IMPLEMENTATION INNOVATION</a:t>
             </a:r>
             <a:endParaRPr lang="en-US" sz="1400" dirty="0"/>
           </a:p>
@@ -1681,14 +1720,14 @@
       </p:sp>
       <p:sp>
         <p:nvSpPr>
-          <p:cNvPr id="7" name="Text 5"/>
+          <p:cNvPr id="8" name="Text 6"/>
           <p:cNvSpPr/>
           <p:nvPr/>
         </p:nvSpPr>
         <p:spPr>
           <a:xfrm>
-            <a:off x="1097280" y="3383280"/>
-            <a:ext cx="10058400" cy="2103120"/>
+            <a:off x="1097280" y="3337560"/>
+            <a:ext cx="10058400" cy="2560320"/>
           </a:xfrm>
           <a:prstGeom prst="rect">
             <a:avLst/>
@@ -1715,7 +1754,7 @@
                 <a:ea typeface="Arial" pitchFamily="34" charset="-122"/>
                 <a:cs typeface="Arial" pitchFamily="34" charset="-120"/>
               </a:rPr>
-              <a:t>• The Problem: Newcomers pick issues, spend days coding, only to be rejected because their definition of "done" diverged from maintainer intent, or because tests were never identified.</a:t>
+              <a:t>• The Problem: Newcomers pick issues, spend days coding, only to be rejected because their definition of "done" diverged from maintainer intent, or because tests were never identified before coding.</a:t>
             </a:r>
             <a:endParaRPr lang="en-US" sz="1300" dirty="0"/>
           </a:p>
@@ -1744,7 +1783,7 @@
                 <a:ea typeface="Arial" pitchFamily="34" charset="-122"/>
                 <a:cs typeface="Arial" pitchFamily="34" charset="-120"/>
               </a:rPr>
-              <a:t>• The Solution: IssueLift intercepts the contribution workflow BEFORE code edits begin. It compiles real GitHub issues into evidence-backed Contribution Contracts, maps criteria to test evidence, and drafts copy-ready maintainer questions.</a:t>
+              <a:t>• The Solution: IssueLift intercepts the workflow BEFORE code edits begin. Paste any public GitHub issue URL: IssueLift indexes bounded repo manifests, uses Google Gemma 4 to compile a structured Contribution Contract, traces requirements to real test evidence, and drafts copy-ready maintainer questions.</a:t>
             </a:r>
             <a:endParaRPr lang="en-US" sz="1300" dirty="0"/>
           </a:p>
@@ -1773,7 +1812,7 @@
                 <a:ea typeface="Arial" pitchFamily="34" charset="-122"/>
                 <a:cs typeface="Arial" pitchFamily="34" charset="-120"/>
               </a:rPr>
-              <a:t>• Zero-Budget Invariant: Real GitHub REST data + Google Gemma 4 free tier + deterministic offline Claim Gate. Never executes untrusted repository code.</a:t>
+              <a:t>• Zero-Budget Invariant: Real GitHub REST data + Google Gemma 4 free tier + deterministic offline Claim Gate. Never executes untrusted repository code on the host server.</a:t>
             </a:r>
             <a:endParaRPr lang="en-US" sz="1300" dirty="0"/>
           </a:p>
@@ -1819,7 +1858,7 @@
         </p:nvSpPr>
         <p:spPr>
           <a:xfrm>
-            <a:off x="731520" y="548640"/>
+            <a:off x="731520" y="457200"/>
             <a:ext cx="10515600" cy="274320"/>
           </a:xfrm>
           <a:prstGeom prst="rect">
@@ -1858,7 +1897,7 @@
         </p:nvSpPr>
         <p:spPr>
           <a:xfrm>
-            <a:off x="731520" y="914400"/>
+            <a:off x="731520" y="822960"/>
             <a:ext cx="10515600" cy="548640"/>
           </a:xfrm>
           <a:prstGeom prst="rect">
@@ -1904,8 +1943,8 @@
           </p:nvPr>
         </p:nvGraphicFramePr>
         <p:xfrm>
-          <a:off x="731520" y="1645920"/>
-          <a:ext cx="10698480" cy="4389120"/>
+          <a:off x="731520" y="1554480"/>
+          <a:ext cx="10698480" cy="4572000"/>
         </p:xfrm>
         <a:graphic>
           <a:graphicData uri="http://schemas.openxmlformats.org/drawingml/2006/table">
@@ -1917,7 +1956,7 @@
                 <a:gridCol w="2674620"/>
                 <a:gridCol w="2674620"/>
               </a:tblGrid>
-              <a:tr h="877824">
+              <a:tr h="914400">
                 <a:tc>
                   <a:txBody>
                     <a:bodyPr/>
@@ -1947,7 +1986,7 @@
                   <a:tcPr marL="91440" marR="91440" marT="45720" marB="45720">
                     <a:lnL w="12700" cap="flat" cmpd="sng" algn="ctr">
                       <a:solidFill>
-                        <a:srgbClr val="D0CCE8"/>
+                        <a:srgbClr val="232F48"/>
                       </a:solidFill>
                       <a:prstDash val="solid"/>
                       <a:round/>
@@ -1956,7 +1995,7 @@
                     </a:lnL>
                     <a:lnR w="12700" cap="flat" cmpd="sng" algn="ctr">
                       <a:solidFill>
-                        <a:srgbClr val="D0CCE8"/>
+                        <a:srgbClr val="232F48"/>
                       </a:solidFill>
                       <a:prstDash val="solid"/>
                       <a:round/>
@@ -1965,7 +2004,7 @@
                     </a:lnR>
                     <a:lnT w="12700" cap="flat" cmpd="sng" algn="ctr">
                       <a:solidFill>
-                        <a:srgbClr val="D0CCE8"/>
+                        <a:srgbClr val="232F48"/>
                       </a:solidFill>
                       <a:prstDash val="solid"/>
                       <a:round/>
@@ -1974,7 +2013,7 @@
                     </a:lnT>
                     <a:lnB w="12700" cap="flat" cmpd="sng" algn="ctr">
                       <a:solidFill>
-                        <a:srgbClr val="D0CCE8"/>
+                        <a:srgbClr val="232F48"/>
                       </a:solidFill>
                       <a:prstDash val="solid"/>
                       <a:round/>
@@ -1982,7 +2021,7 @@
                       <a:tailEnd type="none" w="med" len="med"/>
                     </a:lnB>
                     <a:solidFill>
-                      <a:srgbClr val="7057F5"/>
+                      <a:srgbClr val="1E293B"/>
                     </a:solidFill>
                   </a:tcPr>
                 </a:tc>
@@ -2015,7 +2054,7 @@
                   <a:tcPr marL="91440" marR="91440" marT="45720" marB="45720">
                     <a:lnL w="12700" cap="flat" cmpd="sng" algn="ctr">
                       <a:solidFill>
-                        <a:srgbClr val="D0CCE8"/>
+                        <a:srgbClr val="232F48"/>
                       </a:solidFill>
                       <a:prstDash val="solid"/>
                       <a:round/>
@@ -2024,7 +2063,7 @@
                     </a:lnL>
                     <a:lnR w="12700" cap="flat" cmpd="sng" algn="ctr">
                       <a:solidFill>
-                        <a:srgbClr val="D0CCE8"/>
+                        <a:srgbClr val="232F48"/>
                       </a:solidFill>
                       <a:prstDash val="solid"/>
                       <a:round/>
@@ -2033,7 +2072,7 @@
                     </a:lnR>
                     <a:lnT w="12700" cap="flat" cmpd="sng" algn="ctr">
                       <a:solidFill>
-                        <a:srgbClr val="D0CCE8"/>
+                        <a:srgbClr val="232F48"/>
                       </a:solidFill>
                       <a:prstDash val="solid"/>
                       <a:round/>
@@ -2042,7 +2081,7 @@
                     </a:lnT>
                     <a:lnB w="12700" cap="flat" cmpd="sng" algn="ctr">
                       <a:solidFill>
-                        <a:srgbClr val="D0CCE8"/>
+                        <a:srgbClr val="232F48"/>
                       </a:solidFill>
                       <a:prstDash val="solid"/>
                       <a:round/>
@@ -2050,7 +2089,7 @@
                       <a:tailEnd type="none" w="med" len="med"/>
                     </a:lnB>
                     <a:solidFill>
-                      <a:srgbClr val="7057F5"/>
+                      <a:srgbClr val="1E293B"/>
                     </a:solidFill>
                   </a:tcPr>
                 </a:tc>
@@ -2083,7 +2122,7 @@
                   <a:tcPr marL="91440" marR="91440" marT="45720" marB="45720">
                     <a:lnL w="12700" cap="flat" cmpd="sng" algn="ctr">
                       <a:solidFill>
-                        <a:srgbClr val="D0CCE8"/>
+                        <a:srgbClr val="232F48"/>
                       </a:solidFill>
                       <a:prstDash val="solid"/>
                       <a:round/>
@@ -2092,7 +2131,7 @@
                     </a:lnL>
                     <a:lnR w="12700" cap="flat" cmpd="sng" algn="ctr">
                       <a:solidFill>
-                        <a:srgbClr val="D0CCE8"/>
+                        <a:srgbClr val="232F48"/>
                       </a:solidFill>
                       <a:prstDash val="solid"/>
                       <a:round/>
@@ -2101,7 +2140,7 @@
                     </a:lnR>
                     <a:lnT w="12700" cap="flat" cmpd="sng" algn="ctr">
                       <a:solidFill>
-                        <a:srgbClr val="D0CCE8"/>
+                        <a:srgbClr val="232F48"/>
                       </a:solidFill>
                       <a:prstDash val="solid"/>
                       <a:round/>
@@ -2110,7 +2149,7 @@
                     </a:lnT>
                     <a:lnB w="12700" cap="flat" cmpd="sng" algn="ctr">
                       <a:solidFill>
-                        <a:srgbClr val="D0CCE8"/>
+                        <a:srgbClr val="232F48"/>
                       </a:solidFill>
                       <a:prstDash val="solid"/>
                       <a:round/>
@@ -2118,7 +2157,7 @@
                       <a:tailEnd type="none" w="med" len="med"/>
                     </a:lnB>
                     <a:solidFill>
-                      <a:srgbClr val="7057F5"/>
+                      <a:srgbClr val="1E293B"/>
                     </a:solidFill>
                   </a:tcPr>
                 </a:tc>
@@ -2151,7 +2190,7 @@
                   <a:tcPr marL="91440" marR="91440" marT="45720" marB="45720">
                     <a:lnL w="12700" cap="flat" cmpd="sng" algn="ctr">
                       <a:solidFill>
-                        <a:srgbClr val="D0CCE8"/>
+                        <a:srgbClr val="232F48"/>
                       </a:solidFill>
                       <a:prstDash val="solid"/>
                       <a:round/>
@@ -2160,7 +2199,7 @@
                     </a:lnL>
                     <a:lnR w="12700" cap="flat" cmpd="sng" algn="ctr">
                       <a:solidFill>
-                        <a:srgbClr val="D0CCE8"/>
+                        <a:srgbClr val="232F48"/>
                       </a:solidFill>
                       <a:prstDash val="solid"/>
                       <a:round/>
@@ -2169,7 +2208,7 @@
                     </a:lnR>
                     <a:lnT w="12700" cap="flat" cmpd="sng" algn="ctr">
                       <a:solidFill>
-                        <a:srgbClr val="D0CCE8"/>
+                        <a:srgbClr val="232F48"/>
                       </a:solidFill>
                       <a:prstDash val="solid"/>
                       <a:round/>
@@ -2178,7 +2217,7 @@
                     </a:lnT>
                     <a:lnB w="12700" cap="flat" cmpd="sng" algn="ctr">
                       <a:solidFill>
-                        <a:srgbClr val="D0CCE8"/>
+                        <a:srgbClr val="232F48"/>
                       </a:solidFill>
                       <a:prstDash val="solid"/>
                       <a:round/>
@@ -2186,12 +2225,12 @@
                       <a:tailEnd type="none" w="med" len="med"/>
                     </a:lnB>
                     <a:solidFill>
-                      <a:srgbClr val="7057F5"/>
+                      <a:srgbClr val="1E293B"/>
                     </a:solidFill>
                   </a:tcPr>
                 </a:tc>
               </a:tr>
-              <a:tr h="877824">
+              <a:tr h="914400">
                 <a:tc>
                   <a:txBody>
                     <a:bodyPr/>
@@ -2203,7 +2242,7 @@
                       <a:r>
                         <a:rPr lang="en-US" sz="1100" b="1" dirty="0">
                           <a:solidFill>
-                            <a:srgbClr val="000000"/>
+                            <a:srgbClr val="F1F5F9"/>
                           </a:solidFill>
                           <a:latin typeface="Arial" pitchFamily="34" charset="0"/>
                           <a:ea typeface="Arial" pitchFamily="34" charset="-122"/>
@@ -2221,7 +2260,7 @@
                   <a:tcPr marL="91440" marR="91440" marT="45720" marB="45720">
                     <a:lnL w="12700" cap="flat" cmpd="sng" algn="ctr">
                       <a:solidFill>
-                        <a:srgbClr val="D0CCE8"/>
+                        <a:srgbClr val="232F48"/>
                       </a:solidFill>
                       <a:prstDash val="solid"/>
                       <a:round/>
@@ -2230,7 +2269,7 @@
                     </a:lnL>
                     <a:lnR w="12700" cap="flat" cmpd="sng" algn="ctr">
                       <a:solidFill>
-                        <a:srgbClr val="D0CCE8"/>
+                        <a:srgbClr val="232F48"/>
                       </a:solidFill>
                       <a:prstDash val="solid"/>
                       <a:round/>
@@ -2239,7 +2278,7 @@
                     </a:lnR>
                     <a:lnT w="12700" cap="flat" cmpd="sng" algn="ctr">
                       <a:solidFill>
-                        <a:srgbClr val="D0CCE8"/>
+                        <a:srgbClr val="232F48"/>
                       </a:solidFill>
                       <a:prstDash val="solid"/>
                       <a:round/>
@@ -2248,13 +2287,16 @@
                     </a:lnT>
                     <a:lnB w="12700" cap="flat" cmpd="sng" algn="ctr">
                       <a:solidFill>
-                        <a:srgbClr val="D0CCE8"/>
+                        <a:srgbClr val="232F48"/>
                       </a:solidFill>
                       <a:prstDash val="solid"/>
                       <a:round/>
                       <a:headEnd type="none" w="med" len="med"/>
                       <a:tailEnd type="none" w="med" len="med"/>
                     </a:lnB>
+                    <a:solidFill>
+                      <a:srgbClr val="121A2B"/>
+                    </a:solidFill>
                   </a:tcPr>
                 </a:tc>
                 <a:tc>
@@ -2268,7 +2310,7 @@
                       <a:r>
                         <a:rPr lang="en-US" sz="1100" dirty="0">
                           <a:solidFill>
-                            <a:srgbClr val="000000"/>
+                            <a:srgbClr val="F1F5F9"/>
                           </a:solidFill>
                           <a:latin typeface="Arial" pitchFamily="34" charset="0"/>
                           <a:ea typeface="Arial" pitchFamily="34" charset="-122"/>
@@ -2286,7 +2328,7 @@
                   <a:tcPr marL="91440" marR="91440" marT="45720" marB="45720">
                     <a:lnL w="12700" cap="flat" cmpd="sng" algn="ctr">
                       <a:solidFill>
-                        <a:srgbClr val="D0CCE8"/>
+                        <a:srgbClr val="232F48"/>
                       </a:solidFill>
                       <a:prstDash val="solid"/>
                       <a:round/>
@@ -2295,7 +2337,7 @@
                     </a:lnL>
                     <a:lnR w="12700" cap="flat" cmpd="sng" algn="ctr">
                       <a:solidFill>
-                        <a:srgbClr val="D0CCE8"/>
+                        <a:srgbClr val="232F48"/>
                       </a:solidFill>
                       <a:prstDash val="solid"/>
                       <a:round/>
@@ -2304,7 +2346,7 @@
                     </a:lnR>
                     <a:lnT w="12700" cap="flat" cmpd="sng" algn="ctr">
                       <a:solidFill>
-                        <a:srgbClr val="D0CCE8"/>
+                        <a:srgbClr val="232F48"/>
                       </a:solidFill>
                       <a:prstDash val="solid"/>
                       <a:round/>
@@ -2313,13 +2355,16 @@
                     </a:lnT>
                     <a:lnB w="12700" cap="flat" cmpd="sng" algn="ctr">
                       <a:solidFill>
-                        <a:srgbClr val="D0CCE8"/>
+                        <a:srgbClr val="232F48"/>
                       </a:solidFill>
                       <a:prstDash val="solid"/>
                       <a:round/>
                       <a:headEnd type="none" w="med" len="med"/>
                       <a:tailEnd type="none" w="med" len="med"/>
                     </a:lnB>
+                    <a:solidFill>
+                      <a:srgbClr val="121A2B"/>
+                    </a:solidFill>
                   </a:tcPr>
                 </a:tc>
                 <a:tc>
@@ -2333,7 +2378,7 @@
                       <a:r>
                         <a:rPr lang="en-US" sz="1100" dirty="0">
                           <a:solidFill>
-                            <a:srgbClr val="000000"/>
+                            <a:srgbClr val="F1F5F9"/>
                           </a:solidFill>
                           <a:latin typeface="Arial" pitchFamily="34" charset="0"/>
                           <a:ea typeface="Arial" pitchFamily="34" charset="-122"/>
@@ -2351,7 +2396,7 @@
                   <a:tcPr marL="91440" marR="91440" marT="45720" marB="45720">
                     <a:lnL w="12700" cap="flat" cmpd="sng" algn="ctr">
                       <a:solidFill>
-                        <a:srgbClr val="D0CCE8"/>
+                        <a:srgbClr val="232F48"/>
                       </a:solidFill>
                       <a:prstDash val="solid"/>
                       <a:round/>
@@ -2360,7 +2405,7 @@
                     </a:lnL>
                     <a:lnR w="12700" cap="flat" cmpd="sng" algn="ctr">
                       <a:solidFill>
-                        <a:srgbClr val="D0CCE8"/>
+                        <a:srgbClr val="232F48"/>
                       </a:solidFill>
                       <a:prstDash val="solid"/>
                       <a:round/>
@@ -2369,7 +2414,7 @@
                     </a:lnR>
                     <a:lnT w="12700" cap="flat" cmpd="sng" algn="ctr">
                       <a:solidFill>
-                        <a:srgbClr val="D0CCE8"/>
+                        <a:srgbClr val="232F48"/>
                       </a:solidFill>
                       <a:prstDash val="solid"/>
                       <a:round/>
@@ -2378,13 +2423,16 @@
                     </a:lnT>
                     <a:lnB w="12700" cap="flat" cmpd="sng" algn="ctr">
                       <a:solidFill>
-                        <a:srgbClr val="D0CCE8"/>
+                        <a:srgbClr val="232F48"/>
                       </a:solidFill>
                       <a:prstDash val="solid"/>
                       <a:round/>
                       <a:headEnd type="none" w="med" len="med"/>
                       <a:tailEnd type="none" w="med" len="med"/>
                     </a:lnB>
+                    <a:solidFill>
+                      <a:srgbClr val="121A2B"/>
+                    </a:solidFill>
                   </a:tcPr>
                 </a:tc>
                 <a:tc>
@@ -2398,7 +2446,7 @@
                       <a:r>
                         <a:rPr lang="en-US" sz="1100" dirty="0">
                           <a:solidFill>
-                            <a:srgbClr val="000000"/>
+                            <a:srgbClr val="F1F5F9"/>
                           </a:solidFill>
                           <a:latin typeface="Arial" pitchFamily="34" charset="0"/>
                           <a:ea typeface="Arial" pitchFamily="34" charset="-122"/>
@@ -2416,7 +2464,7 @@
                   <a:tcPr marL="91440" marR="91440" marT="45720" marB="45720">
                     <a:lnL w="12700" cap="flat" cmpd="sng" algn="ctr">
                       <a:solidFill>
-                        <a:srgbClr val="D0CCE8"/>
+                        <a:srgbClr val="232F48"/>
                       </a:solidFill>
                       <a:prstDash val="solid"/>
                       <a:round/>
@@ -2425,7 +2473,7 @@
                     </a:lnL>
                     <a:lnR w="12700" cap="flat" cmpd="sng" algn="ctr">
                       <a:solidFill>
-                        <a:srgbClr val="D0CCE8"/>
+                        <a:srgbClr val="232F48"/>
                       </a:solidFill>
                       <a:prstDash val="solid"/>
                       <a:round/>
@@ -2434,7 +2482,7 @@
                     </a:lnR>
                     <a:lnT w="12700" cap="flat" cmpd="sng" algn="ctr">
                       <a:solidFill>
-                        <a:srgbClr val="D0CCE8"/>
+                        <a:srgbClr val="232F48"/>
                       </a:solidFill>
                       <a:prstDash val="solid"/>
                       <a:round/>
@@ -2443,17 +2491,20 @@
                     </a:lnT>
                     <a:lnB w="12700" cap="flat" cmpd="sng" algn="ctr">
                       <a:solidFill>
-                        <a:srgbClr val="D0CCE8"/>
+                        <a:srgbClr val="232F48"/>
                       </a:solidFill>
                       <a:prstDash val="solid"/>
                       <a:round/>
                       <a:headEnd type="none" w="med" len="med"/>
                       <a:tailEnd type="none" w="med" len="med"/>
                     </a:lnB>
+                    <a:solidFill>
+                      <a:srgbClr val="121A2B"/>
+                    </a:solidFill>
                   </a:tcPr>
                 </a:tc>
               </a:tr>
-              <a:tr h="877824">
+              <a:tr h="914400">
                 <a:tc>
                   <a:txBody>
                     <a:bodyPr/>
@@ -2465,7 +2516,7 @@
                       <a:r>
                         <a:rPr lang="en-US" sz="1100" b="1" dirty="0">
                           <a:solidFill>
-                            <a:srgbClr val="000000"/>
+                            <a:srgbClr val="F1F5F9"/>
                           </a:solidFill>
                           <a:latin typeface="Arial" pitchFamily="34" charset="0"/>
                           <a:ea typeface="Arial" pitchFamily="34" charset="-122"/>
@@ -2483,7 +2534,7 @@
                   <a:tcPr marL="91440" marR="91440" marT="45720" marB="45720">
                     <a:lnL w="12700" cap="flat" cmpd="sng" algn="ctr">
                       <a:solidFill>
-                        <a:srgbClr val="D0CCE8"/>
+                        <a:srgbClr val="232F48"/>
                       </a:solidFill>
                       <a:prstDash val="solid"/>
                       <a:round/>
@@ -2492,7 +2543,7 @@
                     </a:lnL>
                     <a:lnR w="12700" cap="flat" cmpd="sng" algn="ctr">
                       <a:solidFill>
-                        <a:srgbClr val="D0CCE8"/>
+                        <a:srgbClr val="232F48"/>
                       </a:solidFill>
                       <a:prstDash val="solid"/>
                       <a:round/>
@@ -2501,7 +2552,7 @@
                     </a:lnR>
                     <a:lnT w="12700" cap="flat" cmpd="sng" algn="ctr">
                       <a:solidFill>
-                        <a:srgbClr val="D0CCE8"/>
+                        <a:srgbClr val="232F48"/>
                       </a:solidFill>
                       <a:prstDash val="solid"/>
                       <a:round/>
@@ -2510,13 +2561,16 @@
                     </a:lnT>
                     <a:lnB w="12700" cap="flat" cmpd="sng" algn="ctr">
                       <a:solidFill>
-                        <a:srgbClr val="D0CCE8"/>
+                        <a:srgbClr val="232F48"/>
                       </a:solidFill>
                       <a:prstDash val="solid"/>
                       <a:round/>
                       <a:headEnd type="none" w="med" len="med"/>
                       <a:tailEnd type="none" w="med" len="med"/>
                     </a:lnB>
+                    <a:solidFill>
+                      <a:srgbClr val="121A2B"/>
+                    </a:solidFill>
                   </a:tcPr>
                 </a:tc>
                 <a:tc>
@@ -2530,7 +2584,7 @@
                       <a:r>
                         <a:rPr lang="en-US" sz="1100" dirty="0">
                           <a:solidFill>
-                            <a:srgbClr val="000000"/>
+                            <a:srgbClr val="F1F5F9"/>
                           </a:solidFill>
                           <a:latin typeface="Arial" pitchFamily="34" charset="0"/>
                           <a:ea typeface="Arial" pitchFamily="34" charset="-122"/>
@@ -2548,7 +2602,7 @@
                   <a:tcPr marL="91440" marR="91440" marT="45720" marB="45720">
                     <a:lnL w="12700" cap="flat" cmpd="sng" algn="ctr">
                       <a:solidFill>
-                        <a:srgbClr val="D0CCE8"/>
+                        <a:srgbClr val="232F48"/>
                       </a:solidFill>
                       <a:prstDash val="solid"/>
                       <a:round/>
@@ -2557,7 +2611,7 @@
                     </a:lnL>
                     <a:lnR w="12700" cap="flat" cmpd="sng" algn="ctr">
                       <a:solidFill>
-                        <a:srgbClr val="D0CCE8"/>
+                        <a:srgbClr val="232F48"/>
                       </a:solidFill>
                       <a:prstDash val="solid"/>
                       <a:round/>
@@ -2566,7 +2620,7 @@
                     </a:lnR>
                     <a:lnT w="12700" cap="flat" cmpd="sng" algn="ctr">
                       <a:solidFill>
-                        <a:srgbClr val="D0CCE8"/>
+                        <a:srgbClr val="232F48"/>
                       </a:solidFill>
                       <a:prstDash val="solid"/>
                       <a:round/>
@@ -2575,13 +2629,16 @@
                     </a:lnT>
                     <a:lnB w="12700" cap="flat" cmpd="sng" algn="ctr">
                       <a:solidFill>
-                        <a:srgbClr val="D0CCE8"/>
+                        <a:srgbClr val="232F48"/>
                       </a:solidFill>
                       <a:prstDash val="solid"/>
                       <a:round/>
                       <a:headEnd type="none" w="med" len="med"/>
                       <a:tailEnd type="none" w="med" len="med"/>
                     </a:lnB>
+                    <a:solidFill>
+                      <a:srgbClr val="121A2B"/>
+                    </a:solidFill>
                   </a:tcPr>
                 </a:tc>
                 <a:tc>
@@ -2595,7 +2652,7 @@
                       <a:r>
                         <a:rPr lang="en-US" sz="1100" dirty="0">
                           <a:solidFill>
-                            <a:srgbClr val="000000"/>
+                            <a:srgbClr val="F1F5F9"/>
                           </a:solidFill>
                           <a:latin typeface="Arial" pitchFamily="34" charset="0"/>
                           <a:ea typeface="Arial" pitchFamily="34" charset="-122"/>
@@ -2613,7 +2670,7 @@
                   <a:tcPr marL="91440" marR="91440" marT="45720" marB="45720">
                     <a:lnL w="12700" cap="flat" cmpd="sng" algn="ctr">
                       <a:solidFill>
-                        <a:srgbClr val="D0CCE8"/>
+                        <a:srgbClr val="232F48"/>
                       </a:solidFill>
                       <a:prstDash val="solid"/>
                       <a:round/>
@@ -2622,7 +2679,7 @@
                     </a:lnL>
                     <a:lnR w="12700" cap="flat" cmpd="sng" algn="ctr">
                       <a:solidFill>
-                        <a:srgbClr val="D0CCE8"/>
+                        <a:srgbClr val="232F48"/>
                       </a:solidFill>
                       <a:prstDash val="solid"/>
                       <a:round/>
@@ -2631,7 +2688,7 @@
                     </a:lnR>
                     <a:lnT w="12700" cap="flat" cmpd="sng" algn="ctr">
                       <a:solidFill>
-                        <a:srgbClr val="D0CCE8"/>
+                        <a:srgbClr val="232F48"/>
                       </a:solidFill>
                       <a:prstDash val="solid"/>
                       <a:round/>
@@ -2640,13 +2697,16 @@
                     </a:lnT>
                     <a:lnB w="12700" cap="flat" cmpd="sng" algn="ctr">
                       <a:solidFill>
-                        <a:srgbClr val="D0CCE8"/>
+                        <a:srgbClr val="232F48"/>
                       </a:solidFill>
                       <a:prstDash val="solid"/>
                       <a:round/>
                       <a:headEnd type="none" w="med" len="med"/>
                       <a:tailEnd type="none" w="med" len="med"/>
                     </a:lnB>
+                    <a:solidFill>
+                      <a:srgbClr val="121A2B"/>
+                    </a:solidFill>
                   </a:tcPr>
                 </a:tc>
                 <a:tc>
@@ -2660,7 +2720,7 @@
                       <a:r>
                         <a:rPr lang="en-US" sz="1100" dirty="0">
                           <a:solidFill>
-                            <a:srgbClr val="000000"/>
+                            <a:srgbClr val="F1F5F9"/>
                           </a:solidFill>
                           <a:latin typeface="Arial" pitchFamily="34" charset="0"/>
                           <a:ea typeface="Arial" pitchFamily="34" charset="-122"/>
@@ -2678,7 +2738,7 @@
                   <a:tcPr marL="91440" marR="91440" marT="45720" marB="45720">
                     <a:lnL w="12700" cap="flat" cmpd="sng" algn="ctr">
                       <a:solidFill>
-                        <a:srgbClr val="D0CCE8"/>
+                        <a:srgbClr val="232F48"/>
                       </a:solidFill>
                       <a:prstDash val="solid"/>
                       <a:round/>
@@ -2687,7 +2747,7 @@
                     </a:lnL>
                     <a:lnR w="12700" cap="flat" cmpd="sng" algn="ctr">
                       <a:solidFill>
-                        <a:srgbClr val="D0CCE8"/>
+                        <a:srgbClr val="232F48"/>
                       </a:solidFill>
                       <a:prstDash val="solid"/>
                       <a:round/>
@@ -2696,7 +2756,7 @@
                     </a:lnR>
                     <a:lnT w="12700" cap="flat" cmpd="sng" algn="ctr">
                       <a:solidFill>
-                        <a:srgbClr val="D0CCE8"/>
+                        <a:srgbClr val="232F48"/>
                       </a:solidFill>
                       <a:prstDash val="solid"/>
                       <a:round/>
@@ -2705,17 +2765,20 @@
                     </a:lnT>
                     <a:lnB w="12700" cap="flat" cmpd="sng" algn="ctr">
                       <a:solidFill>
-                        <a:srgbClr val="D0CCE8"/>
+                        <a:srgbClr val="232F48"/>
                       </a:solidFill>
                       <a:prstDash val="solid"/>
                       <a:round/>
                       <a:headEnd type="none" w="med" len="med"/>
                       <a:tailEnd type="none" w="med" len="med"/>
                     </a:lnB>
+                    <a:solidFill>
+                      <a:srgbClr val="121A2B"/>
+                    </a:solidFill>
                   </a:tcPr>
                 </a:tc>
               </a:tr>
-              <a:tr h="877824">
+              <a:tr h="914400">
                 <a:tc>
                   <a:txBody>
                     <a:bodyPr/>
@@ -2727,7 +2790,7 @@
                       <a:r>
                         <a:rPr lang="en-US" sz="1100" b="1" dirty="0">
                           <a:solidFill>
-                            <a:srgbClr val="000000"/>
+                            <a:srgbClr val="F1F5F9"/>
                           </a:solidFill>
                           <a:latin typeface="Arial" pitchFamily="34" charset="0"/>
                           <a:ea typeface="Arial" pitchFamily="34" charset="-122"/>
@@ -2745,7 +2808,7 @@
                   <a:tcPr marL="91440" marR="91440" marT="45720" marB="45720">
                     <a:lnL w="12700" cap="flat" cmpd="sng" algn="ctr">
                       <a:solidFill>
-                        <a:srgbClr val="D0CCE8"/>
+                        <a:srgbClr val="232F48"/>
                       </a:solidFill>
                       <a:prstDash val="solid"/>
                       <a:round/>
@@ -2754,7 +2817,7 @@
                     </a:lnL>
                     <a:lnR w="12700" cap="flat" cmpd="sng" algn="ctr">
                       <a:solidFill>
-                        <a:srgbClr val="D0CCE8"/>
+                        <a:srgbClr val="232F48"/>
                       </a:solidFill>
                       <a:prstDash val="solid"/>
                       <a:round/>
@@ -2763,7 +2826,7 @@
                     </a:lnR>
                     <a:lnT w="12700" cap="flat" cmpd="sng" algn="ctr">
                       <a:solidFill>
-                        <a:srgbClr val="D0CCE8"/>
+                        <a:srgbClr val="232F48"/>
                       </a:solidFill>
                       <a:prstDash val="solid"/>
                       <a:round/>
@@ -2772,13 +2835,16 @@
                     </a:lnT>
                     <a:lnB w="12700" cap="flat" cmpd="sng" algn="ctr">
                       <a:solidFill>
-                        <a:srgbClr val="D0CCE8"/>
+                        <a:srgbClr val="232F48"/>
                       </a:solidFill>
                       <a:prstDash val="solid"/>
                       <a:round/>
                       <a:headEnd type="none" w="med" len="med"/>
                       <a:tailEnd type="none" w="med" len="med"/>
                     </a:lnB>
+                    <a:solidFill>
+                      <a:srgbClr val="121A2B"/>
+                    </a:solidFill>
                   </a:tcPr>
                 </a:tc>
                 <a:tc>
@@ -2792,7 +2858,7 @@
                       <a:r>
                         <a:rPr lang="en-US" sz="1100" dirty="0">
                           <a:solidFill>
-                            <a:srgbClr val="000000"/>
+                            <a:srgbClr val="F1F5F9"/>
                           </a:solidFill>
                           <a:latin typeface="Arial" pitchFamily="34" charset="0"/>
                           <a:ea typeface="Arial" pitchFamily="34" charset="-122"/>
@@ -2810,7 +2876,7 @@
                   <a:tcPr marL="91440" marR="91440" marT="45720" marB="45720">
                     <a:lnL w="12700" cap="flat" cmpd="sng" algn="ctr">
                       <a:solidFill>
-                        <a:srgbClr val="D0CCE8"/>
+                        <a:srgbClr val="232F48"/>
                       </a:solidFill>
                       <a:prstDash val="solid"/>
                       <a:round/>
@@ -2819,7 +2885,7 @@
                     </a:lnL>
                     <a:lnR w="12700" cap="flat" cmpd="sng" algn="ctr">
                       <a:solidFill>
-                        <a:srgbClr val="D0CCE8"/>
+                        <a:srgbClr val="232F48"/>
                       </a:solidFill>
                       <a:prstDash val="solid"/>
                       <a:round/>
@@ -2828,7 +2894,7 @@
                     </a:lnR>
                     <a:lnT w="12700" cap="flat" cmpd="sng" algn="ctr">
                       <a:solidFill>
-                        <a:srgbClr val="D0CCE8"/>
+                        <a:srgbClr val="232F48"/>
                       </a:solidFill>
                       <a:prstDash val="solid"/>
                       <a:round/>
@@ -2837,13 +2903,16 @@
                     </a:lnT>
                     <a:lnB w="12700" cap="flat" cmpd="sng" algn="ctr">
                       <a:solidFill>
-                        <a:srgbClr val="D0CCE8"/>
+                        <a:srgbClr val="232F48"/>
                       </a:solidFill>
                       <a:prstDash val="solid"/>
                       <a:round/>
                       <a:headEnd type="none" w="med" len="med"/>
                       <a:tailEnd type="none" w="med" len="med"/>
                     </a:lnB>
+                    <a:solidFill>
+                      <a:srgbClr val="121A2B"/>
+                    </a:solidFill>
                   </a:tcPr>
                 </a:tc>
                 <a:tc>
@@ -2857,7 +2926,7 @@
                       <a:r>
                         <a:rPr lang="en-US" sz="1100" dirty="0">
                           <a:solidFill>
-                            <a:srgbClr val="000000"/>
+                            <a:srgbClr val="F1F5F9"/>
                           </a:solidFill>
                           <a:latin typeface="Arial" pitchFamily="34" charset="0"/>
                           <a:ea typeface="Arial" pitchFamily="34" charset="-122"/>
@@ -2875,7 +2944,7 @@
                   <a:tcPr marL="91440" marR="91440" marT="45720" marB="45720">
                     <a:lnL w="12700" cap="flat" cmpd="sng" algn="ctr">
                       <a:solidFill>
-                        <a:srgbClr val="D0CCE8"/>
+                        <a:srgbClr val="232F48"/>
                       </a:solidFill>
                       <a:prstDash val="solid"/>
                       <a:round/>
@@ -2884,7 +2953,7 @@
                     </a:lnL>
                     <a:lnR w="12700" cap="flat" cmpd="sng" algn="ctr">
                       <a:solidFill>
-                        <a:srgbClr val="D0CCE8"/>
+                        <a:srgbClr val="232F48"/>
                       </a:solidFill>
                       <a:prstDash val="solid"/>
                       <a:round/>
@@ -2893,7 +2962,7 @@
                     </a:lnR>
                     <a:lnT w="12700" cap="flat" cmpd="sng" algn="ctr">
                       <a:solidFill>
-                        <a:srgbClr val="D0CCE8"/>
+                        <a:srgbClr val="232F48"/>
                       </a:solidFill>
                       <a:prstDash val="solid"/>
                       <a:round/>
@@ -2902,13 +2971,16 @@
                     </a:lnT>
                     <a:lnB w="12700" cap="flat" cmpd="sng" algn="ctr">
                       <a:solidFill>
-                        <a:srgbClr val="D0CCE8"/>
+                        <a:srgbClr val="232F48"/>
                       </a:solidFill>
                       <a:prstDash val="solid"/>
                       <a:round/>
                       <a:headEnd type="none" w="med" len="med"/>
                       <a:tailEnd type="none" w="med" len="med"/>
                     </a:lnB>
+                    <a:solidFill>
+                      <a:srgbClr val="121A2B"/>
+                    </a:solidFill>
                   </a:tcPr>
                 </a:tc>
                 <a:tc>
@@ -2922,7 +2994,7 @@
                       <a:r>
                         <a:rPr lang="en-US" sz="1100" dirty="0">
                           <a:solidFill>
-                            <a:srgbClr val="000000"/>
+                            <a:srgbClr val="F1F5F9"/>
                           </a:solidFill>
                           <a:latin typeface="Arial" pitchFamily="34" charset="0"/>
                           <a:ea typeface="Arial" pitchFamily="34" charset="-122"/>
@@ -2940,7 +3012,7 @@
                   <a:tcPr marL="91440" marR="91440" marT="45720" marB="45720">
                     <a:lnL w="12700" cap="flat" cmpd="sng" algn="ctr">
                       <a:solidFill>
-                        <a:srgbClr val="D0CCE8"/>
+                        <a:srgbClr val="232F48"/>
                       </a:solidFill>
                       <a:prstDash val="solid"/>
                       <a:round/>
@@ -2949,7 +3021,7 @@
                     </a:lnL>
                     <a:lnR w="12700" cap="flat" cmpd="sng" algn="ctr">
                       <a:solidFill>
-                        <a:srgbClr val="D0CCE8"/>
+                        <a:srgbClr val="232F48"/>
                       </a:solidFill>
                       <a:prstDash val="solid"/>
                       <a:round/>
@@ -2958,7 +3030,7 @@
                     </a:lnR>
                     <a:lnT w="12700" cap="flat" cmpd="sng" algn="ctr">
                       <a:solidFill>
-                        <a:srgbClr val="D0CCE8"/>
+                        <a:srgbClr val="232F48"/>
                       </a:solidFill>
                       <a:prstDash val="solid"/>
                       <a:round/>
@@ -2967,17 +3039,20 @@
                     </a:lnT>
                     <a:lnB w="12700" cap="flat" cmpd="sng" algn="ctr">
                       <a:solidFill>
-                        <a:srgbClr val="D0CCE8"/>
+                        <a:srgbClr val="232F48"/>
                       </a:solidFill>
                       <a:prstDash val="solid"/>
                       <a:round/>
                       <a:headEnd type="none" w="med" len="med"/>
                       <a:tailEnd type="none" w="med" len="med"/>
                     </a:lnB>
+                    <a:solidFill>
+                      <a:srgbClr val="121A2B"/>
+                    </a:solidFill>
                   </a:tcPr>
                 </a:tc>
               </a:tr>
-              <a:tr h="877824">
+              <a:tr h="914400">
                 <a:tc>
                   <a:txBody>
                     <a:bodyPr/>
@@ -2989,7 +3064,7 @@
                       <a:r>
                         <a:rPr lang="en-US" sz="1100" b="1" dirty="0">
                           <a:solidFill>
-                            <a:srgbClr val="000000"/>
+                            <a:srgbClr val="F1F5F9"/>
                           </a:solidFill>
                           <a:latin typeface="Arial" pitchFamily="34" charset="0"/>
                           <a:ea typeface="Arial" pitchFamily="34" charset="-122"/>
@@ -3007,7 +3082,7 @@
                   <a:tcPr marL="91440" marR="91440" marT="45720" marB="45720">
                     <a:lnL w="12700" cap="flat" cmpd="sng" algn="ctr">
                       <a:solidFill>
-                        <a:srgbClr val="D0CCE8"/>
+                        <a:srgbClr val="232F48"/>
                       </a:solidFill>
                       <a:prstDash val="solid"/>
                       <a:round/>
@@ -3016,7 +3091,7 @@
                     </a:lnL>
                     <a:lnR w="12700" cap="flat" cmpd="sng" algn="ctr">
                       <a:solidFill>
-                        <a:srgbClr val="D0CCE8"/>
+                        <a:srgbClr val="232F48"/>
                       </a:solidFill>
                       <a:prstDash val="solid"/>
                       <a:round/>
@@ -3025,7 +3100,7 @@
                     </a:lnR>
                     <a:lnT w="12700" cap="flat" cmpd="sng" algn="ctr">
                       <a:solidFill>
-                        <a:srgbClr val="D0CCE8"/>
+                        <a:srgbClr val="232F48"/>
                       </a:solidFill>
                       <a:prstDash val="solid"/>
                       <a:round/>
@@ -3034,13 +3109,16 @@
                     </a:lnT>
                     <a:lnB w="12700" cap="flat" cmpd="sng" algn="ctr">
                       <a:solidFill>
-                        <a:srgbClr val="D0CCE8"/>
+                        <a:srgbClr val="232F48"/>
                       </a:solidFill>
                       <a:prstDash val="solid"/>
                       <a:round/>
                       <a:headEnd type="none" w="med" len="med"/>
                       <a:tailEnd type="none" w="med" len="med"/>
                     </a:lnB>
+                    <a:solidFill>
+                      <a:srgbClr val="121A2B"/>
+                    </a:solidFill>
                   </a:tcPr>
                 </a:tc>
                 <a:tc>
@@ -3054,7 +3132,7 @@
                       <a:r>
                         <a:rPr lang="en-US" sz="1100" dirty="0">
                           <a:solidFill>
-                            <a:srgbClr val="000000"/>
+                            <a:srgbClr val="F1F5F9"/>
                           </a:solidFill>
                           <a:latin typeface="Arial" pitchFamily="34" charset="0"/>
                           <a:ea typeface="Arial" pitchFamily="34" charset="-122"/>
@@ -3072,7 +3150,7 @@
                   <a:tcPr marL="91440" marR="91440" marT="45720" marB="45720">
                     <a:lnL w="12700" cap="flat" cmpd="sng" algn="ctr">
                       <a:solidFill>
-                        <a:srgbClr val="D0CCE8"/>
+                        <a:srgbClr val="232F48"/>
                       </a:solidFill>
                       <a:prstDash val="solid"/>
                       <a:round/>
@@ -3081,7 +3159,7 @@
                     </a:lnL>
                     <a:lnR w="12700" cap="flat" cmpd="sng" algn="ctr">
                       <a:solidFill>
-                        <a:srgbClr val="D0CCE8"/>
+                        <a:srgbClr val="232F48"/>
                       </a:solidFill>
                       <a:prstDash val="solid"/>
                       <a:round/>
@@ -3090,7 +3168,7 @@
                     </a:lnR>
                     <a:lnT w="12700" cap="flat" cmpd="sng" algn="ctr">
                       <a:solidFill>
-                        <a:srgbClr val="D0CCE8"/>
+                        <a:srgbClr val="232F48"/>
                       </a:solidFill>
                       <a:prstDash val="solid"/>
                       <a:round/>
@@ -3099,13 +3177,16 @@
                     </a:lnT>
                     <a:lnB w="12700" cap="flat" cmpd="sng" algn="ctr">
                       <a:solidFill>
-                        <a:srgbClr val="D0CCE8"/>
+                        <a:srgbClr val="232F48"/>
                       </a:solidFill>
                       <a:prstDash val="solid"/>
                       <a:round/>
                       <a:headEnd type="none" w="med" len="med"/>
                       <a:tailEnd type="none" w="med" len="med"/>
                     </a:lnB>
+                    <a:solidFill>
+                      <a:srgbClr val="121A2B"/>
+                    </a:solidFill>
                   </a:tcPr>
                 </a:tc>
                 <a:tc>
@@ -3119,7 +3200,7 @@
                       <a:r>
                         <a:rPr lang="en-US" sz="1100" dirty="0">
                           <a:solidFill>
-                            <a:srgbClr val="000000"/>
+                            <a:srgbClr val="F1F5F9"/>
                           </a:solidFill>
                           <a:latin typeface="Arial" pitchFamily="34" charset="0"/>
                           <a:ea typeface="Arial" pitchFamily="34" charset="-122"/>
@@ -3137,7 +3218,7 @@
                   <a:tcPr marL="91440" marR="91440" marT="45720" marB="45720">
                     <a:lnL w="12700" cap="flat" cmpd="sng" algn="ctr">
                       <a:solidFill>
-                        <a:srgbClr val="D0CCE8"/>
+                        <a:srgbClr val="232F48"/>
                       </a:solidFill>
                       <a:prstDash val="solid"/>
                       <a:round/>
@@ -3146,7 +3227,7 @@
                     </a:lnL>
                     <a:lnR w="12700" cap="flat" cmpd="sng" algn="ctr">
                       <a:solidFill>
-                        <a:srgbClr val="D0CCE8"/>
+                        <a:srgbClr val="232F48"/>
                       </a:solidFill>
                       <a:prstDash val="solid"/>
                       <a:round/>
@@ -3155,7 +3236,7 @@
                     </a:lnR>
                     <a:lnT w="12700" cap="flat" cmpd="sng" algn="ctr">
                       <a:solidFill>
-                        <a:srgbClr val="D0CCE8"/>
+                        <a:srgbClr val="232F48"/>
                       </a:solidFill>
                       <a:prstDash val="solid"/>
                       <a:round/>
@@ -3164,13 +3245,16 @@
                     </a:lnT>
                     <a:lnB w="12700" cap="flat" cmpd="sng" algn="ctr">
                       <a:solidFill>
-                        <a:srgbClr val="D0CCE8"/>
+                        <a:srgbClr val="232F48"/>
                       </a:solidFill>
                       <a:prstDash val="solid"/>
                       <a:round/>
                       <a:headEnd type="none" w="med" len="med"/>
                       <a:tailEnd type="none" w="med" len="med"/>
                     </a:lnB>
+                    <a:solidFill>
+                      <a:srgbClr val="121A2B"/>
+                    </a:solidFill>
                   </a:tcPr>
                 </a:tc>
                 <a:tc>
@@ -3184,7 +3268,7 @@
                       <a:r>
                         <a:rPr lang="en-US" sz="1100" dirty="0">
                           <a:solidFill>
-                            <a:srgbClr val="000000"/>
+                            <a:srgbClr val="F1F5F9"/>
                           </a:solidFill>
                           <a:latin typeface="Arial" pitchFamily="34" charset="0"/>
                           <a:ea typeface="Arial" pitchFamily="34" charset="-122"/>
@@ -3202,7 +3286,7 @@
                   <a:tcPr marL="91440" marR="91440" marT="45720" marB="45720">
                     <a:lnL w="12700" cap="flat" cmpd="sng" algn="ctr">
                       <a:solidFill>
-                        <a:srgbClr val="D0CCE8"/>
+                        <a:srgbClr val="232F48"/>
                       </a:solidFill>
                       <a:prstDash val="solid"/>
                       <a:round/>
@@ -3211,7 +3295,7 @@
                     </a:lnL>
                     <a:lnR w="12700" cap="flat" cmpd="sng" algn="ctr">
                       <a:solidFill>
-                        <a:srgbClr val="D0CCE8"/>
+                        <a:srgbClr val="232F48"/>
                       </a:solidFill>
                       <a:prstDash val="solid"/>
                       <a:round/>
@@ -3220,7 +3304,7 @@
                     </a:lnR>
                     <a:lnT w="12700" cap="flat" cmpd="sng" algn="ctr">
                       <a:solidFill>
-                        <a:srgbClr val="D0CCE8"/>
+                        <a:srgbClr val="232F48"/>
                       </a:solidFill>
                       <a:prstDash val="solid"/>
                       <a:round/>
@@ -3229,13 +3313,16 @@
                     </a:lnT>
                     <a:lnB w="12700" cap="flat" cmpd="sng" algn="ctr">
                       <a:solidFill>
-                        <a:srgbClr val="D0CCE8"/>
+                        <a:srgbClr val="232F48"/>
                       </a:solidFill>
                       <a:prstDash val="solid"/>
                       <a:round/>
                       <a:headEnd type="none" w="med" len="med"/>
                       <a:tailEnd type="none" w="med" len="med"/>
                     </a:lnB>
+                    <a:solidFill>
+                      <a:srgbClr val="121A2B"/>
+                    </a:solidFill>
                   </a:tcPr>
                 </a:tc>
               </a:tr>
@@ -3283,7 +3370,7 @@
         </p:nvSpPr>
         <p:spPr>
           <a:xfrm>
-            <a:off x="731520" y="548640"/>
+            <a:off x="731520" y="457200"/>
             <a:ext cx="10515600" cy="274320"/>
           </a:xfrm>
           <a:prstGeom prst="rect">
@@ -3322,7 +3409,7 @@
         </p:nvSpPr>
         <p:spPr>
           <a:xfrm>
-            <a:off x="731520" y="914400"/>
+            <a:off x="731520" y="822960"/>
             <a:ext cx="10515600" cy="548640"/>
           </a:xfrm>
           <a:prstGeom prst="rect">
@@ -3361,18 +3448,18 @@
         </p:nvSpPr>
         <p:spPr>
           <a:xfrm>
-            <a:off x="731520" y="1645920"/>
-            <a:ext cx="3337560" cy="4389120"/>
+            <a:off x="731520" y="1554480"/>
+            <a:ext cx="3337560" cy="4572000"/>
           </a:xfrm>
           <a:prstGeom prst="rect">
             <a:avLst/>
           </a:prstGeom>
           <a:solidFill>
-            <a:srgbClr val="FFFFFF"/>
+            <a:srgbClr val="121A2B"/>
           </a:solidFill>
           <a:ln w="12700">
             <a:solidFill>
-              <a:srgbClr val="E2DFF4"/>
+              <a:srgbClr val="232F48"/>
             </a:solidFill>
             <a:prstDash val="solid"/>
           </a:ln>
@@ -3386,7 +3473,7 @@
         </p:nvSpPr>
         <p:spPr>
           <a:xfrm>
-            <a:off x="914400" y="1828800"/>
+            <a:off x="914400" y="1737360"/>
             <a:ext cx="2971800" cy="365760"/>
           </a:xfrm>
           <a:prstGeom prst="rect">
@@ -3422,8 +3509,8 @@
         </p:nvSpPr>
         <p:spPr>
           <a:xfrm>
-            <a:off x="914400" y="2377440"/>
-            <a:ext cx="2971800" cy="3474720"/>
+            <a:off x="914400" y="2286000"/>
+            <a:ext cx="2971800" cy="3657600"/>
           </a:xfrm>
           <a:prstGeom prst="rect">
             <a:avLst/>
@@ -3473,7 +3560,7 @@
                   <a:srgbClr val="F1F5F9"/>
                 </a:solidFill>
               </a:rPr>
-              <a:t>• AI-Proposed: Missing requirements are clearly labelled AI-INFERRED. Never masquerade as maintainer approved.</a:t>
+              <a:t>• AI-Proposed: Missing requirements are clearly quarantined and labelled AI-INFERRED. Never masquerade as maintainer approved.</a:t>
             </a:r>
             <a:endParaRPr lang="en-US" sz="1200" dirty="0"/>
           </a:p>
@@ -3499,7 +3586,7 @@
                   <a:srgbClr val="F1F5F9"/>
                 </a:solidFill>
               </a:rPr>
-              <a:t>• In-Memory Editing: Contributor can edit criteria or toggle "Needs Clarification" without database overhead.</a:t>
+              <a:t>• In-Memory Editing: Contributor can edit criteria or toggle "Needs Clarification" in real time without database overhead.</a:t>
             </a:r>
             <a:endParaRPr lang="en-US" sz="1200" dirty="0"/>
           </a:p>
@@ -3513,18 +3600,18 @@
         </p:nvSpPr>
         <p:spPr>
           <a:xfrm>
-            <a:off x="4416552" y="1645920"/>
-            <a:ext cx="3337560" cy="4389120"/>
+            <a:off x="4416552" y="1554480"/>
+            <a:ext cx="3337560" cy="4572000"/>
           </a:xfrm>
           <a:prstGeom prst="rect">
             <a:avLst/>
           </a:prstGeom>
           <a:solidFill>
-            <a:srgbClr val="FFFFFF"/>
+            <a:srgbClr val="121A2B"/>
           </a:solidFill>
           <a:ln w="12700">
             <a:solidFill>
-              <a:srgbClr val="E2DFF4"/>
+              <a:srgbClr val="232F48"/>
             </a:solidFill>
             <a:prstDash val="solid"/>
           </a:ln>
@@ -3538,7 +3625,7 @@
         </p:nvSpPr>
         <p:spPr>
           <a:xfrm>
-            <a:off x="4599432" y="1828800"/>
+            <a:off x="4599432" y="1737360"/>
             <a:ext cx="2971800" cy="365760"/>
           </a:xfrm>
           <a:prstGeom prst="rect">
@@ -3574,8 +3661,8 @@
         </p:nvSpPr>
         <p:spPr>
           <a:xfrm>
-            <a:off x="4599432" y="2377440"/>
-            <a:ext cx="2971800" cy="3474720"/>
+            <a:off x="4599432" y="2286000"/>
+            <a:ext cx="2971800" cy="3657600"/>
           </a:xfrm>
           <a:prstGeom prst="rect">
             <a:avLst/>
@@ -3665,18 +3752,18 @@
         </p:nvSpPr>
         <p:spPr>
           <a:xfrm>
-            <a:off x="8101584" y="1645920"/>
-            <a:ext cx="3337560" cy="4389120"/>
+            <a:off x="8101584" y="1554480"/>
+            <a:ext cx="3337560" cy="4572000"/>
           </a:xfrm>
           <a:prstGeom prst="rect">
             <a:avLst/>
           </a:prstGeom>
           <a:solidFill>
-            <a:srgbClr val="FFFFFF"/>
+            <a:srgbClr val="121A2B"/>
           </a:solidFill>
           <a:ln w="12700">
             <a:solidFill>
-              <a:srgbClr val="E2DFF4"/>
+              <a:srgbClr val="232F48"/>
             </a:solidFill>
             <a:prstDash val="solid"/>
           </a:ln>
@@ -3690,7 +3777,7 @@
         </p:nvSpPr>
         <p:spPr>
           <a:xfrm>
-            <a:off x="8284464" y="1828800"/>
+            <a:off x="8284464" y="1737360"/>
             <a:ext cx="2971800" cy="365760"/>
           </a:xfrm>
           <a:prstGeom prst="rect">
@@ -3726,8 +3813,8 @@
         </p:nvSpPr>
         <p:spPr>
           <a:xfrm>
-            <a:off x="8284464" y="2377440"/>
-            <a:ext cx="2971800" cy="3474720"/>
+            <a:off x="8284464" y="2286000"/>
+            <a:ext cx="2971800" cy="3657600"/>
           </a:xfrm>
           <a:prstGeom prst="rect">
             <a:avLst/>
@@ -3849,7 +3936,7 @@
         </p:nvSpPr>
         <p:spPr>
           <a:xfrm>
-            <a:off x="731520" y="548640"/>
+            <a:off x="731520" y="457200"/>
             <a:ext cx="10515600" cy="274320"/>
           </a:xfrm>
           <a:prstGeom prst="rect">
@@ -3888,7 +3975,7 @@
         </p:nvSpPr>
         <p:spPr>
           <a:xfrm>
-            <a:off x="731520" y="914400"/>
+            <a:off x="731520" y="822960"/>
             <a:ext cx="10515600" cy="548640"/>
           </a:xfrm>
           <a:prstGeom prst="rect">
@@ -3927,18 +4014,18 @@
         </p:nvSpPr>
         <p:spPr>
           <a:xfrm>
-            <a:off x="731520" y="1645920"/>
-            <a:ext cx="10698480" cy="4389120"/>
+            <a:off x="731520" y="1554480"/>
+            <a:ext cx="10698480" cy="4572000"/>
           </a:xfrm>
           <a:prstGeom prst="rect">
             <a:avLst/>
           </a:prstGeom>
           <a:solidFill>
-            <a:srgbClr val="FFFFFF"/>
+            <a:srgbClr val="121A2B"/>
           </a:solidFill>
           <a:ln w="12700">
             <a:solidFill>
-              <a:srgbClr val="E2DFF4"/>
+              <a:srgbClr val="232F48"/>
             </a:solidFill>
             <a:prstDash val="solid"/>
           </a:ln>
@@ -3952,7 +4039,7 @@
         </p:nvSpPr>
         <p:spPr>
           <a:xfrm>
-            <a:off x="1097280" y="1920240"/>
+            <a:off x="1097280" y="1828800"/>
             <a:ext cx="10058400" cy="365760"/>
           </a:xfrm>
           <a:prstGeom prst="rect">
@@ -3988,8 +4075,8 @@
         </p:nvSpPr>
         <p:spPr>
           <a:xfrm>
-            <a:off x="1097280" y="2377440"/>
-            <a:ext cx="10058400" cy="3383280"/>
+            <a:off x="1097280" y="2286000"/>
+            <a:ext cx="10058400" cy="3657600"/>
           </a:xfrm>
           <a:prstGeom prst="rect">
             <a:avLst/>
@@ -4013,7 +4100,7 @@
                   <a:srgbClr val="F1F5F9"/>
                 </a:solidFill>
               </a:rPr>
-              <a:t>1. Requirement Node: Explicit issue quote (e.g. AC-01) with link back to GitHub discussion.</a:t>
+              <a:t>1. Requirement Node: Explicit issue quote (e.g. AC-01) with direct clickable link back to GitHub discussion.</a:t>
             </a:r>
             <a:endParaRPr lang="en-US" sz="1300" dirty="0"/>
           </a:p>
@@ -4117,7 +4204,7 @@
                   <a:srgbClr val="F1F5F9"/>
                 </a:solidFill>
               </a:rPr>
-              <a:t>• TEST GAP RADAR: When no test evidence is identified in the scanned files, IssueLift generates a Test Gap card explaining what was checked, why uncertainty exists, and proposing a manual verification scenario. It NEVER claims "no tests exist" or fabricates coverage percentages.</a:t>
+              <a:t>• TEST GAP RADAR &amp; HONEST UNCERTAINTY: Scans are strictly bounded by API limits. When no test evidence is identified in scanned files, IssueLift generates a Test Gap card explaining what was checked, why uncertainty exists, and proposing a manual verification scenario. It NEVER claims "no tests exist" in the repository or invents false coverage percentages.</a:t>
             </a:r>
             <a:endParaRPr lang="en-US" sz="1300" dirty="0"/>
           </a:p>
@@ -4163,7 +4250,7 @@
         </p:nvSpPr>
         <p:spPr>
           <a:xfrm>
-            <a:off x="731520" y="548640"/>
+            <a:off x="731520" y="457200"/>
             <a:ext cx="10515600" cy="274320"/>
           </a:xfrm>
           <a:prstGeom prst="rect">
@@ -4202,7 +4289,7 @@
         </p:nvSpPr>
         <p:spPr>
           <a:xfrm>
-            <a:off x="731520" y="914400"/>
+            <a:off x="731520" y="822960"/>
             <a:ext cx="10515600" cy="548640"/>
           </a:xfrm>
           <a:prstGeom prst="rect">
@@ -4241,18 +4328,18 @@
         </p:nvSpPr>
         <p:spPr>
           <a:xfrm>
-            <a:off x="731520" y="1645920"/>
-            <a:ext cx="5166360" cy="4389120"/>
+            <a:off x="731520" y="1554480"/>
+            <a:ext cx="5166360" cy="4572000"/>
           </a:xfrm>
           <a:prstGeom prst="rect">
             <a:avLst/>
           </a:prstGeom>
           <a:solidFill>
-            <a:srgbClr val="FFFFFF"/>
+            <a:srgbClr val="121A2B"/>
           </a:solidFill>
           <a:ln w="12700">
             <a:solidFill>
-              <a:srgbClr val="E2DFF4"/>
+              <a:srgbClr val="232F48"/>
             </a:solidFill>
             <a:prstDash val="solid"/>
           </a:ln>
@@ -4266,7 +4353,7 @@
         </p:nvSpPr>
         <p:spPr>
           <a:xfrm>
-            <a:off x="1005840" y="1920240"/>
+            <a:off x="1005840" y="1783080"/>
             <a:ext cx="4617720" cy="365760"/>
           </a:xfrm>
           <a:prstGeom prst="rect">
@@ -4302,8 +4389,8 @@
         </p:nvSpPr>
         <p:spPr>
           <a:xfrm>
-            <a:off x="1005840" y="2377440"/>
-            <a:ext cx="4617720" cy="3383280"/>
+            <a:off x="1005840" y="2240280"/>
+            <a:ext cx="4617720" cy="3657600"/>
           </a:xfrm>
           <a:prstGeom prst="rect">
             <a:avLst/>
@@ -4445,18 +4532,18 @@
         </p:nvSpPr>
         <p:spPr>
           <a:xfrm>
-            <a:off x="6263640" y="1645920"/>
-            <a:ext cx="5166360" cy="4389120"/>
+            <a:off x="6263640" y="1554480"/>
+            <a:ext cx="5166360" cy="4572000"/>
           </a:xfrm>
           <a:prstGeom prst="rect">
             <a:avLst/>
           </a:prstGeom>
           <a:solidFill>
-            <a:srgbClr val="FFFFFF"/>
+            <a:srgbClr val="121A2B"/>
           </a:solidFill>
           <a:ln w="12700">
             <a:solidFill>
-              <a:srgbClr val="E2DFF4"/>
+              <a:srgbClr val="232F48"/>
             </a:solidFill>
             <a:prstDash val="solid"/>
           </a:ln>
@@ -4470,7 +4557,7 @@
         </p:nvSpPr>
         <p:spPr>
           <a:xfrm>
-            <a:off x="6537960" y="1920240"/>
+            <a:off x="6537960" y="1783080"/>
             <a:ext cx="4617720" cy="365760"/>
           </a:xfrm>
           <a:prstGeom prst="rect">
@@ -4506,8 +4593,8 @@
         </p:nvSpPr>
         <p:spPr>
           <a:xfrm>
-            <a:off x="6537960" y="2377440"/>
-            <a:ext cx="4617720" cy="3383280"/>
+            <a:off x="6537960" y="2240280"/>
+            <a:ext cx="4617720" cy="3657600"/>
           </a:xfrm>
           <a:prstGeom prst="rect">
             <a:avLst/>
@@ -4655,7 +4742,7 @@
         </p:nvSpPr>
         <p:spPr>
           <a:xfrm>
-            <a:off x="731520" y="548640"/>
+            <a:off x="731520" y="457200"/>
             <a:ext cx="10515600" cy="274320"/>
           </a:xfrm>
           <a:prstGeom prst="rect">
@@ -4694,8 +4781,8 @@
         </p:nvSpPr>
         <p:spPr>
           <a:xfrm>
-            <a:off x="731520" y="914400"/>
-            <a:ext cx="10515600" cy="548640"/>
+            <a:off x="731520" y="777240"/>
+            <a:ext cx="10515600" cy="457200"/>
           </a:xfrm>
           <a:prstGeom prst="rect">
             <a:avLst/>
@@ -4711,7 +4798,7 @@
               <a:buNone/>
             </a:pPr>
             <a:r>
-              <a:rPr lang="en-US" sz="2600" b="1" dirty="0">
+              <a:rPr lang="en-US" sz="2400" b="1" dirty="0">
                 <a:solidFill>
                   <a:srgbClr val="F1F5F9"/>
                 </a:solidFill>
@@ -4721,7 +4808,46 @@
               </a:rPr>
               <a:t>Open ProofBench: 7/7 Fixtures Passing (100% Offline)</a:t>
             </a:r>
-            <a:endParaRPr lang="en-US" sz="2600" dirty="0"/>
+            <a:endParaRPr lang="en-US" sz="2400" dirty="0"/>
+          </a:p>
+        </p:txBody>
+      </p:sp>
+      <p:sp>
+        <p:nvSpPr>
+          <p:cNvPr id="4" name="Text 2"/>
+          <p:cNvSpPr/>
+          <p:nvPr/>
+        </p:nvSpPr>
+        <p:spPr>
+          <a:xfrm>
+            <a:off x="731520" y="1280160"/>
+            <a:ext cx="10698480" cy="274320"/>
+          </a:xfrm>
+          <a:prstGeom prst="rect">
+            <a:avLst/>
+          </a:prstGeom>
+          <a:noFill/>
+          <a:ln/>
+        </p:spPr>
+        <p:txBody>
+          <a:bodyPr wrap="square" rtlCol="0" anchor="ctr"/>
+          <a:lstStyle/>
+          <a:p>
+            <a:pPr indent="0" marL="0">
+              <a:buNone/>
+            </a:pPr>
+            <a:r>
+              <a:rPr lang="en-US" sz="1100" i="1" dirty="0">
+                <a:solidFill>
+                  <a:srgbClr val="2DD4BF"/>
+                </a:solidFill>
+                <a:latin typeface="Arial" pitchFamily="34" charset="0"/>
+                <a:ea typeface="Arial" pitchFamily="34" charset="-122"/>
+                <a:cs typeface="Arial" pitchFamily="34" charset="-120"/>
+              </a:rPr>
+              <a:t>*ProofBench evaluates 7 deterministic guardrail fixtures in eval/fixtures/ — distinct from the 78 unit tests in tests/ (Vitest).*</a:t>
+            </a:r>
+            <a:endParaRPr lang="en-US" sz="1100" dirty="0"/>
           </a:p>
         </p:txBody>
       </p:sp>
@@ -4783,7 +4909,7 @@
                   <a:tcPr marL="91440" marR="91440" marT="45720" marB="45720">
                     <a:lnL w="12700" cap="flat" cmpd="sng" algn="ctr">
                       <a:solidFill>
-                        <a:srgbClr val="D0CCE8"/>
+                        <a:srgbClr val="232F48"/>
                       </a:solidFill>
                       <a:prstDash val="solid"/>
                       <a:round/>
@@ -4792,7 +4918,7 @@
                     </a:lnL>
                     <a:lnR w="12700" cap="flat" cmpd="sng" algn="ctr">
                       <a:solidFill>
-                        <a:srgbClr val="D0CCE8"/>
+                        <a:srgbClr val="232F48"/>
                       </a:solidFill>
                       <a:prstDash val="solid"/>
                       <a:round/>
@@ -4801,7 +4927,7 @@
                     </a:lnR>
                     <a:lnT w="12700" cap="flat" cmpd="sng" algn="ctr">
                       <a:solidFill>
-                        <a:srgbClr val="D0CCE8"/>
+                        <a:srgbClr val="232F48"/>
                       </a:solidFill>
                       <a:prstDash val="solid"/>
                       <a:round/>
@@ -4810,7 +4936,7 @@
                     </a:lnT>
                     <a:lnB w="12700" cap="flat" cmpd="sng" algn="ctr">
                       <a:solidFill>
-                        <a:srgbClr val="D0CCE8"/>
+                        <a:srgbClr val="232F48"/>
                       </a:solidFill>
                       <a:prstDash val="solid"/>
                       <a:round/>
@@ -4818,7 +4944,7 @@
                       <a:tailEnd type="none" w="med" len="med"/>
                     </a:lnB>
                     <a:solidFill>
-                      <a:srgbClr val="17152D"/>
+                      <a:srgbClr val="1E293B"/>
                     </a:solidFill>
                   </a:tcPr>
                 </a:tc>
@@ -4851,7 +4977,7 @@
                   <a:tcPr marL="91440" marR="91440" marT="45720" marB="45720">
                     <a:lnL w="12700" cap="flat" cmpd="sng" algn="ctr">
                       <a:solidFill>
-                        <a:srgbClr val="D0CCE8"/>
+                        <a:srgbClr val="232F48"/>
                       </a:solidFill>
                       <a:prstDash val="solid"/>
                       <a:round/>
@@ -4860,7 +4986,7 @@
                     </a:lnL>
                     <a:lnR w="12700" cap="flat" cmpd="sng" algn="ctr">
                       <a:solidFill>
-                        <a:srgbClr val="D0CCE8"/>
+                        <a:srgbClr val="232F48"/>
                       </a:solidFill>
                       <a:prstDash val="solid"/>
                       <a:round/>
@@ -4869,7 +4995,7 @@
                     </a:lnR>
                     <a:lnT w="12700" cap="flat" cmpd="sng" algn="ctr">
                       <a:solidFill>
-                        <a:srgbClr val="D0CCE8"/>
+                        <a:srgbClr val="232F48"/>
                       </a:solidFill>
                       <a:prstDash val="solid"/>
                       <a:round/>
@@ -4878,7 +5004,7 @@
                     </a:lnT>
                     <a:lnB w="12700" cap="flat" cmpd="sng" algn="ctr">
                       <a:solidFill>
-                        <a:srgbClr val="D0CCE8"/>
+                        <a:srgbClr val="232F48"/>
                       </a:solidFill>
                       <a:prstDash val="solid"/>
                       <a:round/>
@@ -4886,7 +5012,7 @@
                       <a:tailEnd type="none" w="med" len="med"/>
                     </a:lnB>
                     <a:solidFill>
-                      <a:srgbClr val="17152D"/>
+                      <a:srgbClr val="1E293B"/>
                     </a:solidFill>
                   </a:tcPr>
                 </a:tc>
@@ -4919,7 +5045,7 @@
                   <a:tcPr marL="91440" marR="91440" marT="45720" marB="45720">
                     <a:lnL w="12700" cap="flat" cmpd="sng" algn="ctr">
                       <a:solidFill>
-                        <a:srgbClr val="D0CCE8"/>
+                        <a:srgbClr val="232F48"/>
                       </a:solidFill>
                       <a:prstDash val="solid"/>
                       <a:round/>
@@ -4928,7 +5054,7 @@
                     </a:lnL>
                     <a:lnR w="12700" cap="flat" cmpd="sng" algn="ctr">
                       <a:solidFill>
-                        <a:srgbClr val="D0CCE8"/>
+                        <a:srgbClr val="232F48"/>
                       </a:solidFill>
                       <a:prstDash val="solid"/>
                       <a:round/>
@@ -4937,7 +5063,7 @@
                     </a:lnR>
                     <a:lnT w="12700" cap="flat" cmpd="sng" algn="ctr">
                       <a:solidFill>
-                        <a:srgbClr val="D0CCE8"/>
+                        <a:srgbClr val="232F48"/>
                       </a:solidFill>
                       <a:prstDash val="solid"/>
                       <a:round/>
@@ -4946,7 +5072,7 @@
                     </a:lnT>
                     <a:lnB w="12700" cap="flat" cmpd="sng" algn="ctr">
                       <a:solidFill>
-                        <a:srgbClr val="D0CCE8"/>
+                        <a:srgbClr val="232F48"/>
                       </a:solidFill>
                       <a:prstDash val="solid"/>
                       <a:round/>
@@ -4954,7 +5080,7 @@
                       <a:tailEnd type="none" w="med" len="med"/>
                     </a:lnB>
                     <a:solidFill>
-                      <a:srgbClr val="17152D"/>
+                      <a:srgbClr val="1E293B"/>
                     </a:solidFill>
                   </a:tcPr>
                 </a:tc>
@@ -4987,7 +5113,7 @@
                   <a:tcPr marL="91440" marR="91440" marT="45720" marB="45720">
                     <a:lnL w="12700" cap="flat" cmpd="sng" algn="ctr">
                       <a:solidFill>
-                        <a:srgbClr val="D0CCE8"/>
+                        <a:srgbClr val="232F48"/>
                       </a:solidFill>
                       <a:prstDash val="solid"/>
                       <a:round/>
@@ -4996,7 +5122,7 @@
                     </a:lnL>
                     <a:lnR w="12700" cap="flat" cmpd="sng" algn="ctr">
                       <a:solidFill>
-                        <a:srgbClr val="D0CCE8"/>
+                        <a:srgbClr val="232F48"/>
                       </a:solidFill>
                       <a:prstDash val="solid"/>
                       <a:round/>
@@ -5005,7 +5131,7 @@
                     </a:lnR>
                     <a:lnT w="12700" cap="flat" cmpd="sng" algn="ctr">
                       <a:solidFill>
-                        <a:srgbClr val="D0CCE8"/>
+                        <a:srgbClr val="232F48"/>
                       </a:solidFill>
                       <a:prstDash val="solid"/>
                       <a:round/>
@@ -5014,7 +5140,7 @@
                     </a:lnT>
                     <a:lnB w="12700" cap="flat" cmpd="sng" algn="ctr">
                       <a:solidFill>
-                        <a:srgbClr val="D0CCE8"/>
+                        <a:srgbClr val="232F48"/>
                       </a:solidFill>
                       <a:prstDash val="solid"/>
                       <a:round/>
@@ -5022,7 +5148,7 @@
                       <a:tailEnd type="none" w="med" len="med"/>
                     </a:lnB>
                     <a:solidFill>
-                      <a:srgbClr val="17152D"/>
+                      <a:srgbClr val="1E293B"/>
                     </a:solidFill>
                   </a:tcPr>
                 </a:tc>
@@ -5039,7 +5165,7 @@
                       <a:r>
                         <a:rPr lang="en-US" sz="1000" b="1" dirty="0">
                           <a:solidFill>
-                            <a:srgbClr val="000000"/>
+                            <a:srgbClr val="F1F5F9"/>
                           </a:solidFill>
                           <a:latin typeface="Arial" pitchFamily="34" charset="0"/>
                           <a:ea typeface="Arial" pitchFamily="34" charset="-122"/>
@@ -5057,7 +5183,7 @@
                   <a:tcPr marL="91440" marR="91440" marT="45720" marB="45720">
                     <a:lnL w="12700" cap="flat" cmpd="sng" algn="ctr">
                       <a:solidFill>
-                        <a:srgbClr val="D0CCE8"/>
+                        <a:srgbClr val="232F48"/>
                       </a:solidFill>
                       <a:prstDash val="solid"/>
                       <a:round/>
@@ -5066,7 +5192,7 @@
                     </a:lnL>
                     <a:lnR w="12700" cap="flat" cmpd="sng" algn="ctr">
                       <a:solidFill>
-                        <a:srgbClr val="D0CCE8"/>
+                        <a:srgbClr val="232F48"/>
                       </a:solidFill>
                       <a:prstDash val="solid"/>
                       <a:round/>
@@ -5075,7 +5201,7 @@
                     </a:lnR>
                     <a:lnT w="12700" cap="flat" cmpd="sng" algn="ctr">
                       <a:solidFill>
-                        <a:srgbClr val="D0CCE8"/>
+                        <a:srgbClr val="232F48"/>
                       </a:solidFill>
                       <a:prstDash val="solid"/>
                       <a:round/>
@@ -5084,13 +5210,16 @@
                     </a:lnT>
                     <a:lnB w="12700" cap="flat" cmpd="sng" algn="ctr">
                       <a:solidFill>
-                        <a:srgbClr val="D0CCE8"/>
+                        <a:srgbClr val="232F48"/>
                       </a:solidFill>
                       <a:prstDash val="solid"/>
                       <a:round/>
                       <a:headEnd type="none" w="med" len="med"/>
                       <a:tailEnd type="none" w="med" len="med"/>
                     </a:lnB>
+                    <a:solidFill>
+                      <a:srgbClr val="121A2B"/>
+                    </a:solidFill>
                   </a:tcPr>
                 </a:tc>
                 <a:tc>
@@ -5104,7 +5233,7 @@
                       <a:r>
                         <a:rPr lang="en-US" sz="1000" dirty="0">
                           <a:solidFill>
-                            <a:srgbClr val="000000"/>
+                            <a:srgbClr val="F1F5F9"/>
                           </a:solidFill>
                           <a:latin typeface="Arial" pitchFamily="34" charset="0"/>
                           <a:ea typeface="Arial" pitchFamily="34" charset="-122"/>
@@ -5122,7 +5251,7 @@
                   <a:tcPr marL="91440" marR="91440" marT="45720" marB="45720">
                     <a:lnL w="12700" cap="flat" cmpd="sng" algn="ctr">
                       <a:solidFill>
-                        <a:srgbClr val="D0CCE8"/>
+                        <a:srgbClr val="232F48"/>
                       </a:solidFill>
                       <a:prstDash val="solid"/>
                       <a:round/>
@@ -5131,7 +5260,7 @@
                     </a:lnL>
                     <a:lnR w="12700" cap="flat" cmpd="sng" algn="ctr">
                       <a:solidFill>
-                        <a:srgbClr val="D0CCE8"/>
+                        <a:srgbClr val="232F48"/>
                       </a:solidFill>
                       <a:prstDash val="solid"/>
                       <a:round/>
@@ -5140,7 +5269,7 @@
                     </a:lnR>
                     <a:lnT w="12700" cap="flat" cmpd="sng" algn="ctr">
                       <a:solidFill>
-                        <a:srgbClr val="D0CCE8"/>
+                        <a:srgbClr val="232F48"/>
                       </a:solidFill>
                       <a:prstDash val="solid"/>
                       <a:round/>
@@ -5149,13 +5278,16 @@
                     </a:lnT>
                     <a:lnB w="12700" cap="flat" cmpd="sng" algn="ctr">
                       <a:solidFill>
-                        <a:srgbClr val="D0CCE8"/>
+                        <a:srgbClr val="232F48"/>
                       </a:solidFill>
                       <a:prstDash val="solid"/>
                       <a:round/>
                       <a:headEnd type="none" w="med" len="med"/>
                       <a:tailEnd type="none" w="med" len="med"/>
                     </a:lnB>
+                    <a:solidFill>
+                      <a:srgbClr val="121A2B"/>
+                    </a:solidFill>
                   </a:tcPr>
                 </a:tc>
                 <a:tc>
@@ -5169,7 +5301,7 @@
                       <a:r>
                         <a:rPr lang="en-US" sz="1000" dirty="0">
                           <a:solidFill>
-                            <a:srgbClr val="000000"/>
+                            <a:srgbClr val="F1F5F9"/>
                           </a:solidFill>
                           <a:latin typeface="Arial" pitchFamily="34" charset="0"/>
                           <a:ea typeface="Arial" pitchFamily="34" charset="-122"/>
@@ -5187,7 +5319,7 @@
                   <a:tcPr marL="91440" marR="91440" marT="45720" marB="45720">
                     <a:lnL w="12700" cap="flat" cmpd="sng" algn="ctr">
                       <a:solidFill>
-                        <a:srgbClr val="D0CCE8"/>
+                        <a:srgbClr val="232F48"/>
                       </a:solidFill>
                       <a:prstDash val="solid"/>
                       <a:round/>
@@ -5196,7 +5328,7 @@
                     </a:lnL>
                     <a:lnR w="12700" cap="flat" cmpd="sng" algn="ctr">
                       <a:solidFill>
-                        <a:srgbClr val="D0CCE8"/>
+                        <a:srgbClr val="232F48"/>
                       </a:solidFill>
                       <a:prstDash val="solid"/>
                       <a:round/>
@@ -5205,7 +5337,7 @@
                     </a:lnR>
                     <a:lnT w="12700" cap="flat" cmpd="sng" algn="ctr">
                       <a:solidFill>
-                        <a:srgbClr val="D0CCE8"/>
+                        <a:srgbClr val="232F48"/>
                       </a:solidFill>
                       <a:prstDash val="solid"/>
                       <a:round/>
@@ -5214,13 +5346,16 @@
                     </a:lnT>
                     <a:lnB w="12700" cap="flat" cmpd="sng" algn="ctr">
                       <a:solidFill>
-                        <a:srgbClr val="D0CCE8"/>
+                        <a:srgbClr val="232F48"/>
                       </a:solidFill>
                       <a:prstDash val="solid"/>
                       <a:round/>
                       <a:headEnd type="none" w="med" len="med"/>
                       <a:tailEnd type="none" w="med" len="med"/>
                     </a:lnB>
+                    <a:solidFill>
+                      <a:srgbClr val="121A2B"/>
+                    </a:solidFill>
                   </a:tcPr>
                 </a:tc>
                 <a:tc>
@@ -5234,7 +5369,7 @@
                       <a:r>
                         <a:rPr lang="en-US" sz="1000" dirty="0">
                           <a:solidFill>
-                            <a:srgbClr val="000000"/>
+                            <a:srgbClr val="A7F3D0"/>
                           </a:solidFill>
                           <a:latin typeface="Arial" pitchFamily="34" charset="0"/>
                           <a:ea typeface="Arial" pitchFamily="34" charset="-122"/>
@@ -5252,7 +5387,7 @@
                   <a:tcPr marL="91440" marR="91440" marT="45720" marB="45720">
                     <a:lnL w="12700" cap="flat" cmpd="sng" algn="ctr">
                       <a:solidFill>
-                        <a:srgbClr val="D0CCE8"/>
+                        <a:srgbClr val="232F48"/>
                       </a:solidFill>
                       <a:prstDash val="solid"/>
                       <a:round/>
@@ -5261,7 +5396,7 @@
                     </a:lnL>
                     <a:lnR w="12700" cap="flat" cmpd="sng" algn="ctr">
                       <a:solidFill>
-                        <a:srgbClr val="D0CCE8"/>
+                        <a:srgbClr val="232F48"/>
                       </a:solidFill>
                       <a:prstDash val="solid"/>
                       <a:round/>
@@ -5270,7 +5405,7 @@
                     </a:lnR>
                     <a:lnT w="12700" cap="flat" cmpd="sng" algn="ctr">
                       <a:solidFill>
-                        <a:srgbClr val="D0CCE8"/>
+                        <a:srgbClr val="232F48"/>
                       </a:solidFill>
                       <a:prstDash val="solid"/>
                       <a:round/>
@@ -5279,13 +5414,16 @@
                     </a:lnT>
                     <a:lnB w="12700" cap="flat" cmpd="sng" algn="ctr">
                       <a:solidFill>
-                        <a:srgbClr val="D0CCE8"/>
+                        <a:srgbClr val="232F48"/>
                       </a:solidFill>
                       <a:prstDash val="solid"/>
                       <a:round/>
                       <a:headEnd type="none" w="med" len="med"/>
                       <a:tailEnd type="none" w="med" len="med"/>
                     </a:lnB>
+                    <a:solidFill>
+                      <a:srgbClr val="121A2B"/>
+                    </a:solidFill>
                   </a:tcPr>
                 </a:tc>
               </a:tr>
@@ -5301,7 +5439,7 @@
                       <a:r>
                         <a:rPr lang="en-US" sz="1000" b="1" dirty="0">
                           <a:solidFill>
-                            <a:srgbClr val="000000"/>
+                            <a:srgbClr val="F1F5F9"/>
                           </a:solidFill>
                           <a:latin typeface="Arial" pitchFamily="34" charset="0"/>
                           <a:ea typeface="Arial" pitchFamily="34" charset="-122"/>
@@ -5319,7 +5457,7 @@
                   <a:tcPr marL="91440" marR="91440" marT="45720" marB="45720">
                     <a:lnL w="12700" cap="flat" cmpd="sng" algn="ctr">
                       <a:solidFill>
-                        <a:srgbClr val="D0CCE8"/>
+                        <a:srgbClr val="232F48"/>
                       </a:solidFill>
                       <a:prstDash val="solid"/>
                       <a:round/>
@@ -5328,7 +5466,7 @@
                     </a:lnL>
                     <a:lnR w="12700" cap="flat" cmpd="sng" algn="ctr">
                       <a:solidFill>
-                        <a:srgbClr val="D0CCE8"/>
+                        <a:srgbClr val="232F48"/>
                       </a:solidFill>
                       <a:prstDash val="solid"/>
                       <a:round/>
@@ -5337,7 +5475,7 @@
                     </a:lnR>
                     <a:lnT w="12700" cap="flat" cmpd="sng" algn="ctr">
                       <a:solidFill>
-                        <a:srgbClr val="D0CCE8"/>
+                        <a:srgbClr val="232F48"/>
                       </a:solidFill>
                       <a:prstDash val="solid"/>
                       <a:round/>
@@ -5346,13 +5484,16 @@
                     </a:lnT>
                     <a:lnB w="12700" cap="flat" cmpd="sng" algn="ctr">
                       <a:solidFill>
-                        <a:srgbClr val="D0CCE8"/>
+                        <a:srgbClr val="232F48"/>
                       </a:solidFill>
                       <a:prstDash val="solid"/>
                       <a:round/>
                       <a:headEnd type="none" w="med" len="med"/>
                       <a:tailEnd type="none" w="med" len="med"/>
                     </a:lnB>
+                    <a:solidFill>
+                      <a:srgbClr val="121A2B"/>
+                    </a:solidFill>
                   </a:tcPr>
                 </a:tc>
                 <a:tc>
@@ -5366,7 +5507,7 @@
                       <a:r>
                         <a:rPr lang="en-US" sz="1000" dirty="0">
                           <a:solidFill>
-                            <a:srgbClr val="000000"/>
+                            <a:srgbClr val="F1F5F9"/>
                           </a:solidFill>
                           <a:latin typeface="Arial" pitchFamily="34" charset="0"/>
                           <a:ea typeface="Arial" pitchFamily="34" charset="-122"/>
@@ -5384,7 +5525,7 @@
                   <a:tcPr marL="91440" marR="91440" marT="45720" marB="45720">
                     <a:lnL w="12700" cap="flat" cmpd="sng" algn="ctr">
                       <a:solidFill>
-                        <a:srgbClr val="D0CCE8"/>
+                        <a:srgbClr val="232F48"/>
                       </a:solidFill>
                       <a:prstDash val="solid"/>
                       <a:round/>
@@ -5393,7 +5534,7 @@
                     </a:lnL>
                     <a:lnR w="12700" cap="flat" cmpd="sng" algn="ctr">
                       <a:solidFill>
-                        <a:srgbClr val="D0CCE8"/>
+                        <a:srgbClr val="232F48"/>
                       </a:solidFill>
                       <a:prstDash val="solid"/>
                       <a:round/>
@@ -5402,7 +5543,7 @@
                     </a:lnR>
                     <a:lnT w="12700" cap="flat" cmpd="sng" algn="ctr">
                       <a:solidFill>
-                        <a:srgbClr val="D0CCE8"/>
+                        <a:srgbClr val="232F48"/>
                       </a:solidFill>
                       <a:prstDash val="solid"/>
                       <a:round/>
@@ -5411,13 +5552,16 @@
                     </a:lnT>
                     <a:lnB w="12700" cap="flat" cmpd="sng" algn="ctr">
                       <a:solidFill>
-                        <a:srgbClr val="D0CCE8"/>
+                        <a:srgbClr val="232F48"/>
                       </a:solidFill>
                       <a:prstDash val="solid"/>
                       <a:round/>
                       <a:headEnd type="none" w="med" len="med"/>
                       <a:tailEnd type="none" w="med" len="med"/>
                     </a:lnB>
+                    <a:solidFill>
+                      <a:srgbClr val="121A2B"/>
+                    </a:solidFill>
                   </a:tcPr>
                 </a:tc>
                 <a:tc>
@@ -5431,7 +5575,7 @@
                       <a:r>
                         <a:rPr lang="en-US" sz="1000" dirty="0">
                           <a:solidFill>
-                            <a:srgbClr val="000000"/>
+                            <a:srgbClr val="F1F5F9"/>
                           </a:solidFill>
                           <a:latin typeface="Arial" pitchFamily="34" charset="0"/>
                           <a:ea typeface="Arial" pitchFamily="34" charset="-122"/>
@@ -5449,7 +5593,7 @@
                   <a:tcPr marL="91440" marR="91440" marT="45720" marB="45720">
                     <a:lnL w="12700" cap="flat" cmpd="sng" algn="ctr">
                       <a:solidFill>
-                        <a:srgbClr val="D0CCE8"/>
+                        <a:srgbClr val="232F48"/>
                       </a:solidFill>
                       <a:prstDash val="solid"/>
                       <a:round/>
@@ -5458,7 +5602,7 @@
                     </a:lnL>
                     <a:lnR w="12700" cap="flat" cmpd="sng" algn="ctr">
                       <a:solidFill>
-                        <a:srgbClr val="D0CCE8"/>
+                        <a:srgbClr val="232F48"/>
                       </a:solidFill>
                       <a:prstDash val="solid"/>
                       <a:round/>
@@ -5467,7 +5611,7 @@
                     </a:lnR>
                     <a:lnT w="12700" cap="flat" cmpd="sng" algn="ctr">
                       <a:solidFill>
-                        <a:srgbClr val="D0CCE8"/>
+                        <a:srgbClr val="232F48"/>
                       </a:solidFill>
                       <a:prstDash val="solid"/>
                       <a:round/>
@@ -5476,13 +5620,16 @@
                     </a:lnT>
                     <a:lnB w="12700" cap="flat" cmpd="sng" algn="ctr">
                       <a:solidFill>
-                        <a:srgbClr val="D0CCE8"/>
+                        <a:srgbClr val="232F48"/>
                       </a:solidFill>
                       <a:prstDash val="solid"/>
                       <a:round/>
                       <a:headEnd type="none" w="med" len="med"/>
                       <a:tailEnd type="none" w="med" len="med"/>
                     </a:lnB>
+                    <a:solidFill>
+                      <a:srgbClr val="121A2B"/>
+                    </a:solidFill>
                   </a:tcPr>
                 </a:tc>
                 <a:tc>
@@ -5496,7 +5643,7 @@
                       <a:r>
                         <a:rPr lang="en-US" sz="1000" dirty="0">
                           <a:solidFill>
-                            <a:srgbClr val="000000"/>
+                            <a:srgbClr val="A7F3D0"/>
                           </a:solidFill>
                           <a:latin typeface="Arial" pitchFamily="34" charset="0"/>
                           <a:ea typeface="Arial" pitchFamily="34" charset="-122"/>
@@ -5514,7 +5661,7 @@
                   <a:tcPr marL="91440" marR="91440" marT="45720" marB="45720">
                     <a:lnL w="12700" cap="flat" cmpd="sng" algn="ctr">
                       <a:solidFill>
-                        <a:srgbClr val="D0CCE8"/>
+                        <a:srgbClr val="232F48"/>
                       </a:solidFill>
                       <a:prstDash val="solid"/>
                       <a:round/>
@@ -5523,7 +5670,7 @@
                     </a:lnL>
                     <a:lnR w="12700" cap="flat" cmpd="sng" algn="ctr">
                       <a:solidFill>
-                        <a:srgbClr val="D0CCE8"/>
+                        <a:srgbClr val="232F48"/>
                       </a:solidFill>
                       <a:prstDash val="solid"/>
                       <a:round/>
@@ -5532,7 +5679,7 @@
                     </a:lnR>
                     <a:lnT w="12700" cap="flat" cmpd="sng" algn="ctr">
                       <a:solidFill>
-                        <a:srgbClr val="D0CCE8"/>
+                        <a:srgbClr val="232F48"/>
                       </a:solidFill>
                       <a:prstDash val="solid"/>
                       <a:round/>
@@ -5541,13 +5688,16 @@
                     </a:lnT>
                     <a:lnB w="12700" cap="flat" cmpd="sng" algn="ctr">
                       <a:solidFill>
-                        <a:srgbClr val="D0CCE8"/>
+                        <a:srgbClr val="232F48"/>
                       </a:solidFill>
                       <a:prstDash val="solid"/>
                       <a:round/>
                       <a:headEnd type="none" w="med" len="med"/>
                       <a:tailEnd type="none" w="med" len="med"/>
                     </a:lnB>
+                    <a:solidFill>
+                      <a:srgbClr val="121A2B"/>
+                    </a:solidFill>
                   </a:tcPr>
                 </a:tc>
               </a:tr>
@@ -5563,7 +5713,7 @@
                       <a:r>
                         <a:rPr lang="en-US" sz="1000" b="1" dirty="0">
                           <a:solidFill>
-                            <a:srgbClr val="000000"/>
+                            <a:srgbClr val="F1F5F9"/>
                           </a:solidFill>
                           <a:latin typeface="Arial" pitchFamily="34" charset="0"/>
                           <a:ea typeface="Arial" pitchFamily="34" charset="-122"/>
@@ -5581,7 +5731,7 @@
                   <a:tcPr marL="91440" marR="91440" marT="45720" marB="45720">
                     <a:lnL w="12700" cap="flat" cmpd="sng" algn="ctr">
                       <a:solidFill>
-                        <a:srgbClr val="D0CCE8"/>
+                        <a:srgbClr val="232F48"/>
                       </a:solidFill>
                       <a:prstDash val="solid"/>
                       <a:round/>
@@ -5590,7 +5740,7 @@
                     </a:lnL>
                     <a:lnR w="12700" cap="flat" cmpd="sng" algn="ctr">
                       <a:solidFill>
-                        <a:srgbClr val="D0CCE8"/>
+                        <a:srgbClr val="232F48"/>
                       </a:solidFill>
                       <a:prstDash val="solid"/>
                       <a:round/>
@@ -5599,7 +5749,7 @@
                     </a:lnR>
                     <a:lnT w="12700" cap="flat" cmpd="sng" algn="ctr">
                       <a:solidFill>
-                        <a:srgbClr val="D0CCE8"/>
+                        <a:srgbClr val="232F48"/>
                       </a:solidFill>
                       <a:prstDash val="solid"/>
                       <a:round/>
@@ -5608,13 +5758,16 @@
                     </a:lnT>
                     <a:lnB w="12700" cap="flat" cmpd="sng" algn="ctr">
                       <a:solidFill>
-                        <a:srgbClr val="D0CCE8"/>
+                        <a:srgbClr val="232F48"/>
                       </a:solidFill>
                       <a:prstDash val="solid"/>
                       <a:round/>
                       <a:headEnd type="none" w="med" len="med"/>
                       <a:tailEnd type="none" w="med" len="med"/>
                     </a:lnB>
+                    <a:solidFill>
+                      <a:srgbClr val="121A2B"/>
+                    </a:solidFill>
                   </a:tcPr>
                 </a:tc>
                 <a:tc>
@@ -5628,7 +5781,7 @@
                       <a:r>
                         <a:rPr lang="en-US" sz="1000" dirty="0">
                           <a:solidFill>
-                            <a:srgbClr val="000000"/>
+                            <a:srgbClr val="F1F5F9"/>
                           </a:solidFill>
                           <a:latin typeface="Arial" pitchFamily="34" charset="0"/>
                           <a:ea typeface="Arial" pitchFamily="34" charset="-122"/>
@@ -5646,7 +5799,7 @@
                   <a:tcPr marL="91440" marR="91440" marT="45720" marB="45720">
                     <a:lnL w="12700" cap="flat" cmpd="sng" algn="ctr">
                       <a:solidFill>
-                        <a:srgbClr val="D0CCE8"/>
+                        <a:srgbClr val="232F48"/>
                       </a:solidFill>
                       <a:prstDash val="solid"/>
                       <a:round/>
@@ -5655,7 +5808,7 @@
                     </a:lnL>
                     <a:lnR w="12700" cap="flat" cmpd="sng" algn="ctr">
                       <a:solidFill>
-                        <a:srgbClr val="D0CCE8"/>
+                        <a:srgbClr val="232F48"/>
                       </a:solidFill>
                       <a:prstDash val="solid"/>
                       <a:round/>
@@ -5664,7 +5817,7 @@
                     </a:lnR>
                     <a:lnT w="12700" cap="flat" cmpd="sng" algn="ctr">
                       <a:solidFill>
-                        <a:srgbClr val="D0CCE8"/>
+                        <a:srgbClr val="232F48"/>
                       </a:solidFill>
                       <a:prstDash val="solid"/>
                       <a:round/>
@@ -5673,13 +5826,16 @@
                     </a:lnT>
                     <a:lnB w="12700" cap="flat" cmpd="sng" algn="ctr">
                       <a:solidFill>
-                        <a:srgbClr val="D0CCE8"/>
+                        <a:srgbClr val="232F48"/>
                       </a:solidFill>
                       <a:prstDash val="solid"/>
                       <a:round/>
                       <a:headEnd type="none" w="med" len="med"/>
                       <a:tailEnd type="none" w="med" len="med"/>
                     </a:lnB>
+                    <a:solidFill>
+                      <a:srgbClr val="121A2B"/>
+                    </a:solidFill>
                   </a:tcPr>
                 </a:tc>
                 <a:tc>
@@ -5693,7 +5849,7 @@
                       <a:r>
                         <a:rPr lang="en-US" sz="1000" dirty="0">
                           <a:solidFill>
-                            <a:srgbClr val="000000"/>
+                            <a:srgbClr val="F1F5F9"/>
                           </a:solidFill>
                           <a:latin typeface="Arial" pitchFamily="34" charset="0"/>
                           <a:ea typeface="Arial" pitchFamily="34" charset="-122"/>
@@ -5711,7 +5867,7 @@
                   <a:tcPr marL="91440" marR="91440" marT="45720" marB="45720">
                     <a:lnL w="12700" cap="flat" cmpd="sng" algn="ctr">
                       <a:solidFill>
-                        <a:srgbClr val="D0CCE8"/>
+                        <a:srgbClr val="232F48"/>
                       </a:solidFill>
                       <a:prstDash val="solid"/>
                       <a:round/>
@@ -5720,7 +5876,7 @@
                     </a:lnL>
                     <a:lnR w="12700" cap="flat" cmpd="sng" algn="ctr">
                       <a:solidFill>
-                        <a:srgbClr val="D0CCE8"/>
+                        <a:srgbClr val="232F48"/>
                       </a:solidFill>
                       <a:prstDash val="solid"/>
                       <a:round/>
@@ -5729,7 +5885,7 @@
                     </a:lnR>
                     <a:lnT w="12700" cap="flat" cmpd="sng" algn="ctr">
                       <a:solidFill>
-                        <a:srgbClr val="D0CCE8"/>
+                        <a:srgbClr val="232F48"/>
                       </a:solidFill>
                       <a:prstDash val="solid"/>
                       <a:round/>
@@ -5738,13 +5894,16 @@
                     </a:lnT>
                     <a:lnB w="12700" cap="flat" cmpd="sng" algn="ctr">
                       <a:solidFill>
-                        <a:srgbClr val="D0CCE8"/>
+                        <a:srgbClr val="232F48"/>
                       </a:solidFill>
                       <a:prstDash val="solid"/>
                       <a:round/>
                       <a:headEnd type="none" w="med" len="med"/>
                       <a:tailEnd type="none" w="med" len="med"/>
                     </a:lnB>
+                    <a:solidFill>
+                      <a:srgbClr val="121A2B"/>
+                    </a:solidFill>
                   </a:tcPr>
                 </a:tc>
                 <a:tc>
@@ -5758,7 +5917,7 @@
                       <a:r>
                         <a:rPr lang="en-US" sz="1000" dirty="0">
                           <a:solidFill>
-                            <a:srgbClr val="000000"/>
+                            <a:srgbClr val="A7F3D0"/>
                           </a:solidFill>
                           <a:latin typeface="Arial" pitchFamily="34" charset="0"/>
                           <a:ea typeface="Arial" pitchFamily="34" charset="-122"/>
@@ -5776,7 +5935,7 @@
                   <a:tcPr marL="91440" marR="91440" marT="45720" marB="45720">
                     <a:lnL w="12700" cap="flat" cmpd="sng" algn="ctr">
                       <a:solidFill>
-                        <a:srgbClr val="D0CCE8"/>
+                        <a:srgbClr val="232F48"/>
                       </a:solidFill>
                       <a:prstDash val="solid"/>
                       <a:round/>
@@ -5785,7 +5944,7 @@
                     </a:lnL>
                     <a:lnR w="12700" cap="flat" cmpd="sng" algn="ctr">
                       <a:solidFill>
-                        <a:srgbClr val="D0CCE8"/>
+                        <a:srgbClr val="232F48"/>
                       </a:solidFill>
                       <a:prstDash val="solid"/>
                       <a:round/>
@@ -5794,7 +5953,7 @@
                     </a:lnR>
                     <a:lnT w="12700" cap="flat" cmpd="sng" algn="ctr">
                       <a:solidFill>
-                        <a:srgbClr val="D0CCE8"/>
+                        <a:srgbClr val="232F48"/>
                       </a:solidFill>
                       <a:prstDash val="solid"/>
                       <a:round/>
@@ -5803,13 +5962,16 @@
                     </a:lnT>
                     <a:lnB w="12700" cap="flat" cmpd="sng" algn="ctr">
                       <a:solidFill>
-                        <a:srgbClr val="D0CCE8"/>
+                        <a:srgbClr val="232F48"/>
                       </a:solidFill>
                       <a:prstDash val="solid"/>
                       <a:round/>
                       <a:headEnd type="none" w="med" len="med"/>
                       <a:tailEnd type="none" w="med" len="med"/>
                     </a:lnB>
+                    <a:solidFill>
+                      <a:srgbClr val="121A2B"/>
+                    </a:solidFill>
                   </a:tcPr>
                 </a:tc>
               </a:tr>
@@ -5825,7 +5987,7 @@
                       <a:r>
                         <a:rPr lang="en-US" sz="1000" b="1" dirty="0">
                           <a:solidFill>
-                            <a:srgbClr val="000000"/>
+                            <a:srgbClr val="F1F5F9"/>
                           </a:solidFill>
                           <a:latin typeface="Arial" pitchFamily="34" charset="0"/>
                           <a:ea typeface="Arial" pitchFamily="34" charset="-122"/>
@@ -5843,7 +6005,7 @@
                   <a:tcPr marL="91440" marR="91440" marT="45720" marB="45720">
                     <a:lnL w="12700" cap="flat" cmpd="sng" algn="ctr">
                       <a:solidFill>
-                        <a:srgbClr val="D0CCE8"/>
+                        <a:srgbClr val="232F48"/>
                       </a:solidFill>
                       <a:prstDash val="solid"/>
                       <a:round/>
@@ -5852,7 +6014,7 @@
                     </a:lnL>
                     <a:lnR w="12700" cap="flat" cmpd="sng" algn="ctr">
                       <a:solidFill>
-                        <a:srgbClr val="D0CCE8"/>
+                        <a:srgbClr val="232F48"/>
                       </a:solidFill>
                       <a:prstDash val="solid"/>
                       <a:round/>
@@ -5861,7 +6023,7 @@
                     </a:lnR>
                     <a:lnT w="12700" cap="flat" cmpd="sng" algn="ctr">
                       <a:solidFill>
-                        <a:srgbClr val="D0CCE8"/>
+                        <a:srgbClr val="232F48"/>
                       </a:solidFill>
                       <a:prstDash val="solid"/>
                       <a:round/>
@@ -5870,13 +6032,16 @@
                     </a:lnT>
                     <a:lnB w="12700" cap="flat" cmpd="sng" algn="ctr">
                       <a:solidFill>
-                        <a:srgbClr val="D0CCE8"/>
+                        <a:srgbClr val="232F48"/>
                       </a:solidFill>
                       <a:prstDash val="solid"/>
                       <a:round/>
                       <a:headEnd type="none" w="med" len="med"/>
                       <a:tailEnd type="none" w="med" len="med"/>
                     </a:lnB>
+                    <a:solidFill>
+                      <a:srgbClr val="121A2B"/>
+                    </a:solidFill>
                   </a:tcPr>
                 </a:tc>
                 <a:tc>
@@ -5890,7 +6055,7 @@
                       <a:r>
                         <a:rPr lang="en-US" sz="1000" dirty="0">
                           <a:solidFill>
-                            <a:srgbClr val="000000"/>
+                            <a:srgbClr val="F1F5F9"/>
                           </a:solidFill>
                           <a:latin typeface="Arial" pitchFamily="34" charset="0"/>
                           <a:ea typeface="Arial" pitchFamily="34" charset="-122"/>
@@ -5908,7 +6073,7 @@
                   <a:tcPr marL="91440" marR="91440" marT="45720" marB="45720">
                     <a:lnL w="12700" cap="flat" cmpd="sng" algn="ctr">
                       <a:solidFill>
-                        <a:srgbClr val="D0CCE8"/>
+                        <a:srgbClr val="232F48"/>
                       </a:solidFill>
                       <a:prstDash val="solid"/>
                       <a:round/>
@@ -5917,7 +6082,7 @@
                     </a:lnL>
                     <a:lnR w="12700" cap="flat" cmpd="sng" algn="ctr">
                       <a:solidFill>
-                        <a:srgbClr val="D0CCE8"/>
+                        <a:srgbClr val="232F48"/>
                       </a:solidFill>
                       <a:prstDash val="solid"/>
                       <a:round/>
@@ -5926,7 +6091,7 @@
                     </a:lnR>
                     <a:lnT w="12700" cap="flat" cmpd="sng" algn="ctr">
                       <a:solidFill>
-                        <a:srgbClr val="D0CCE8"/>
+                        <a:srgbClr val="232F48"/>
                       </a:solidFill>
                       <a:prstDash val="solid"/>
                       <a:round/>
@@ -5935,13 +6100,16 @@
                     </a:lnT>
                     <a:lnB w="12700" cap="flat" cmpd="sng" algn="ctr">
                       <a:solidFill>
-                        <a:srgbClr val="D0CCE8"/>
+                        <a:srgbClr val="232F48"/>
                       </a:solidFill>
                       <a:prstDash val="solid"/>
                       <a:round/>
                       <a:headEnd type="none" w="med" len="med"/>
                       <a:tailEnd type="none" w="med" len="med"/>
                     </a:lnB>
+                    <a:solidFill>
+                      <a:srgbClr val="121A2B"/>
+                    </a:solidFill>
                   </a:tcPr>
                 </a:tc>
                 <a:tc>
@@ -5955,7 +6123,7 @@
                       <a:r>
                         <a:rPr lang="en-US" sz="1000" dirty="0">
                           <a:solidFill>
-                            <a:srgbClr val="000000"/>
+                            <a:srgbClr val="F1F5F9"/>
                           </a:solidFill>
                           <a:latin typeface="Arial" pitchFamily="34" charset="0"/>
                           <a:ea typeface="Arial" pitchFamily="34" charset="-122"/>
@@ -5973,7 +6141,7 @@
                   <a:tcPr marL="91440" marR="91440" marT="45720" marB="45720">
                     <a:lnL w="12700" cap="flat" cmpd="sng" algn="ctr">
                       <a:solidFill>
-                        <a:srgbClr val="D0CCE8"/>
+                        <a:srgbClr val="232F48"/>
                       </a:solidFill>
                       <a:prstDash val="solid"/>
                       <a:round/>
@@ -5982,7 +6150,7 @@
                     </a:lnL>
                     <a:lnR w="12700" cap="flat" cmpd="sng" algn="ctr">
                       <a:solidFill>
-                        <a:srgbClr val="D0CCE8"/>
+                        <a:srgbClr val="232F48"/>
                       </a:solidFill>
                       <a:prstDash val="solid"/>
                       <a:round/>
@@ -5991,7 +6159,7 @@
                     </a:lnR>
                     <a:lnT w="12700" cap="flat" cmpd="sng" algn="ctr">
                       <a:solidFill>
-                        <a:srgbClr val="D0CCE8"/>
+                        <a:srgbClr val="232F48"/>
                       </a:solidFill>
                       <a:prstDash val="solid"/>
                       <a:round/>
@@ -6000,13 +6168,16 @@
                     </a:lnT>
                     <a:lnB w="12700" cap="flat" cmpd="sng" algn="ctr">
                       <a:solidFill>
-                        <a:srgbClr val="D0CCE8"/>
+                        <a:srgbClr val="232F48"/>
                       </a:solidFill>
                       <a:prstDash val="solid"/>
                       <a:round/>
                       <a:headEnd type="none" w="med" len="med"/>
                       <a:tailEnd type="none" w="med" len="med"/>
                     </a:lnB>
+                    <a:solidFill>
+                      <a:srgbClr val="121A2B"/>
+                    </a:solidFill>
                   </a:tcPr>
                 </a:tc>
                 <a:tc>
@@ -6020,7 +6191,7 @@
                       <a:r>
                         <a:rPr lang="en-US" sz="1000" dirty="0">
                           <a:solidFill>
-                            <a:srgbClr val="000000"/>
+                            <a:srgbClr val="A7F3D0"/>
                           </a:solidFill>
                           <a:latin typeface="Arial" pitchFamily="34" charset="0"/>
                           <a:ea typeface="Arial" pitchFamily="34" charset="-122"/>
@@ -6038,7 +6209,7 @@
                   <a:tcPr marL="91440" marR="91440" marT="45720" marB="45720">
                     <a:lnL w="12700" cap="flat" cmpd="sng" algn="ctr">
                       <a:solidFill>
-                        <a:srgbClr val="D0CCE8"/>
+                        <a:srgbClr val="232F48"/>
                       </a:solidFill>
                       <a:prstDash val="solid"/>
                       <a:round/>
@@ -6047,7 +6218,7 @@
                     </a:lnL>
                     <a:lnR w="12700" cap="flat" cmpd="sng" algn="ctr">
                       <a:solidFill>
-                        <a:srgbClr val="D0CCE8"/>
+                        <a:srgbClr val="232F48"/>
                       </a:solidFill>
                       <a:prstDash val="solid"/>
                       <a:round/>
@@ -6056,7 +6227,7 @@
                     </a:lnR>
                     <a:lnT w="12700" cap="flat" cmpd="sng" algn="ctr">
                       <a:solidFill>
-                        <a:srgbClr val="D0CCE8"/>
+                        <a:srgbClr val="232F48"/>
                       </a:solidFill>
                       <a:prstDash val="solid"/>
                       <a:round/>
@@ -6065,13 +6236,16 @@
                     </a:lnT>
                     <a:lnB w="12700" cap="flat" cmpd="sng" algn="ctr">
                       <a:solidFill>
-                        <a:srgbClr val="D0CCE8"/>
+                        <a:srgbClr val="232F48"/>
                       </a:solidFill>
                       <a:prstDash val="solid"/>
                       <a:round/>
                       <a:headEnd type="none" w="med" len="med"/>
                       <a:tailEnd type="none" w="med" len="med"/>
                     </a:lnB>
+                    <a:solidFill>
+                      <a:srgbClr val="121A2B"/>
+                    </a:solidFill>
                   </a:tcPr>
                 </a:tc>
               </a:tr>
@@ -6087,7 +6261,7 @@
                       <a:r>
                         <a:rPr lang="en-US" sz="1000" b="1" dirty="0">
                           <a:solidFill>
-                            <a:srgbClr val="000000"/>
+                            <a:srgbClr val="F1F5F9"/>
                           </a:solidFill>
                           <a:latin typeface="Arial" pitchFamily="34" charset="0"/>
                           <a:ea typeface="Arial" pitchFamily="34" charset="-122"/>
@@ -6105,7 +6279,7 @@
                   <a:tcPr marL="91440" marR="91440" marT="45720" marB="45720">
                     <a:lnL w="12700" cap="flat" cmpd="sng" algn="ctr">
                       <a:solidFill>
-                        <a:srgbClr val="D0CCE8"/>
+                        <a:srgbClr val="232F48"/>
                       </a:solidFill>
                       <a:prstDash val="solid"/>
                       <a:round/>
@@ -6114,7 +6288,7 @@
                     </a:lnL>
                     <a:lnR w="12700" cap="flat" cmpd="sng" algn="ctr">
                       <a:solidFill>
-                        <a:srgbClr val="D0CCE8"/>
+                        <a:srgbClr val="232F48"/>
                       </a:solidFill>
                       <a:prstDash val="solid"/>
                       <a:round/>
@@ -6123,7 +6297,7 @@
                     </a:lnR>
                     <a:lnT w="12700" cap="flat" cmpd="sng" algn="ctr">
                       <a:solidFill>
-                        <a:srgbClr val="D0CCE8"/>
+                        <a:srgbClr val="232F48"/>
                       </a:solidFill>
                       <a:prstDash val="solid"/>
                       <a:round/>
@@ -6132,13 +6306,16 @@
                     </a:lnT>
                     <a:lnB w="12700" cap="flat" cmpd="sng" algn="ctr">
                       <a:solidFill>
-                        <a:srgbClr val="D0CCE8"/>
+                        <a:srgbClr val="232F48"/>
                       </a:solidFill>
                       <a:prstDash val="solid"/>
                       <a:round/>
                       <a:headEnd type="none" w="med" len="med"/>
                       <a:tailEnd type="none" w="med" len="med"/>
                     </a:lnB>
+                    <a:solidFill>
+                      <a:srgbClr val="121A2B"/>
+                    </a:solidFill>
                   </a:tcPr>
                 </a:tc>
                 <a:tc>
@@ -6152,7 +6329,7 @@
                       <a:r>
                         <a:rPr lang="en-US" sz="1000" dirty="0">
                           <a:solidFill>
-                            <a:srgbClr val="000000"/>
+                            <a:srgbClr val="F1F5F9"/>
                           </a:solidFill>
                           <a:latin typeface="Arial" pitchFamily="34" charset="0"/>
                           <a:ea typeface="Arial" pitchFamily="34" charset="-122"/>
@@ -6170,7 +6347,7 @@
                   <a:tcPr marL="91440" marR="91440" marT="45720" marB="45720">
                     <a:lnL w="12700" cap="flat" cmpd="sng" algn="ctr">
                       <a:solidFill>
-                        <a:srgbClr val="D0CCE8"/>
+                        <a:srgbClr val="232F48"/>
                       </a:solidFill>
                       <a:prstDash val="solid"/>
                       <a:round/>
@@ -6179,7 +6356,7 @@
                     </a:lnL>
                     <a:lnR w="12700" cap="flat" cmpd="sng" algn="ctr">
                       <a:solidFill>
-                        <a:srgbClr val="D0CCE8"/>
+                        <a:srgbClr val="232F48"/>
                       </a:solidFill>
                       <a:prstDash val="solid"/>
                       <a:round/>
@@ -6188,7 +6365,7 @@
                     </a:lnR>
                     <a:lnT w="12700" cap="flat" cmpd="sng" algn="ctr">
                       <a:solidFill>
-                        <a:srgbClr val="D0CCE8"/>
+                        <a:srgbClr val="232F48"/>
                       </a:solidFill>
                       <a:prstDash val="solid"/>
                       <a:round/>
@@ -6197,13 +6374,16 @@
                     </a:lnT>
                     <a:lnB w="12700" cap="flat" cmpd="sng" algn="ctr">
                       <a:solidFill>
-                        <a:srgbClr val="D0CCE8"/>
+                        <a:srgbClr val="232F48"/>
                       </a:solidFill>
                       <a:prstDash val="solid"/>
                       <a:round/>
                       <a:headEnd type="none" w="med" len="med"/>
                       <a:tailEnd type="none" w="med" len="med"/>
                     </a:lnB>
+                    <a:solidFill>
+                      <a:srgbClr val="121A2B"/>
+                    </a:solidFill>
                   </a:tcPr>
                 </a:tc>
                 <a:tc>
@@ -6217,7 +6397,7 @@
                       <a:r>
                         <a:rPr lang="en-US" sz="1000" dirty="0">
                           <a:solidFill>
-                            <a:srgbClr val="000000"/>
+                            <a:srgbClr val="F1F5F9"/>
                           </a:solidFill>
                           <a:latin typeface="Arial" pitchFamily="34" charset="0"/>
                           <a:ea typeface="Arial" pitchFamily="34" charset="-122"/>
@@ -6235,7 +6415,7 @@
                   <a:tcPr marL="91440" marR="91440" marT="45720" marB="45720">
                     <a:lnL w="12700" cap="flat" cmpd="sng" algn="ctr">
                       <a:solidFill>
-                        <a:srgbClr val="D0CCE8"/>
+                        <a:srgbClr val="232F48"/>
                       </a:solidFill>
                       <a:prstDash val="solid"/>
                       <a:round/>
@@ -6244,7 +6424,7 @@
                     </a:lnL>
                     <a:lnR w="12700" cap="flat" cmpd="sng" algn="ctr">
                       <a:solidFill>
-                        <a:srgbClr val="D0CCE8"/>
+                        <a:srgbClr val="232F48"/>
                       </a:solidFill>
                       <a:prstDash val="solid"/>
                       <a:round/>
@@ -6253,7 +6433,7 @@
                     </a:lnR>
                     <a:lnT w="12700" cap="flat" cmpd="sng" algn="ctr">
                       <a:solidFill>
-                        <a:srgbClr val="D0CCE8"/>
+                        <a:srgbClr val="232F48"/>
                       </a:solidFill>
                       <a:prstDash val="solid"/>
                       <a:round/>
@@ -6262,13 +6442,16 @@
                     </a:lnT>
                     <a:lnB w="12700" cap="flat" cmpd="sng" algn="ctr">
                       <a:solidFill>
-                        <a:srgbClr val="D0CCE8"/>
+                        <a:srgbClr val="232F48"/>
                       </a:solidFill>
                       <a:prstDash val="solid"/>
                       <a:round/>
                       <a:headEnd type="none" w="med" len="med"/>
                       <a:tailEnd type="none" w="med" len="med"/>
                     </a:lnB>
+                    <a:solidFill>
+                      <a:srgbClr val="121A2B"/>
+                    </a:solidFill>
                   </a:tcPr>
                 </a:tc>
                 <a:tc>
@@ -6282,7 +6465,7 @@
                       <a:r>
                         <a:rPr lang="en-US" sz="1000" dirty="0">
                           <a:solidFill>
-                            <a:srgbClr val="000000"/>
+                            <a:srgbClr val="A7F3D0"/>
                           </a:solidFill>
                           <a:latin typeface="Arial" pitchFamily="34" charset="0"/>
                           <a:ea typeface="Arial" pitchFamily="34" charset="-122"/>
@@ -6300,7 +6483,7 @@
                   <a:tcPr marL="91440" marR="91440" marT="45720" marB="45720">
                     <a:lnL w="12700" cap="flat" cmpd="sng" algn="ctr">
                       <a:solidFill>
-                        <a:srgbClr val="D0CCE8"/>
+                        <a:srgbClr val="232F48"/>
                       </a:solidFill>
                       <a:prstDash val="solid"/>
                       <a:round/>
@@ -6309,7 +6492,7 @@
                     </a:lnL>
                     <a:lnR w="12700" cap="flat" cmpd="sng" algn="ctr">
                       <a:solidFill>
-                        <a:srgbClr val="D0CCE8"/>
+                        <a:srgbClr val="232F48"/>
                       </a:solidFill>
                       <a:prstDash val="solid"/>
                       <a:round/>
@@ -6318,7 +6501,7 @@
                     </a:lnR>
                     <a:lnT w="12700" cap="flat" cmpd="sng" algn="ctr">
                       <a:solidFill>
-                        <a:srgbClr val="D0CCE8"/>
+                        <a:srgbClr val="232F48"/>
                       </a:solidFill>
                       <a:prstDash val="solid"/>
                       <a:round/>
@@ -6327,13 +6510,16 @@
                     </a:lnT>
                     <a:lnB w="12700" cap="flat" cmpd="sng" algn="ctr">
                       <a:solidFill>
-                        <a:srgbClr val="D0CCE8"/>
+                        <a:srgbClr val="232F48"/>
                       </a:solidFill>
                       <a:prstDash val="solid"/>
                       <a:round/>
                       <a:headEnd type="none" w="med" len="med"/>
                       <a:tailEnd type="none" w="med" len="med"/>
                     </a:lnB>
+                    <a:solidFill>
+                      <a:srgbClr val="121A2B"/>
+                    </a:solidFill>
                   </a:tcPr>
                 </a:tc>
               </a:tr>
@@ -6349,7 +6535,7 @@
                       <a:r>
                         <a:rPr lang="en-US" sz="1000" b="1" dirty="0">
                           <a:solidFill>
-                            <a:srgbClr val="000000"/>
+                            <a:srgbClr val="F1F5F9"/>
                           </a:solidFill>
                           <a:latin typeface="Arial" pitchFamily="34" charset="0"/>
                           <a:ea typeface="Arial" pitchFamily="34" charset="-122"/>
@@ -6367,7 +6553,7 @@
                   <a:tcPr marL="91440" marR="91440" marT="45720" marB="45720">
                     <a:lnL w="12700" cap="flat" cmpd="sng" algn="ctr">
                       <a:solidFill>
-                        <a:srgbClr val="D0CCE8"/>
+                        <a:srgbClr val="232F48"/>
                       </a:solidFill>
                       <a:prstDash val="solid"/>
                       <a:round/>
@@ -6376,7 +6562,7 @@
                     </a:lnL>
                     <a:lnR w="12700" cap="flat" cmpd="sng" algn="ctr">
                       <a:solidFill>
-                        <a:srgbClr val="D0CCE8"/>
+                        <a:srgbClr val="232F48"/>
                       </a:solidFill>
                       <a:prstDash val="solid"/>
                       <a:round/>
@@ -6385,7 +6571,7 @@
                     </a:lnR>
                     <a:lnT w="12700" cap="flat" cmpd="sng" algn="ctr">
                       <a:solidFill>
-                        <a:srgbClr val="D0CCE8"/>
+                        <a:srgbClr val="232F48"/>
                       </a:solidFill>
                       <a:prstDash val="solid"/>
                       <a:round/>
@@ -6394,13 +6580,16 @@
                     </a:lnT>
                     <a:lnB w="12700" cap="flat" cmpd="sng" algn="ctr">
                       <a:solidFill>
-                        <a:srgbClr val="D0CCE8"/>
+                        <a:srgbClr val="232F48"/>
                       </a:solidFill>
                       <a:prstDash val="solid"/>
                       <a:round/>
                       <a:headEnd type="none" w="med" len="med"/>
                       <a:tailEnd type="none" w="med" len="med"/>
                     </a:lnB>
+                    <a:solidFill>
+                      <a:srgbClr val="121A2B"/>
+                    </a:solidFill>
                   </a:tcPr>
                 </a:tc>
                 <a:tc>
@@ -6414,7 +6603,7 @@
                       <a:r>
                         <a:rPr lang="en-US" sz="1000" dirty="0">
                           <a:solidFill>
-                            <a:srgbClr val="000000"/>
+                            <a:srgbClr val="F1F5F9"/>
                           </a:solidFill>
                           <a:latin typeface="Arial" pitchFamily="34" charset="0"/>
                           <a:ea typeface="Arial" pitchFamily="34" charset="-122"/>
@@ -6432,7 +6621,7 @@
                   <a:tcPr marL="91440" marR="91440" marT="45720" marB="45720">
                     <a:lnL w="12700" cap="flat" cmpd="sng" algn="ctr">
                       <a:solidFill>
-                        <a:srgbClr val="D0CCE8"/>
+                        <a:srgbClr val="232F48"/>
                       </a:solidFill>
                       <a:prstDash val="solid"/>
                       <a:round/>
@@ -6441,7 +6630,7 @@
                     </a:lnL>
                     <a:lnR w="12700" cap="flat" cmpd="sng" algn="ctr">
                       <a:solidFill>
-                        <a:srgbClr val="D0CCE8"/>
+                        <a:srgbClr val="232F48"/>
                       </a:solidFill>
                       <a:prstDash val="solid"/>
                       <a:round/>
@@ -6450,7 +6639,7 @@
                     </a:lnR>
                     <a:lnT w="12700" cap="flat" cmpd="sng" algn="ctr">
                       <a:solidFill>
-                        <a:srgbClr val="D0CCE8"/>
+                        <a:srgbClr val="232F48"/>
                       </a:solidFill>
                       <a:prstDash val="solid"/>
                       <a:round/>
@@ -6459,13 +6648,16 @@
                     </a:lnT>
                     <a:lnB w="12700" cap="flat" cmpd="sng" algn="ctr">
                       <a:solidFill>
-                        <a:srgbClr val="D0CCE8"/>
+                        <a:srgbClr val="232F48"/>
                       </a:solidFill>
                       <a:prstDash val="solid"/>
                       <a:round/>
                       <a:headEnd type="none" w="med" len="med"/>
                       <a:tailEnd type="none" w="med" len="med"/>
                     </a:lnB>
+                    <a:solidFill>
+                      <a:srgbClr val="121A2B"/>
+                    </a:solidFill>
                   </a:tcPr>
                 </a:tc>
                 <a:tc>
@@ -6479,7 +6671,7 @@
                       <a:r>
                         <a:rPr lang="en-US" sz="1000" dirty="0">
                           <a:solidFill>
-                            <a:srgbClr val="000000"/>
+                            <a:srgbClr val="F1F5F9"/>
                           </a:solidFill>
                           <a:latin typeface="Arial" pitchFamily="34" charset="0"/>
                           <a:ea typeface="Arial" pitchFamily="34" charset="-122"/>
@@ -6497,7 +6689,7 @@
                   <a:tcPr marL="91440" marR="91440" marT="45720" marB="45720">
                     <a:lnL w="12700" cap="flat" cmpd="sng" algn="ctr">
                       <a:solidFill>
-                        <a:srgbClr val="D0CCE8"/>
+                        <a:srgbClr val="232F48"/>
                       </a:solidFill>
                       <a:prstDash val="solid"/>
                       <a:round/>
@@ -6506,7 +6698,7 @@
                     </a:lnL>
                     <a:lnR w="12700" cap="flat" cmpd="sng" algn="ctr">
                       <a:solidFill>
-                        <a:srgbClr val="D0CCE8"/>
+                        <a:srgbClr val="232F48"/>
                       </a:solidFill>
                       <a:prstDash val="solid"/>
                       <a:round/>
@@ -6515,7 +6707,7 @@
                     </a:lnR>
                     <a:lnT w="12700" cap="flat" cmpd="sng" algn="ctr">
                       <a:solidFill>
-                        <a:srgbClr val="D0CCE8"/>
+                        <a:srgbClr val="232F48"/>
                       </a:solidFill>
                       <a:prstDash val="solid"/>
                       <a:round/>
@@ -6524,13 +6716,16 @@
                     </a:lnT>
                     <a:lnB w="12700" cap="flat" cmpd="sng" algn="ctr">
                       <a:solidFill>
-                        <a:srgbClr val="D0CCE8"/>
+                        <a:srgbClr val="232F48"/>
                       </a:solidFill>
                       <a:prstDash val="solid"/>
                       <a:round/>
                       <a:headEnd type="none" w="med" len="med"/>
                       <a:tailEnd type="none" w="med" len="med"/>
                     </a:lnB>
+                    <a:solidFill>
+                      <a:srgbClr val="121A2B"/>
+                    </a:solidFill>
                   </a:tcPr>
                 </a:tc>
                 <a:tc>
@@ -6544,7 +6739,7 @@
                       <a:r>
                         <a:rPr lang="en-US" sz="1000" dirty="0">
                           <a:solidFill>
-                            <a:srgbClr val="000000"/>
+                            <a:srgbClr val="A7F3D0"/>
                           </a:solidFill>
                           <a:latin typeface="Arial" pitchFamily="34" charset="0"/>
                           <a:ea typeface="Arial" pitchFamily="34" charset="-122"/>
@@ -6562,7 +6757,7 @@
                   <a:tcPr marL="91440" marR="91440" marT="45720" marB="45720">
                     <a:lnL w="12700" cap="flat" cmpd="sng" algn="ctr">
                       <a:solidFill>
-                        <a:srgbClr val="D0CCE8"/>
+                        <a:srgbClr val="232F48"/>
                       </a:solidFill>
                       <a:prstDash val="solid"/>
                       <a:round/>
@@ -6571,7 +6766,7 @@
                     </a:lnL>
                     <a:lnR w="12700" cap="flat" cmpd="sng" algn="ctr">
                       <a:solidFill>
-                        <a:srgbClr val="D0CCE8"/>
+                        <a:srgbClr val="232F48"/>
                       </a:solidFill>
                       <a:prstDash val="solid"/>
                       <a:round/>
@@ -6580,7 +6775,7 @@
                     </a:lnR>
                     <a:lnT w="12700" cap="flat" cmpd="sng" algn="ctr">
                       <a:solidFill>
-                        <a:srgbClr val="D0CCE8"/>
+                        <a:srgbClr val="232F48"/>
                       </a:solidFill>
                       <a:prstDash val="solid"/>
                       <a:round/>
@@ -6589,13 +6784,16 @@
                     </a:lnT>
                     <a:lnB w="12700" cap="flat" cmpd="sng" algn="ctr">
                       <a:solidFill>
-                        <a:srgbClr val="D0CCE8"/>
+                        <a:srgbClr val="232F48"/>
                       </a:solidFill>
                       <a:prstDash val="solid"/>
                       <a:round/>
                       <a:headEnd type="none" w="med" len="med"/>
                       <a:tailEnd type="none" w="med" len="med"/>
                     </a:lnB>
+                    <a:solidFill>
+                      <a:srgbClr val="121A2B"/>
+                    </a:solidFill>
                   </a:tcPr>
                 </a:tc>
               </a:tr>
@@ -6611,7 +6809,7 @@
                       <a:r>
                         <a:rPr lang="en-US" sz="1000" b="1" dirty="0">
                           <a:solidFill>
-                            <a:srgbClr val="000000"/>
+                            <a:srgbClr val="F1F5F9"/>
                           </a:solidFill>
                           <a:latin typeface="Arial" pitchFamily="34" charset="0"/>
                           <a:ea typeface="Arial" pitchFamily="34" charset="-122"/>
@@ -6629,7 +6827,7 @@
                   <a:tcPr marL="91440" marR="91440" marT="45720" marB="45720">
                     <a:lnL w="12700" cap="flat" cmpd="sng" algn="ctr">
                       <a:solidFill>
-                        <a:srgbClr val="D0CCE8"/>
+                        <a:srgbClr val="232F48"/>
                       </a:solidFill>
                       <a:prstDash val="solid"/>
                       <a:round/>
@@ -6638,7 +6836,7 @@
                     </a:lnL>
                     <a:lnR w="12700" cap="flat" cmpd="sng" algn="ctr">
                       <a:solidFill>
-                        <a:srgbClr val="D0CCE8"/>
+                        <a:srgbClr val="232F48"/>
                       </a:solidFill>
                       <a:prstDash val="solid"/>
                       <a:round/>
@@ -6647,7 +6845,7 @@
                     </a:lnR>
                     <a:lnT w="12700" cap="flat" cmpd="sng" algn="ctr">
                       <a:solidFill>
-                        <a:srgbClr val="D0CCE8"/>
+                        <a:srgbClr val="232F48"/>
                       </a:solidFill>
                       <a:prstDash val="solid"/>
                       <a:round/>
@@ -6656,13 +6854,16 @@
                     </a:lnT>
                     <a:lnB w="12700" cap="flat" cmpd="sng" algn="ctr">
                       <a:solidFill>
-                        <a:srgbClr val="D0CCE8"/>
+                        <a:srgbClr val="232F48"/>
                       </a:solidFill>
                       <a:prstDash val="solid"/>
                       <a:round/>
                       <a:headEnd type="none" w="med" len="med"/>
                       <a:tailEnd type="none" w="med" len="med"/>
                     </a:lnB>
+                    <a:solidFill>
+                      <a:srgbClr val="121A2B"/>
+                    </a:solidFill>
                   </a:tcPr>
                 </a:tc>
                 <a:tc>
@@ -6676,7 +6877,7 @@
                       <a:r>
                         <a:rPr lang="en-US" sz="1000" dirty="0">
                           <a:solidFill>
-                            <a:srgbClr val="000000"/>
+                            <a:srgbClr val="F1F5F9"/>
                           </a:solidFill>
                           <a:latin typeface="Arial" pitchFamily="34" charset="0"/>
                           <a:ea typeface="Arial" pitchFamily="34" charset="-122"/>
@@ -6694,7 +6895,7 @@
                   <a:tcPr marL="91440" marR="91440" marT="45720" marB="45720">
                     <a:lnL w="12700" cap="flat" cmpd="sng" algn="ctr">
                       <a:solidFill>
-                        <a:srgbClr val="D0CCE8"/>
+                        <a:srgbClr val="232F48"/>
                       </a:solidFill>
                       <a:prstDash val="solid"/>
                       <a:round/>
@@ -6703,7 +6904,7 @@
                     </a:lnL>
                     <a:lnR w="12700" cap="flat" cmpd="sng" algn="ctr">
                       <a:solidFill>
-                        <a:srgbClr val="D0CCE8"/>
+                        <a:srgbClr val="232F48"/>
                       </a:solidFill>
                       <a:prstDash val="solid"/>
                       <a:round/>
@@ -6712,7 +6913,7 @@
                     </a:lnR>
                     <a:lnT w="12700" cap="flat" cmpd="sng" algn="ctr">
                       <a:solidFill>
-                        <a:srgbClr val="D0CCE8"/>
+                        <a:srgbClr val="232F48"/>
                       </a:solidFill>
                       <a:prstDash val="solid"/>
                       <a:round/>
@@ -6721,13 +6922,16 @@
                     </a:lnT>
                     <a:lnB w="12700" cap="flat" cmpd="sng" algn="ctr">
                       <a:solidFill>
-                        <a:srgbClr val="D0CCE8"/>
+                        <a:srgbClr val="232F48"/>
                       </a:solidFill>
                       <a:prstDash val="solid"/>
                       <a:round/>
                       <a:headEnd type="none" w="med" len="med"/>
                       <a:tailEnd type="none" w="med" len="med"/>
                     </a:lnB>
+                    <a:solidFill>
+                      <a:srgbClr val="121A2B"/>
+                    </a:solidFill>
                   </a:tcPr>
                 </a:tc>
                 <a:tc>
@@ -6741,7 +6945,7 @@
                       <a:r>
                         <a:rPr lang="en-US" sz="1000" dirty="0">
                           <a:solidFill>
-                            <a:srgbClr val="000000"/>
+                            <a:srgbClr val="F1F5F9"/>
                           </a:solidFill>
                           <a:latin typeface="Arial" pitchFamily="34" charset="0"/>
                           <a:ea typeface="Arial" pitchFamily="34" charset="-122"/>
@@ -6759,7 +6963,7 @@
                   <a:tcPr marL="91440" marR="91440" marT="45720" marB="45720">
                     <a:lnL w="12700" cap="flat" cmpd="sng" algn="ctr">
                       <a:solidFill>
-                        <a:srgbClr val="D0CCE8"/>
+                        <a:srgbClr val="232F48"/>
                       </a:solidFill>
                       <a:prstDash val="solid"/>
                       <a:round/>
@@ -6768,7 +6972,7 @@
                     </a:lnL>
                     <a:lnR w="12700" cap="flat" cmpd="sng" algn="ctr">
                       <a:solidFill>
-                        <a:srgbClr val="D0CCE8"/>
+                        <a:srgbClr val="232F48"/>
                       </a:solidFill>
                       <a:prstDash val="solid"/>
                       <a:round/>
@@ -6777,7 +6981,7 @@
                     </a:lnR>
                     <a:lnT w="12700" cap="flat" cmpd="sng" algn="ctr">
                       <a:solidFill>
-                        <a:srgbClr val="D0CCE8"/>
+                        <a:srgbClr val="232F48"/>
                       </a:solidFill>
                       <a:prstDash val="solid"/>
                       <a:round/>
@@ -6786,13 +6990,16 @@
                     </a:lnT>
                     <a:lnB w="12700" cap="flat" cmpd="sng" algn="ctr">
                       <a:solidFill>
-                        <a:srgbClr val="D0CCE8"/>
+                        <a:srgbClr val="232F48"/>
                       </a:solidFill>
                       <a:prstDash val="solid"/>
                       <a:round/>
                       <a:headEnd type="none" w="med" len="med"/>
                       <a:tailEnd type="none" w="med" len="med"/>
                     </a:lnB>
+                    <a:solidFill>
+                      <a:srgbClr val="121A2B"/>
+                    </a:solidFill>
                   </a:tcPr>
                 </a:tc>
                 <a:tc>
@@ -6806,7 +7013,7 @@
                       <a:r>
                         <a:rPr lang="en-US" sz="1000" dirty="0">
                           <a:solidFill>
-                            <a:srgbClr val="000000"/>
+                            <a:srgbClr val="A7F3D0"/>
                           </a:solidFill>
                           <a:latin typeface="Arial" pitchFamily="34" charset="0"/>
                           <a:ea typeface="Arial" pitchFamily="34" charset="-122"/>
@@ -6824,7 +7031,7 @@
                   <a:tcPr marL="91440" marR="91440" marT="45720" marB="45720">
                     <a:lnL w="12700" cap="flat" cmpd="sng" algn="ctr">
                       <a:solidFill>
-                        <a:srgbClr val="D0CCE8"/>
+                        <a:srgbClr val="232F48"/>
                       </a:solidFill>
                       <a:prstDash val="solid"/>
                       <a:round/>
@@ -6833,7 +7040,7 @@
                     </a:lnL>
                     <a:lnR w="12700" cap="flat" cmpd="sng" algn="ctr">
                       <a:solidFill>
-                        <a:srgbClr val="D0CCE8"/>
+                        <a:srgbClr val="232F48"/>
                       </a:solidFill>
                       <a:prstDash val="solid"/>
                       <a:round/>
@@ -6842,7 +7049,7 @@
                     </a:lnR>
                     <a:lnT w="12700" cap="flat" cmpd="sng" algn="ctr">
                       <a:solidFill>
-                        <a:srgbClr val="D0CCE8"/>
+                        <a:srgbClr val="232F48"/>
                       </a:solidFill>
                       <a:prstDash val="solid"/>
                       <a:round/>
@@ -6851,13 +7058,16 @@
                     </a:lnT>
                     <a:lnB w="12700" cap="flat" cmpd="sng" algn="ctr">
                       <a:solidFill>
-                        <a:srgbClr val="D0CCE8"/>
+                        <a:srgbClr val="232F48"/>
                       </a:solidFill>
                       <a:prstDash val="solid"/>
                       <a:round/>
                       <a:headEnd type="none" w="med" len="med"/>
                       <a:tailEnd type="none" w="med" len="med"/>
                     </a:lnB>
+                    <a:solidFill>
+                      <a:srgbClr val="121A2B"/>
+                    </a:solidFill>
                   </a:tcPr>
                 </a:tc>
               </a:tr>
@@ -6905,7 +7115,7 @@
         </p:nvSpPr>
         <p:spPr>
           <a:xfrm>
-            <a:off x="731520" y="548640"/>
+            <a:off x="731520" y="457200"/>
             <a:ext cx="10515600" cy="274320"/>
           </a:xfrm>
           <a:prstGeom prst="rect">
@@ -6944,7 +7154,7 @@
         </p:nvSpPr>
         <p:spPr>
           <a:xfrm>
-            <a:off x="731520" y="914400"/>
+            <a:off x="731520" y="822960"/>
             <a:ext cx="10515600" cy="548640"/>
           </a:xfrm>
           <a:prstGeom prst="rect">
@@ -6983,14 +7193,14 @@
         </p:nvSpPr>
         <p:spPr>
           <a:xfrm>
-            <a:off x="731520" y="1645920"/>
-            <a:ext cx="10698480" cy="4389120"/>
+            <a:off x="731520" y="1554480"/>
+            <a:ext cx="10698480" cy="4572000"/>
           </a:xfrm>
           <a:prstGeom prst="rect">
             <a:avLst/>
           </a:prstGeom>
           <a:solidFill>
-            <a:srgbClr val="FFFFFF"/>
+            <a:srgbClr val="121A2B"/>
           </a:solidFill>
           <a:ln w="25400">
             <a:solidFill>
@@ -7008,7 +7218,7 @@
         </p:nvSpPr>
         <p:spPr>
           <a:xfrm>
-            <a:off x="1097280" y="2011680"/>
+            <a:off x="1097280" y="1920240"/>
             <a:ext cx="10058400" cy="1645920"/>
           </a:xfrm>
           <a:prstGeom prst="rect">
@@ -7023,19 +7233,19 @@
           <a:p>
             <a:pPr indent="0" marL="0">
               <a:lnSpc>
-                <a:spcPts val="2400"/>
+                <a:spcPts val="2200"/>
               </a:lnSpc>
               <a:buNone/>
             </a:pPr>
             <a:r>
-              <a:rPr lang="en-US" sz="1500" i="1" dirty="0">
+              <a:rPr lang="en-US" sz="1400" i="1" dirty="0">
                 <a:solidFill>
                   <a:srgbClr val="F1F5F9"/>
                 </a:solidFill>
               </a:rPr>
               <a:t>"IssueLift turns an open issue into a reviewable Contribution Contract and evidence-to-test map before coding begins. The deterministic Claim Gate can be inspected and improved; the public ProofBench lets contributors add counterexamples whenever a path, citation, requirement or test-evidence label is wrong. This makes reliability rules—not only UI code—open to community inspection and extension. We claim no impact numbers until measured."</a:t>
             </a:r>
-            <a:endParaRPr lang="en-US" sz="1500" dirty="0"/>
+            <a:endParaRPr lang="en-US" sz="1400" dirty="0"/>
           </a:p>
         </p:txBody>
       </p:sp>
@@ -7084,7 +7294,7 @@
         <p:spPr>
           <a:xfrm>
             <a:off x="1097280" y="4114800"/>
-            <a:ext cx="10058400" cy="1645920"/>
+            <a:ext cx="10058400" cy="1737360"/>
           </a:xfrm>
           <a:prstGeom prst="rect">
             <a:avLst/>
@@ -7206,7 +7416,7 @@
         </p:nvSpPr>
         <p:spPr>
           <a:xfrm>
-            <a:off x="731520" y="548640"/>
+            <a:off x="731520" y="457200"/>
             <a:ext cx="10515600" cy="274320"/>
           </a:xfrm>
           <a:prstGeom prst="rect">
@@ -7245,7 +7455,7 @@
         </p:nvSpPr>
         <p:spPr>
           <a:xfrm>
-            <a:off x="731520" y="914400"/>
+            <a:off x="731520" y="822960"/>
             <a:ext cx="10515600" cy="548640"/>
           </a:xfrm>
           <a:prstGeom prst="rect">
@@ -7291,8 +7501,8 @@
           </p:nvPr>
         </p:nvGraphicFramePr>
         <p:xfrm>
-          <a:off x="731520" y="1645920"/>
-          <a:ext cx="10698480" cy="4389120"/>
+          <a:off x="731520" y="1554480"/>
+          <a:ext cx="10698480" cy="4572000"/>
         </p:xfrm>
         <a:graphic>
           <a:graphicData uri="http://schemas.openxmlformats.org/drawingml/2006/table">
@@ -7303,7 +7513,7 @@
                 <a:gridCol w="3566160"/>
                 <a:gridCol w="3566160"/>
               </a:tblGrid>
-              <a:tr h="438912">
+              <a:tr h="457200">
                 <a:tc>
                   <a:txBody>
                     <a:bodyPr/>
@@ -7333,7 +7543,7 @@
                   <a:tcPr marL="91440" marR="91440" marT="45720" marB="45720">
                     <a:lnL w="12700" cap="flat" cmpd="sng" algn="ctr">
                       <a:solidFill>
-                        <a:srgbClr val="D0CCE8"/>
+                        <a:srgbClr val="232F48"/>
                       </a:solidFill>
                       <a:prstDash val="solid"/>
                       <a:round/>
@@ -7342,7 +7552,7 @@
                     </a:lnL>
                     <a:lnR w="12700" cap="flat" cmpd="sng" algn="ctr">
                       <a:solidFill>
-                        <a:srgbClr val="D0CCE8"/>
+                        <a:srgbClr val="232F48"/>
                       </a:solidFill>
                       <a:prstDash val="solid"/>
                       <a:round/>
@@ -7351,7 +7561,7 @@
                     </a:lnR>
                     <a:lnT w="12700" cap="flat" cmpd="sng" algn="ctr">
                       <a:solidFill>
-                        <a:srgbClr val="D0CCE8"/>
+                        <a:srgbClr val="232F48"/>
                       </a:solidFill>
                       <a:prstDash val="solid"/>
                       <a:round/>
@@ -7360,7 +7570,7 @@
                     </a:lnT>
                     <a:lnB w="12700" cap="flat" cmpd="sng" algn="ctr">
                       <a:solidFill>
-                        <a:srgbClr val="D0CCE8"/>
+                        <a:srgbClr val="232F48"/>
                       </a:solidFill>
                       <a:prstDash val="solid"/>
                       <a:round/>
@@ -7368,7 +7578,7 @@
                       <a:tailEnd type="none" w="med" len="med"/>
                     </a:lnB>
                     <a:solidFill>
-                      <a:srgbClr val="477BFF"/>
+                      <a:srgbClr val="1E293B"/>
                     </a:solidFill>
                   </a:tcPr>
                 </a:tc>
@@ -7401,7 +7611,7 @@
                   <a:tcPr marL="91440" marR="91440" marT="45720" marB="45720">
                     <a:lnL w="12700" cap="flat" cmpd="sng" algn="ctr">
                       <a:solidFill>
-                        <a:srgbClr val="D0CCE8"/>
+                        <a:srgbClr val="232F48"/>
                       </a:solidFill>
                       <a:prstDash val="solid"/>
                       <a:round/>
@@ -7410,7 +7620,7 @@
                     </a:lnL>
                     <a:lnR w="12700" cap="flat" cmpd="sng" algn="ctr">
                       <a:solidFill>
-                        <a:srgbClr val="D0CCE8"/>
+                        <a:srgbClr val="232F48"/>
                       </a:solidFill>
                       <a:prstDash val="solid"/>
                       <a:round/>
@@ -7419,7 +7629,7 @@
                     </a:lnR>
                     <a:lnT w="12700" cap="flat" cmpd="sng" algn="ctr">
                       <a:solidFill>
-                        <a:srgbClr val="D0CCE8"/>
+                        <a:srgbClr val="232F48"/>
                       </a:solidFill>
                       <a:prstDash val="solid"/>
                       <a:round/>
@@ -7428,7 +7638,7 @@
                     </a:lnT>
                     <a:lnB w="12700" cap="flat" cmpd="sng" algn="ctr">
                       <a:solidFill>
-                        <a:srgbClr val="D0CCE8"/>
+                        <a:srgbClr val="232F48"/>
                       </a:solidFill>
                       <a:prstDash val="solid"/>
                       <a:round/>
@@ -7436,7 +7646,7 @@
                       <a:tailEnd type="none" w="med" len="med"/>
                     </a:lnB>
                     <a:solidFill>
-                      <a:srgbClr val="477BFF"/>
+                      <a:srgbClr val="1E293B"/>
                     </a:solidFill>
                   </a:tcPr>
                 </a:tc>
@@ -7469,7 +7679,7 @@
                   <a:tcPr marL="91440" marR="91440" marT="45720" marB="45720">
                     <a:lnL w="12700" cap="flat" cmpd="sng" algn="ctr">
                       <a:solidFill>
-                        <a:srgbClr val="D0CCE8"/>
+                        <a:srgbClr val="232F48"/>
                       </a:solidFill>
                       <a:prstDash val="solid"/>
                       <a:round/>
@@ -7478,7 +7688,7 @@
                     </a:lnL>
                     <a:lnR w="12700" cap="flat" cmpd="sng" algn="ctr">
                       <a:solidFill>
-                        <a:srgbClr val="D0CCE8"/>
+                        <a:srgbClr val="232F48"/>
                       </a:solidFill>
                       <a:prstDash val="solid"/>
                       <a:round/>
@@ -7487,7 +7697,7 @@
                     </a:lnR>
                     <a:lnT w="12700" cap="flat" cmpd="sng" algn="ctr">
                       <a:solidFill>
-                        <a:srgbClr val="D0CCE8"/>
+                        <a:srgbClr val="232F48"/>
                       </a:solidFill>
                       <a:prstDash val="solid"/>
                       <a:round/>
@@ -7496,7 +7706,7 @@
                     </a:lnT>
                     <a:lnB w="12700" cap="flat" cmpd="sng" algn="ctr">
                       <a:solidFill>
-                        <a:srgbClr val="D0CCE8"/>
+                        <a:srgbClr val="232F48"/>
                       </a:solidFill>
                       <a:prstDash val="solid"/>
                       <a:round/>
@@ -7504,12 +7714,12 @@
                       <a:tailEnd type="none" w="med" len="med"/>
                     </a:lnB>
                     <a:solidFill>
-                      <a:srgbClr val="477BFF"/>
+                      <a:srgbClr val="1E293B"/>
                     </a:solidFill>
                   </a:tcPr>
                 </a:tc>
               </a:tr>
-              <a:tr h="438912">
+              <a:tr h="457200">
                 <a:tc>
                   <a:txBody>
                     <a:bodyPr/>
@@ -7519,15 +7729,15 @@
                         <a:buNone/>
                       </a:pPr>
                       <a:r>
-                        <a:rPr lang="en-US" sz="1000" dirty="0">
+                        <a:rPr lang="en-US" sz="1000" b="1" dirty="0">
                           <a:solidFill>
-                            <a:srgbClr val="000000"/>
+                            <a:srgbClr val="F1F5F9"/>
                           </a:solidFill>
                           <a:latin typeface="Arial" pitchFamily="34" charset="0"/>
                           <a:ea typeface="Arial" pitchFamily="34" charset="-122"/>
                           <a:cs typeface="Arial" pitchFamily="34" charset="-120"/>
                         </a:rPr>
-                        <a:t>1. Proper README</a:t>
+                        <a:t>1. Proper README &amp; Tests</a:t>
                       </a:r>
                       <a:endParaRPr lang="en-US" sz="1000" dirty="0">
                         <a:latin typeface="Arial" charset="0"/>
@@ -7539,7 +7749,7 @@
                   <a:tcPr marL="91440" marR="91440" marT="45720" marB="45720">
                     <a:lnL w="12700" cap="flat" cmpd="sng" algn="ctr">
                       <a:solidFill>
-                        <a:srgbClr val="D0CCE8"/>
+                        <a:srgbClr val="232F48"/>
                       </a:solidFill>
                       <a:prstDash val="solid"/>
                       <a:round/>
@@ -7548,7 +7758,7 @@
                     </a:lnL>
                     <a:lnR w="12700" cap="flat" cmpd="sng" algn="ctr">
                       <a:solidFill>
-                        <a:srgbClr val="D0CCE8"/>
+                        <a:srgbClr val="232F48"/>
                       </a:solidFill>
                       <a:prstDash val="solid"/>
                       <a:round/>
@@ -7557,7 +7767,7 @@
                     </a:lnR>
                     <a:lnT w="12700" cap="flat" cmpd="sng" algn="ctr">
                       <a:solidFill>
-                        <a:srgbClr val="D0CCE8"/>
+                        <a:srgbClr val="232F48"/>
                       </a:solidFill>
                       <a:prstDash val="solid"/>
                       <a:round/>
@@ -7566,13 +7776,16 @@
                     </a:lnT>
                     <a:lnB w="12700" cap="flat" cmpd="sng" algn="ctr">
                       <a:solidFill>
-                        <a:srgbClr val="D0CCE8"/>
+                        <a:srgbClr val="232F48"/>
                       </a:solidFill>
                       <a:prstDash val="solid"/>
                       <a:round/>
                       <a:headEnd type="none" w="med" len="med"/>
                       <a:tailEnd type="none" w="med" len="med"/>
                     </a:lnB>
+                    <a:solidFill>
+                      <a:srgbClr val="121A2B"/>
+                    </a:solidFill>
                   </a:tcPr>
                 </a:tc>
                 <a:tc>
@@ -7586,13 +7799,13 @@
                       <a:r>
                         <a:rPr lang="en-US" sz="1000" dirty="0">
                           <a:solidFill>
-                            <a:srgbClr val="000000"/>
+                            <a:srgbClr val="F1F5F9"/>
                           </a:solidFill>
                           <a:latin typeface="Arial" pitchFamily="34" charset="0"/>
                           <a:ea typeface="Arial" pitchFamily="34" charset="-122"/>
                           <a:cs typeface="Arial" pitchFamily="34" charset="-120"/>
                         </a:rPr>
-                        <a:t>README.md with architecture, setup, tests, screenshots, limitations</a:t>
+                        <a:t>README.md verified; 78 unit tests passing across 4 suites (vitest in tests/)</a:t>
                       </a:r>
                       <a:endParaRPr lang="en-US" sz="1000" dirty="0">
                         <a:latin typeface="Arial" charset="0"/>
@@ -7604,7 +7817,7 @@
                   <a:tcPr marL="91440" marR="91440" marT="45720" marB="45720">
                     <a:lnL w="12700" cap="flat" cmpd="sng" algn="ctr">
                       <a:solidFill>
-                        <a:srgbClr val="D0CCE8"/>
+                        <a:srgbClr val="232F48"/>
                       </a:solidFill>
                       <a:prstDash val="solid"/>
                       <a:round/>
@@ -7613,7 +7826,7 @@
                     </a:lnL>
                     <a:lnR w="12700" cap="flat" cmpd="sng" algn="ctr">
                       <a:solidFill>
-                        <a:srgbClr val="D0CCE8"/>
+                        <a:srgbClr val="232F48"/>
                       </a:solidFill>
                       <a:prstDash val="solid"/>
                       <a:round/>
@@ -7622,7 +7835,7 @@
                     </a:lnR>
                     <a:lnT w="12700" cap="flat" cmpd="sng" algn="ctr">
                       <a:solidFill>
-                        <a:srgbClr val="D0CCE8"/>
+                        <a:srgbClr val="232F48"/>
                       </a:solidFill>
                       <a:prstDash val="solid"/>
                       <a:round/>
@@ -7631,13 +7844,16 @@
                     </a:lnT>
                     <a:lnB w="12700" cap="flat" cmpd="sng" algn="ctr">
                       <a:solidFill>
-                        <a:srgbClr val="D0CCE8"/>
+                        <a:srgbClr val="232F48"/>
                       </a:solidFill>
                       <a:prstDash val="solid"/>
                       <a:round/>
                       <a:headEnd type="none" w="med" len="med"/>
                       <a:tailEnd type="none" w="med" len="med"/>
                     </a:lnB>
+                    <a:solidFill>
+                      <a:srgbClr val="121A2B"/>
+                    </a:solidFill>
                   </a:tcPr>
                 </a:tc>
                 <a:tc>
@@ -7651,7 +7867,419 @@
                       <a:r>
                         <a:rPr lang="en-US" sz="1000" dirty="0">
                           <a:solidFill>
-                            <a:srgbClr val="000000"/>
+                            <a:srgbClr val="A7F3D0"/>
+                          </a:solidFill>
+                          <a:latin typeface="Arial" pitchFamily="34" charset="0"/>
+                          <a:ea typeface="Arial" pitchFamily="34" charset="-122"/>
+                          <a:cs typeface="Arial" pitchFamily="34" charset="-120"/>
+                        </a:rPr>
+                        <a:t>PASS (78/78 Passing)</a:t>
+                      </a:r>
+                      <a:endParaRPr lang="en-US" sz="1000" dirty="0">
+                        <a:latin typeface="Arial" charset="0"/>
+                        <a:ea typeface="Arial" charset="0"/>
+                        <a:cs typeface="Arial" charset="0"/>
+                      </a:endParaRPr>
+                    </a:p>
+                  </a:txBody>
+                  <a:tcPr marL="91440" marR="91440" marT="45720" marB="45720">
+                    <a:lnL w="12700" cap="flat" cmpd="sng" algn="ctr">
+                      <a:solidFill>
+                        <a:srgbClr val="232F48"/>
+                      </a:solidFill>
+                      <a:prstDash val="solid"/>
+                      <a:round/>
+                      <a:headEnd type="none" w="med" len="med"/>
+                      <a:tailEnd type="none" w="med" len="med"/>
+                    </a:lnL>
+                    <a:lnR w="12700" cap="flat" cmpd="sng" algn="ctr">
+                      <a:solidFill>
+                        <a:srgbClr val="232F48"/>
+                      </a:solidFill>
+                      <a:prstDash val="solid"/>
+                      <a:round/>
+                      <a:headEnd type="none" w="med" len="med"/>
+                      <a:tailEnd type="none" w="med" len="med"/>
+                    </a:lnR>
+                    <a:lnT w="12700" cap="flat" cmpd="sng" algn="ctr">
+                      <a:solidFill>
+                        <a:srgbClr val="232F48"/>
+                      </a:solidFill>
+                      <a:prstDash val="solid"/>
+                      <a:round/>
+                      <a:headEnd type="none" w="med" len="med"/>
+                      <a:tailEnd type="none" w="med" len="med"/>
+                    </a:lnT>
+                    <a:lnB w="12700" cap="flat" cmpd="sng" algn="ctr">
+                      <a:solidFill>
+                        <a:srgbClr val="232F48"/>
+                      </a:solidFill>
+                      <a:prstDash val="solid"/>
+                      <a:round/>
+                      <a:headEnd type="none" w="med" len="med"/>
+                      <a:tailEnd type="none" w="med" len="med"/>
+                    </a:lnB>
+                    <a:solidFill>
+                      <a:srgbClr val="121A2B"/>
+                    </a:solidFill>
+                  </a:tcPr>
+                </a:tc>
+              </a:tr>
+              <a:tr h="457200">
+                <a:tc>
+                  <a:txBody>
+                    <a:bodyPr/>
+                    <a:lstStyle/>
+                    <a:p>
+                      <a:pPr indent="0" marL="0">
+                        <a:buNone/>
+                      </a:pPr>
+                      <a:r>
+                        <a:rPr lang="en-US" sz="1000" b="1" dirty="0">
+                          <a:solidFill>
+                            <a:srgbClr val="F1F5F9"/>
+                          </a:solidFill>
+                          <a:latin typeface="Arial" pitchFamily="34" charset="0"/>
+                          <a:ea typeface="Arial" pitchFamily="34" charset="-122"/>
+                          <a:cs typeface="Arial" pitchFamily="34" charset="-120"/>
+                        </a:rPr>
+                        <a:t>2. Gemma Central</a:t>
+                      </a:r>
+                      <a:endParaRPr lang="en-US" sz="1000" dirty="0">
+                        <a:latin typeface="Arial" charset="0"/>
+                        <a:ea typeface="Arial" charset="0"/>
+                        <a:cs typeface="Arial" charset="0"/>
+                      </a:endParaRPr>
+                    </a:p>
+                  </a:txBody>
+                  <a:tcPr marL="91440" marR="91440" marT="45720" marB="45720">
+                    <a:lnL w="12700" cap="flat" cmpd="sng" algn="ctr">
+                      <a:solidFill>
+                        <a:srgbClr val="232F48"/>
+                      </a:solidFill>
+                      <a:prstDash val="solid"/>
+                      <a:round/>
+                      <a:headEnd type="none" w="med" len="med"/>
+                      <a:tailEnd type="none" w="med" len="med"/>
+                    </a:lnL>
+                    <a:lnR w="12700" cap="flat" cmpd="sng" algn="ctr">
+                      <a:solidFill>
+                        <a:srgbClr val="232F48"/>
+                      </a:solidFill>
+                      <a:prstDash val="solid"/>
+                      <a:round/>
+                      <a:headEnd type="none" w="med" len="med"/>
+                      <a:tailEnd type="none" w="med" len="med"/>
+                    </a:lnR>
+                    <a:lnT w="12700" cap="flat" cmpd="sng" algn="ctr">
+                      <a:solidFill>
+                        <a:srgbClr val="232F48"/>
+                      </a:solidFill>
+                      <a:prstDash val="solid"/>
+                      <a:round/>
+                      <a:headEnd type="none" w="med" len="med"/>
+                      <a:tailEnd type="none" w="med" len="med"/>
+                    </a:lnT>
+                    <a:lnB w="12700" cap="flat" cmpd="sng" algn="ctr">
+                      <a:solidFill>
+                        <a:srgbClr val="232F48"/>
+                      </a:solidFill>
+                      <a:prstDash val="solid"/>
+                      <a:round/>
+                      <a:headEnd type="none" w="med" len="med"/>
+                      <a:tailEnd type="none" w="med" len="med"/>
+                    </a:lnB>
+                    <a:solidFill>
+                      <a:srgbClr val="121A2B"/>
+                    </a:solidFill>
+                  </a:tcPr>
+                </a:tc>
+                <a:tc>
+                  <a:txBody>
+                    <a:bodyPr/>
+                    <a:lstStyle/>
+                    <a:p>
+                      <a:pPr indent="0" marL="0">
+                        <a:buNone/>
+                      </a:pPr>
+                      <a:r>
+                        <a:rPr lang="en-US" sz="1000" dirty="0">
+                          <a:solidFill>
+                            <a:srgbClr val="F1F5F9"/>
+                          </a:solidFill>
+                          <a:latin typeface="Arial" pitchFamily="34" charset="0"/>
+                          <a:ea typeface="Arial" pitchFamily="34" charset="-122"/>
+                          <a:cs typeface="Arial" pitchFamily="34" charset="-120"/>
+                        </a:rPr>
+                        <a:t>Server-side @google/genai calls gemma-4-26b-a4b-it; fallback baseline compiler</a:t>
+                      </a:r>
+                      <a:endParaRPr lang="en-US" sz="1000" dirty="0">
+                        <a:latin typeface="Arial" charset="0"/>
+                        <a:ea typeface="Arial" charset="0"/>
+                        <a:cs typeface="Arial" charset="0"/>
+                      </a:endParaRPr>
+                    </a:p>
+                  </a:txBody>
+                  <a:tcPr marL="91440" marR="91440" marT="45720" marB="45720">
+                    <a:lnL w="12700" cap="flat" cmpd="sng" algn="ctr">
+                      <a:solidFill>
+                        <a:srgbClr val="232F48"/>
+                      </a:solidFill>
+                      <a:prstDash val="solid"/>
+                      <a:round/>
+                      <a:headEnd type="none" w="med" len="med"/>
+                      <a:tailEnd type="none" w="med" len="med"/>
+                    </a:lnL>
+                    <a:lnR w="12700" cap="flat" cmpd="sng" algn="ctr">
+                      <a:solidFill>
+                        <a:srgbClr val="232F48"/>
+                      </a:solidFill>
+                      <a:prstDash val="solid"/>
+                      <a:round/>
+                      <a:headEnd type="none" w="med" len="med"/>
+                      <a:tailEnd type="none" w="med" len="med"/>
+                    </a:lnR>
+                    <a:lnT w="12700" cap="flat" cmpd="sng" algn="ctr">
+                      <a:solidFill>
+                        <a:srgbClr val="232F48"/>
+                      </a:solidFill>
+                      <a:prstDash val="solid"/>
+                      <a:round/>
+                      <a:headEnd type="none" w="med" len="med"/>
+                      <a:tailEnd type="none" w="med" len="med"/>
+                    </a:lnT>
+                    <a:lnB w="12700" cap="flat" cmpd="sng" algn="ctr">
+                      <a:solidFill>
+                        <a:srgbClr val="232F48"/>
+                      </a:solidFill>
+                      <a:prstDash val="solid"/>
+                      <a:round/>
+                      <a:headEnd type="none" w="med" len="med"/>
+                      <a:tailEnd type="none" w="med" len="med"/>
+                    </a:lnB>
+                    <a:solidFill>
+                      <a:srgbClr val="121A2B"/>
+                    </a:solidFill>
+                  </a:tcPr>
+                </a:tc>
+                <a:tc>
+                  <a:txBody>
+                    <a:bodyPr/>
+                    <a:lstStyle/>
+                    <a:p>
+                      <a:pPr indent="0" marL="0">
+                        <a:buNone/>
+                      </a:pPr>
+                      <a:r>
+                        <a:rPr lang="en-US" sz="1000" dirty="0">
+                          <a:solidFill>
+                            <a:srgbClr val="A7F3D0"/>
+                          </a:solidFill>
+                          <a:latin typeface="Arial" pitchFamily="34" charset="0"/>
+                          <a:ea typeface="Arial" pitchFamily="34" charset="-122"/>
+                          <a:cs typeface="Arial" pitchFamily="34" charset="-120"/>
+                        </a:rPr>
+                        <a:t>PASS (Live &amp; fallback)</a:t>
+                      </a:r>
+                      <a:endParaRPr lang="en-US" sz="1000" dirty="0">
+                        <a:latin typeface="Arial" charset="0"/>
+                        <a:ea typeface="Arial" charset="0"/>
+                        <a:cs typeface="Arial" charset="0"/>
+                      </a:endParaRPr>
+                    </a:p>
+                  </a:txBody>
+                  <a:tcPr marL="91440" marR="91440" marT="45720" marB="45720">
+                    <a:lnL w="12700" cap="flat" cmpd="sng" algn="ctr">
+                      <a:solidFill>
+                        <a:srgbClr val="232F48"/>
+                      </a:solidFill>
+                      <a:prstDash val="solid"/>
+                      <a:round/>
+                      <a:headEnd type="none" w="med" len="med"/>
+                      <a:tailEnd type="none" w="med" len="med"/>
+                    </a:lnL>
+                    <a:lnR w="12700" cap="flat" cmpd="sng" algn="ctr">
+                      <a:solidFill>
+                        <a:srgbClr val="232F48"/>
+                      </a:solidFill>
+                      <a:prstDash val="solid"/>
+                      <a:round/>
+                      <a:headEnd type="none" w="med" len="med"/>
+                      <a:tailEnd type="none" w="med" len="med"/>
+                    </a:lnR>
+                    <a:lnT w="12700" cap="flat" cmpd="sng" algn="ctr">
+                      <a:solidFill>
+                        <a:srgbClr val="232F48"/>
+                      </a:solidFill>
+                      <a:prstDash val="solid"/>
+                      <a:round/>
+                      <a:headEnd type="none" w="med" len="med"/>
+                      <a:tailEnd type="none" w="med" len="med"/>
+                    </a:lnT>
+                    <a:lnB w="12700" cap="flat" cmpd="sng" algn="ctr">
+                      <a:solidFill>
+                        <a:srgbClr val="232F48"/>
+                      </a:solidFill>
+                      <a:prstDash val="solid"/>
+                      <a:round/>
+                      <a:headEnd type="none" w="med" len="med"/>
+                      <a:tailEnd type="none" w="med" len="med"/>
+                    </a:lnB>
+                    <a:solidFill>
+                      <a:srgbClr val="121A2B"/>
+                    </a:solidFill>
+                  </a:tcPr>
+                </a:tc>
+              </a:tr>
+              <a:tr h="457200">
+                <a:tc>
+                  <a:txBody>
+                    <a:bodyPr/>
+                    <a:lstStyle/>
+                    <a:p>
+                      <a:pPr indent="0" marL="0">
+                        <a:buNone/>
+                      </a:pPr>
+                      <a:r>
+                        <a:rPr lang="en-US" sz="1000" b="1" dirty="0">
+                          <a:solidFill>
+                            <a:srgbClr val="F1F5F9"/>
+                          </a:solidFill>
+                          <a:latin typeface="Arial" pitchFamily="34" charset="0"/>
+                          <a:ea typeface="Arial" pitchFamily="34" charset="-122"/>
+                          <a:cs typeface="Arial" pitchFamily="34" charset="-120"/>
+                        </a:rPr>
+                        <a:t>3. Features Work</a:t>
+                      </a:r>
+                      <a:endParaRPr lang="en-US" sz="1000" dirty="0">
+                        <a:latin typeface="Arial" charset="0"/>
+                        <a:ea typeface="Arial" charset="0"/>
+                        <a:cs typeface="Arial" charset="0"/>
+                      </a:endParaRPr>
+                    </a:p>
+                  </a:txBody>
+                  <a:tcPr marL="91440" marR="91440" marT="45720" marB="45720">
+                    <a:lnL w="12700" cap="flat" cmpd="sng" algn="ctr">
+                      <a:solidFill>
+                        <a:srgbClr val="232F48"/>
+                      </a:solidFill>
+                      <a:prstDash val="solid"/>
+                      <a:round/>
+                      <a:headEnd type="none" w="med" len="med"/>
+                      <a:tailEnd type="none" w="med" len="med"/>
+                    </a:lnL>
+                    <a:lnR w="12700" cap="flat" cmpd="sng" algn="ctr">
+                      <a:solidFill>
+                        <a:srgbClr val="232F48"/>
+                      </a:solidFill>
+                      <a:prstDash val="solid"/>
+                      <a:round/>
+                      <a:headEnd type="none" w="med" len="med"/>
+                      <a:tailEnd type="none" w="med" len="med"/>
+                    </a:lnR>
+                    <a:lnT w="12700" cap="flat" cmpd="sng" algn="ctr">
+                      <a:solidFill>
+                        <a:srgbClr val="232F48"/>
+                      </a:solidFill>
+                      <a:prstDash val="solid"/>
+                      <a:round/>
+                      <a:headEnd type="none" w="med" len="med"/>
+                      <a:tailEnd type="none" w="med" len="med"/>
+                    </a:lnT>
+                    <a:lnB w="12700" cap="flat" cmpd="sng" algn="ctr">
+                      <a:solidFill>
+                        <a:srgbClr val="232F48"/>
+                      </a:solidFill>
+                      <a:prstDash val="solid"/>
+                      <a:round/>
+                      <a:headEnd type="none" w="med" len="med"/>
+                      <a:tailEnd type="none" w="med" len="med"/>
+                    </a:lnB>
+                    <a:solidFill>
+                      <a:srgbClr val="121A2B"/>
+                    </a:solidFill>
+                  </a:tcPr>
+                </a:tc>
+                <a:tc>
+                  <a:txBody>
+                    <a:bodyPr/>
+                    <a:lstStyle/>
+                    <a:p>
+                      <a:pPr indent="0" marL="0">
+                        <a:buNone/>
+                      </a:pPr>
+                      <a:r>
+                        <a:rPr lang="en-US" sz="1000" dirty="0">
+                          <a:solidFill>
+                            <a:srgbClr val="F1F5F9"/>
+                          </a:solidFill>
+                          <a:latin typeface="Arial" pitchFamily="34" charset="0"/>
+                          <a:ea typeface="Arial" pitchFamily="34" charset="-122"/>
+                          <a:cs typeface="Arial" pitchFamily="34" charset="-120"/>
+                        </a:rPr>
+                        <a:t>Live app: https://issue-lift.vercel.app/ &amp; local Next.js on port 3000</a:t>
+                      </a:r>
+                      <a:endParaRPr lang="en-US" sz="1000" dirty="0">
+                        <a:latin typeface="Arial" charset="0"/>
+                        <a:ea typeface="Arial" charset="0"/>
+                        <a:cs typeface="Arial" charset="0"/>
+                      </a:endParaRPr>
+                    </a:p>
+                  </a:txBody>
+                  <a:tcPr marL="91440" marR="91440" marT="45720" marB="45720">
+                    <a:lnL w="12700" cap="flat" cmpd="sng" algn="ctr">
+                      <a:solidFill>
+                        <a:srgbClr val="232F48"/>
+                      </a:solidFill>
+                      <a:prstDash val="solid"/>
+                      <a:round/>
+                      <a:headEnd type="none" w="med" len="med"/>
+                      <a:tailEnd type="none" w="med" len="med"/>
+                    </a:lnL>
+                    <a:lnR w="12700" cap="flat" cmpd="sng" algn="ctr">
+                      <a:solidFill>
+                        <a:srgbClr val="232F48"/>
+                      </a:solidFill>
+                      <a:prstDash val="solid"/>
+                      <a:round/>
+                      <a:headEnd type="none" w="med" len="med"/>
+                      <a:tailEnd type="none" w="med" len="med"/>
+                    </a:lnR>
+                    <a:lnT w="12700" cap="flat" cmpd="sng" algn="ctr">
+                      <a:solidFill>
+                        <a:srgbClr val="232F48"/>
+                      </a:solidFill>
+                      <a:prstDash val="solid"/>
+                      <a:round/>
+                      <a:headEnd type="none" w="med" len="med"/>
+                      <a:tailEnd type="none" w="med" len="med"/>
+                    </a:lnT>
+                    <a:lnB w="12700" cap="flat" cmpd="sng" algn="ctr">
+                      <a:solidFill>
+                        <a:srgbClr val="232F48"/>
+                      </a:solidFill>
+                      <a:prstDash val="solid"/>
+                      <a:round/>
+                      <a:headEnd type="none" w="med" len="med"/>
+                      <a:tailEnd type="none" w="med" len="med"/>
+                    </a:lnB>
+                    <a:solidFill>
+                      <a:srgbClr val="121A2B"/>
+                    </a:solidFill>
+                  </a:tcPr>
+                </a:tc>
+                <a:tc>
+                  <a:txBody>
+                    <a:bodyPr/>
+                    <a:lstStyle/>
+                    <a:p>
+                      <a:pPr indent="0" marL="0">
+                        <a:buNone/>
+                      </a:pPr>
+                      <a:r>
+                        <a:rPr lang="en-US" sz="1000" dirty="0">
+                          <a:solidFill>
+                            <a:srgbClr val="A7F3D0"/>
                           </a:solidFill>
                           <a:latin typeface="Arial" pitchFamily="34" charset="0"/>
                           <a:ea typeface="Arial" pitchFamily="34" charset="-122"/>
@@ -7669,7 +8297,7 @@
                   <a:tcPr marL="91440" marR="91440" marT="45720" marB="45720">
                     <a:lnL w="12700" cap="flat" cmpd="sng" algn="ctr">
                       <a:solidFill>
-                        <a:srgbClr val="D0CCE8"/>
+                        <a:srgbClr val="232F48"/>
                       </a:solidFill>
                       <a:prstDash val="solid"/>
                       <a:round/>
@@ -7678,7 +8306,7 @@
                     </a:lnL>
                     <a:lnR w="12700" cap="flat" cmpd="sng" algn="ctr">
                       <a:solidFill>
-                        <a:srgbClr val="D0CCE8"/>
+                        <a:srgbClr val="232F48"/>
                       </a:solidFill>
                       <a:prstDash val="solid"/>
                       <a:round/>
@@ -7687,7 +8315,7 @@
                     </a:lnR>
                     <a:lnT w="12700" cap="flat" cmpd="sng" algn="ctr">
                       <a:solidFill>
-                        <a:srgbClr val="D0CCE8"/>
+                        <a:srgbClr val="232F48"/>
                       </a:solidFill>
                       <a:prstDash val="solid"/>
                       <a:round/>
@@ -7696,17 +8324,20 @@
                     </a:lnT>
                     <a:lnB w="12700" cap="flat" cmpd="sng" algn="ctr">
                       <a:solidFill>
-                        <a:srgbClr val="D0CCE8"/>
+                        <a:srgbClr val="232F48"/>
                       </a:solidFill>
                       <a:prstDash val="solid"/>
                       <a:round/>
                       <a:headEnd type="none" w="med" len="med"/>
                       <a:tailEnd type="none" w="med" len="med"/>
                     </a:lnB>
+                    <a:solidFill>
+                      <a:srgbClr val="121A2B"/>
+                    </a:solidFill>
                   </a:tcPr>
                 </a:tc>
               </a:tr>
-              <a:tr h="438912">
+              <a:tr h="457200">
                 <a:tc>
                   <a:txBody>
                     <a:bodyPr/>
@@ -7716,15 +8347,15 @@
                         <a:buNone/>
                       </a:pPr>
                       <a:r>
-                        <a:rPr lang="en-US" sz="1000" dirty="0">
+                        <a:rPr lang="en-US" sz="1000" b="1" dirty="0">
                           <a:solidFill>
-                            <a:srgbClr val="000000"/>
+                            <a:srgbClr val="F1F5F9"/>
                           </a:solidFill>
                           <a:latin typeface="Arial" pitchFamily="34" charset="0"/>
                           <a:ea typeface="Arial" pitchFamily="34" charset="-122"/>
                           <a:cs typeface="Arial" pitchFamily="34" charset="-120"/>
                         </a:rPr>
-                        <a:t>2. Gemma Central</a:t>
+                        <a:t>4. Open Source Repo</a:t>
                       </a:r>
                       <a:endParaRPr lang="en-US" sz="1000" dirty="0">
                         <a:latin typeface="Arial" charset="0"/>
@@ -7736,7 +8367,7 @@
                   <a:tcPr marL="91440" marR="91440" marT="45720" marB="45720">
                     <a:lnL w="12700" cap="flat" cmpd="sng" algn="ctr">
                       <a:solidFill>
-                        <a:srgbClr val="D0CCE8"/>
+                        <a:srgbClr val="232F48"/>
                       </a:solidFill>
                       <a:prstDash val="solid"/>
                       <a:round/>
@@ -7745,7 +8376,7 @@
                     </a:lnL>
                     <a:lnR w="12700" cap="flat" cmpd="sng" algn="ctr">
                       <a:solidFill>
-                        <a:srgbClr val="D0CCE8"/>
+                        <a:srgbClr val="232F48"/>
                       </a:solidFill>
                       <a:prstDash val="solid"/>
                       <a:round/>
@@ -7754,7 +8385,7 @@
                     </a:lnR>
                     <a:lnT w="12700" cap="flat" cmpd="sng" algn="ctr">
                       <a:solidFill>
-                        <a:srgbClr val="D0CCE8"/>
+                        <a:srgbClr val="232F48"/>
                       </a:solidFill>
                       <a:prstDash val="solid"/>
                       <a:round/>
@@ -7763,13 +8394,16 @@
                     </a:lnT>
                     <a:lnB w="12700" cap="flat" cmpd="sng" algn="ctr">
                       <a:solidFill>
-                        <a:srgbClr val="D0CCE8"/>
+                        <a:srgbClr val="232F48"/>
                       </a:solidFill>
                       <a:prstDash val="solid"/>
                       <a:round/>
                       <a:headEnd type="none" w="med" len="med"/>
                       <a:tailEnd type="none" w="med" len="med"/>
                     </a:lnB>
+                    <a:solidFill>
+                      <a:srgbClr val="121A2B"/>
+                    </a:solidFill>
                   </a:tcPr>
                 </a:tc>
                 <a:tc>
@@ -7783,13 +8417,13 @@
                       <a:r>
                         <a:rPr lang="en-US" sz="1000" dirty="0">
                           <a:solidFill>
-                            <a:srgbClr val="000000"/>
+                            <a:srgbClr val="F1F5F9"/>
                           </a:solidFill>
                           <a:latin typeface="Arial" pitchFamily="34" charset="0"/>
                           <a:ea typeface="Arial" pitchFamily="34" charset="-122"/>
                           <a:cs typeface="Arial" pitchFamily="34" charset="-120"/>
                         </a:rPr>
-                        <a:t>Server-side @google/genai calls gemma-4-26b-a4b-it</a:t>
+                        <a:t>Public repo: https://github.com/rudraarcadeskills-art/IssueLift (clean diff, 0 secrets)</a:t>
                       </a:r>
                       <a:endParaRPr lang="en-US" sz="1000" dirty="0">
                         <a:latin typeface="Arial" charset="0"/>
@@ -7801,7 +8435,7 @@
                   <a:tcPr marL="91440" marR="91440" marT="45720" marB="45720">
                     <a:lnL w="12700" cap="flat" cmpd="sng" algn="ctr">
                       <a:solidFill>
-                        <a:srgbClr val="D0CCE8"/>
+                        <a:srgbClr val="232F48"/>
                       </a:solidFill>
                       <a:prstDash val="solid"/>
                       <a:round/>
@@ -7810,7 +8444,7 @@
                     </a:lnL>
                     <a:lnR w="12700" cap="flat" cmpd="sng" algn="ctr">
                       <a:solidFill>
-                        <a:srgbClr val="D0CCE8"/>
+                        <a:srgbClr val="232F48"/>
                       </a:solidFill>
                       <a:prstDash val="solid"/>
                       <a:round/>
@@ -7819,7 +8453,7 @@
                     </a:lnR>
                     <a:lnT w="12700" cap="flat" cmpd="sng" algn="ctr">
                       <a:solidFill>
-                        <a:srgbClr val="D0CCE8"/>
+                        <a:srgbClr val="232F48"/>
                       </a:solidFill>
                       <a:prstDash val="solid"/>
                       <a:round/>
@@ -7828,13 +8462,16 @@
                     </a:lnT>
                     <a:lnB w="12700" cap="flat" cmpd="sng" algn="ctr">
                       <a:solidFill>
-                        <a:srgbClr val="D0CCE8"/>
+                        <a:srgbClr val="232F48"/>
                       </a:solidFill>
                       <a:prstDash val="solid"/>
                       <a:round/>
                       <a:headEnd type="none" w="med" len="med"/>
                       <a:tailEnd type="none" w="med" len="med"/>
                     </a:lnB>
+                    <a:solidFill>
+                      <a:srgbClr val="121A2B"/>
+                    </a:solidFill>
                   </a:tcPr>
                 </a:tc>
                 <a:tc>
@@ -7848,204 +8485,7 @@
                       <a:r>
                         <a:rPr lang="en-US" sz="1000" dirty="0">
                           <a:solidFill>
-                            <a:srgbClr val="000000"/>
-                          </a:solidFill>
-                          <a:latin typeface="Arial" pitchFamily="34" charset="0"/>
-                          <a:ea typeface="Arial" pitchFamily="34" charset="-122"/>
-                          <a:cs typeface="Arial" pitchFamily="34" charset="-120"/>
-                        </a:rPr>
-                        <a:t>PASS (Live &amp; baseline fallback)</a:t>
-                      </a:r>
-                      <a:endParaRPr lang="en-US" sz="1000" dirty="0">
-                        <a:latin typeface="Arial" charset="0"/>
-                        <a:ea typeface="Arial" charset="0"/>
-                        <a:cs typeface="Arial" charset="0"/>
-                      </a:endParaRPr>
-                    </a:p>
-                  </a:txBody>
-                  <a:tcPr marL="91440" marR="91440" marT="45720" marB="45720">
-                    <a:lnL w="12700" cap="flat" cmpd="sng" algn="ctr">
-                      <a:solidFill>
-                        <a:srgbClr val="D0CCE8"/>
-                      </a:solidFill>
-                      <a:prstDash val="solid"/>
-                      <a:round/>
-                      <a:headEnd type="none" w="med" len="med"/>
-                      <a:tailEnd type="none" w="med" len="med"/>
-                    </a:lnL>
-                    <a:lnR w="12700" cap="flat" cmpd="sng" algn="ctr">
-                      <a:solidFill>
-                        <a:srgbClr val="D0CCE8"/>
-                      </a:solidFill>
-                      <a:prstDash val="solid"/>
-                      <a:round/>
-                      <a:headEnd type="none" w="med" len="med"/>
-                      <a:tailEnd type="none" w="med" len="med"/>
-                    </a:lnR>
-                    <a:lnT w="12700" cap="flat" cmpd="sng" algn="ctr">
-                      <a:solidFill>
-                        <a:srgbClr val="D0CCE8"/>
-                      </a:solidFill>
-                      <a:prstDash val="solid"/>
-                      <a:round/>
-                      <a:headEnd type="none" w="med" len="med"/>
-                      <a:tailEnd type="none" w="med" len="med"/>
-                    </a:lnT>
-                    <a:lnB w="12700" cap="flat" cmpd="sng" algn="ctr">
-                      <a:solidFill>
-                        <a:srgbClr val="D0CCE8"/>
-                      </a:solidFill>
-                      <a:prstDash val="solid"/>
-                      <a:round/>
-                      <a:headEnd type="none" w="med" len="med"/>
-                      <a:tailEnd type="none" w="med" len="med"/>
-                    </a:lnB>
-                  </a:tcPr>
-                </a:tc>
-              </a:tr>
-              <a:tr h="438912">
-                <a:tc>
-                  <a:txBody>
-                    <a:bodyPr/>
-                    <a:lstStyle/>
-                    <a:p>
-                      <a:pPr indent="0" marL="0">
-                        <a:buNone/>
-                      </a:pPr>
-                      <a:r>
-                        <a:rPr lang="en-US" sz="1000" dirty="0">
-                          <a:solidFill>
-                            <a:srgbClr val="000000"/>
-                          </a:solidFill>
-                          <a:latin typeface="Arial" pitchFamily="34" charset="0"/>
-                          <a:ea typeface="Arial" pitchFamily="34" charset="-122"/>
-                          <a:cs typeface="Arial" pitchFamily="34" charset="-120"/>
-                        </a:rPr>
-                        <a:t>3. Features Work</a:t>
-                      </a:r>
-                      <a:endParaRPr lang="en-US" sz="1000" dirty="0">
-                        <a:latin typeface="Arial" charset="0"/>
-                        <a:ea typeface="Arial" charset="0"/>
-                        <a:cs typeface="Arial" charset="0"/>
-                      </a:endParaRPr>
-                    </a:p>
-                  </a:txBody>
-                  <a:tcPr marL="91440" marR="91440" marT="45720" marB="45720">
-                    <a:lnL w="12700" cap="flat" cmpd="sng" algn="ctr">
-                      <a:solidFill>
-                        <a:srgbClr val="D0CCE8"/>
-                      </a:solidFill>
-                      <a:prstDash val="solid"/>
-                      <a:round/>
-                      <a:headEnd type="none" w="med" len="med"/>
-                      <a:tailEnd type="none" w="med" len="med"/>
-                    </a:lnL>
-                    <a:lnR w="12700" cap="flat" cmpd="sng" algn="ctr">
-                      <a:solidFill>
-                        <a:srgbClr val="D0CCE8"/>
-                      </a:solidFill>
-                      <a:prstDash val="solid"/>
-                      <a:round/>
-                      <a:headEnd type="none" w="med" len="med"/>
-                      <a:tailEnd type="none" w="med" len="med"/>
-                    </a:lnR>
-                    <a:lnT w="12700" cap="flat" cmpd="sng" algn="ctr">
-                      <a:solidFill>
-                        <a:srgbClr val="D0CCE8"/>
-                      </a:solidFill>
-                      <a:prstDash val="solid"/>
-                      <a:round/>
-                      <a:headEnd type="none" w="med" len="med"/>
-                      <a:tailEnd type="none" w="med" len="med"/>
-                    </a:lnT>
-                    <a:lnB w="12700" cap="flat" cmpd="sng" algn="ctr">
-                      <a:solidFill>
-                        <a:srgbClr val="D0CCE8"/>
-                      </a:solidFill>
-                      <a:prstDash val="solid"/>
-                      <a:round/>
-                      <a:headEnd type="none" w="med" len="med"/>
-                      <a:tailEnd type="none" w="med" len="med"/>
-                    </a:lnB>
-                  </a:tcPr>
-                </a:tc>
-                <a:tc>
-                  <a:txBody>
-                    <a:bodyPr/>
-                    <a:lstStyle/>
-                    <a:p>
-                      <a:pPr indent="0" marL="0">
-                        <a:buNone/>
-                      </a:pPr>
-                      <a:r>
-                        <a:rPr lang="en-US" sz="1000" dirty="0">
-                          <a:solidFill>
-                            <a:srgbClr val="000000"/>
-                          </a:solidFill>
-                          <a:latin typeface="Arial" pitchFamily="34" charset="0"/>
-                          <a:ea typeface="Arial" pitchFamily="34" charset="-122"/>
-                          <a:cs typeface="Arial" pitchFamily="34" charset="-120"/>
-                        </a:rPr>
-                        <a:t>Next.js App Router live on port 3000; /api/health and /api/analyze operational</a:t>
-                      </a:r>
-                      <a:endParaRPr lang="en-US" sz="1000" dirty="0">
-                        <a:latin typeface="Arial" charset="0"/>
-                        <a:ea typeface="Arial" charset="0"/>
-                        <a:cs typeface="Arial" charset="0"/>
-                      </a:endParaRPr>
-                    </a:p>
-                  </a:txBody>
-                  <a:tcPr marL="91440" marR="91440" marT="45720" marB="45720">
-                    <a:lnL w="12700" cap="flat" cmpd="sng" algn="ctr">
-                      <a:solidFill>
-                        <a:srgbClr val="D0CCE8"/>
-                      </a:solidFill>
-                      <a:prstDash val="solid"/>
-                      <a:round/>
-                      <a:headEnd type="none" w="med" len="med"/>
-                      <a:tailEnd type="none" w="med" len="med"/>
-                    </a:lnL>
-                    <a:lnR w="12700" cap="flat" cmpd="sng" algn="ctr">
-                      <a:solidFill>
-                        <a:srgbClr val="D0CCE8"/>
-                      </a:solidFill>
-                      <a:prstDash val="solid"/>
-                      <a:round/>
-                      <a:headEnd type="none" w="med" len="med"/>
-                      <a:tailEnd type="none" w="med" len="med"/>
-                    </a:lnR>
-                    <a:lnT w="12700" cap="flat" cmpd="sng" algn="ctr">
-                      <a:solidFill>
-                        <a:srgbClr val="D0CCE8"/>
-                      </a:solidFill>
-                      <a:prstDash val="solid"/>
-                      <a:round/>
-                      <a:headEnd type="none" w="med" len="med"/>
-                      <a:tailEnd type="none" w="med" len="med"/>
-                    </a:lnT>
-                    <a:lnB w="12700" cap="flat" cmpd="sng" algn="ctr">
-                      <a:solidFill>
-                        <a:srgbClr val="D0CCE8"/>
-                      </a:solidFill>
-                      <a:prstDash val="solid"/>
-                      <a:round/>
-                      <a:headEnd type="none" w="med" len="med"/>
-                      <a:tailEnd type="none" w="med" len="med"/>
-                    </a:lnB>
-                  </a:tcPr>
-                </a:tc>
-                <a:tc>
-                  <a:txBody>
-                    <a:bodyPr/>
-                    <a:lstStyle/>
-                    <a:p>
-                      <a:pPr indent="0" marL="0">
-                        <a:buNone/>
-                      </a:pPr>
-                      <a:r>
-                        <a:rPr lang="en-US" sz="1000" dirty="0">
-                          <a:solidFill>
-                            <a:srgbClr val="000000"/>
+                            <a:srgbClr val="A7F3D0"/>
                           </a:solidFill>
                           <a:latin typeface="Arial" pitchFamily="34" charset="0"/>
                           <a:ea typeface="Arial" pitchFamily="34" charset="-122"/>
@@ -8063,7 +8503,7 @@
                   <a:tcPr marL="91440" marR="91440" marT="45720" marB="45720">
                     <a:lnL w="12700" cap="flat" cmpd="sng" algn="ctr">
                       <a:solidFill>
-                        <a:srgbClr val="D0CCE8"/>
+                        <a:srgbClr val="232F48"/>
                       </a:solidFill>
                       <a:prstDash val="solid"/>
                       <a:round/>
@@ -8072,7 +8512,7 @@
                     </a:lnL>
                     <a:lnR w="12700" cap="flat" cmpd="sng" algn="ctr">
                       <a:solidFill>
-                        <a:srgbClr val="D0CCE8"/>
+                        <a:srgbClr val="232F48"/>
                       </a:solidFill>
                       <a:prstDash val="solid"/>
                       <a:round/>
@@ -8081,7 +8521,7 @@
                     </a:lnR>
                     <a:lnT w="12700" cap="flat" cmpd="sng" algn="ctr">
                       <a:solidFill>
-                        <a:srgbClr val="D0CCE8"/>
+                        <a:srgbClr val="232F48"/>
                       </a:solidFill>
                       <a:prstDash val="solid"/>
                       <a:round/>
@@ -8090,17 +8530,20 @@
                     </a:lnT>
                     <a:lnB w="12700" cap="flat" cmpd="sng" algn="ctr">
                       <a:solidFill>
-                        <a:srgbClr val="D0CCE8"/>
+                        <a:srgbClr val="232F48"/>
                       </a:solidFill>
                       <a:prstDash val="solid"/>
                       <a:round/>
                       <a:headEnd type="none" w="med" len="med"/>
                       <a:tailEnd type="none" w="med" len="med"/>
                     </a:lnB>
+                    <a:solidFill>
+                      <a:srgbClr val="121A2B"/>
+                    </a:solidFill>
                   </a:tcPr>
                 </a:tc>
               </a:tr>
-              <a:tr h="438912">
+              <a:tr h="457200">
                 <a:tc>
                   <a:txBody>
                     <a:bodyPr/>
@@ -8110,206 +8553,9 @@
                         <a:buNone/>
                       </a:pPr>
                       <a:r>
-                        <a:rPr lang="en-US" sz="1000" dirty="0">
+                        <a:rPr lang="en-US" sz="1000" b="1" dirty="0">
                           <a:solidFill>
-                            <a:srgbClr val="000000"/>
-                          </a:solidFill>
-                          <a:latin typeface="Arial" pitchFamily="34" charset="0"/>
-                          <a:ea typeface="Arial" pitchFamily="34" charset="-122"/>
-                          <a:cs typeface="Arial" pitchFamily="34" charset="-120"/>
-                        </a:rPr>
-                        <a:t>4. Open Source Repo</a:t>
-                      </a:r>
-                      <a:endParaRPr lang="en-US" sz="1000" dirty="0">
-                        <a:latin typeface="Arial" charset="0"/>
-                        <a:ea typeface="Arial" charset="0"/>
-                        <a:cs typeface="Arial" charset="0"/>
-                      </a:endParaRPr>
-                    </a:p>
-                  </a:txBody>
-                  <a:tcPr marL="91440" marR="91440" marT="45720" marB="45720">
-                    <a:lnL w="12700" cap="flat" cmpd="sng" algn="ctr">
-                      <a:solidFill>
-                        <a:srgbClr val="D0CCE8"/>
-                      </a:solidFill>
-                      <a:prstDash val="solid"/>
-                      <a:round/>
-                      <a:headEnd type="none" w="med" len="med"/>
-                      <a:tailEnd type="none" w="med" len="med"/>
-                    </a:lnL>
-                    <a:lnR w="12700" cap="flat" cmpd="sng" algn="ctr">
-                      <a:solidFill>
-                        <a:srgbClr val="D0CCE8"/>
-                      </a:solidFill>
-                      <a:prstDash val="solid"/>
-                      <a:round/>
-                      <a:headEnd type="none" w="med" len="med"/>
-                      <a:tailEnd type="none" w="med" len="med"/>
-                    </a:lnR>
-                    <a:lnT w="12700" cap="flat" cmpd="sng" algn="ctr">
-                      <a:solidFill>
-                        <a:srgbClr val="D0CCE8"/>
-                      </a:solidFill>
-                      <a:prstDash val="solid"/>
-                      <a:round/>
-                      <a:headEnd type="none" w="med" len="med"/>
-                      <a:tailEnd type="none" w="med" len="med"/>
-                    </a:lnT>
-                    <a:lnB w="12700" cap="flat" cmpd="sng" algn="ctr">
-                      <a:solidFill>
-                        <a:srgbClr val="D0CCE8"/>
-                      </a:solidFill>
-                      <a:prstDash val="solid"/>
-                      <a:round/>
-                      <a:headEnd type="none" w="med" len="med"/>
-                      <a:tailEnd type="none" w="med" len="med"/>
-                    </a:lnB>
-                  </a:tcPr>
-                </a:tc>
-                <a:tc>
-                  <a:txBody>
-                    <a:bodyPr/>
-                    <a:lstStyle/>
-                    <a:p>
-                      <a:pPr indent="0" marL="0">
-                        <a:buNone/>
-                      </a:pPr>
-                      <a:r>
-                        <a:rPr lang="en-US" sz="1000" dirty="0">
-                          <a:solidFill>
-                            <a:srgbClr val="000000"/>
-                          </a:solidFill>
-                          <a:latin typeface="Arial" pitchFamily="34" charset="0"/>
-                          <a:ea typeface="Arial" pitchFamily="34" charset="-122"/>
-                          <a:cs typeface="Arial" pitchFamily="34" charset="-120"/>
-                        </a:rPr>
-                        <a:t>Local git repository initialized, clean diff, zero secrets tracked</a:t>
-                      </a:r>
-                      <a:endParaRPr lang="en-US" sz="1000" dirty="0">
-                        <a:latin typeface="Arial" charset="0"/>
-                        <a:ea typeface="Arial" charset="0"/>
-                        <a:cs typeface="Arial" charset="0"/>
-                      </a:endParaRPr>
-                    </a:p>
-                  </a:txBody>
-                  <a:tcPr marL="91440" marR="91440" marT="45720" marB="45720">
-                    <a:lnL w="12700" cap="flat" cmpd="sng" algn="ctr">
-                      <a:solidFill>
-                        <a:srgbClr val="D0CCE8"/>
-                      </a:solidFill>
-                      <a:prstDash val="solid"/>
-                      <a:round/>
-                      <a:headEnd type="none" w="med" len="med"/>
-                      <a:tailEnd type="none" w="med" len="med"/>
-                    </a:lnL>
-                    <a:lnR w="12700" cap="flat" cmpd="sng" algn="ctr">
-                      <a:solidFill>
-                        <a:srgbClr val="D0CCE8"/>
-                      </a:solidFill>
-                      <a:prstDash val="solid"/>
-                      <a:round/>
-                      <a:headEnd type="none" w="med" len="med"/>
-                      <a:tailEnd type="none" w="med" len="med"/>
-                    </a:lnR>
-                    <a:lnT w="12700" cap="flat" cmpd="sng" algn="ctr">
-                      <a:solidFill>
-                        <a:srgbClr val="D0CCE8"/>
-                      </a:solidFill>
-                      <a:prstDash val="solid"/>
-                      <a:round/>
-                      <a:headEnd type="none" w="med" len="med"/>
-                      <a:tailEnd type="none" w="med" len="med"/>
-                    </a:lnT>
-                    <a:lnB w="12700" cap="flat" cmpd="sng" algn="ctr">
-                      <a:solidFill>
-                        <a:srgbClr val="D0CCE8"/>
-                      </a:solidFill>
-                      <a:prstDash val="solid"/>
-                      <a:round/>
-                      <a:headEnd type="none" w="med" len="med"/>
-                      <a:tailEnd type="none" w="med" len="med"/>
-                    </a:lnB>
-                  </a:tcPr>
-                </a:tc>
-                <a:tc>
-                  <a:txBody>
-                    <a:bodyPr/>
-                    <a:lstStyle/>
-                    <a:p>
-                      <a:pPr indent="0" marL="0">
-                        <a:buNone/>
-                      </a:pPr>
-                      <a:r>
-                        <a:rPr lang="en-US" sz="1000" dirty="0">
-                          <a:solidFill>
-                            <a:srgbClr val="000000"/>
-                          </a:solidFill>
-                          <a:latin typeface="Arial" pitchFamily="34" charset="0"/>
-                          <a:ea typeface="Arial" pitchFamily="34" charset="-122"/>
-                          <a:cs typeface="Arial" pitchFamily="34" charset="-120"/>
-                        </a:rPr>
-                        <a:t>PASS (Ready for push)</a:t>
-                      </a:r>
-                      <a:endParaRPr lang="en-US" sz="1000" dirty="0">
-                        <a:latin typeface="Arial" charset="0"/>
-                        <a:ea typeface="Arial" charset="0"/>
-                        <a:cs typeface="Arial" charset="0"/>
-                      </a:endParaRPr>
-                    </a:p>
-                  </a:txBody>
-                  <a:tcPr marL="91440" marR="91440" marT="45720" marB="45720">
-                    <a:lnL w="12700" cap="flat" cmpd="sng" algn="ctr">
-                      <a:solidFill>
-                        <a:srgbClr val="D0CCE8"/>
-                      </a:solidFill>
-                      <a:prstDash val="solid"/>
-                      <a:round/>
-                      <a:headEnd type="none" w="med" len="med"/>
-                      <a:tailEnd type="none" w="med" len="med"/>
-                    </a:lnL>
-                    <a:lnR w="12700" cap="flat" cmpd="sng" algn="ctr">
-                      <a:solidFill>
-                        <a:srgbClr val="D0CCE8"/>
-                      </a:solidFill>
-                      <a:prstDash val="solid"/>
-                      <a:round/>
-                      <a:headEnd type="none" w="med" len="med"/>
-                      <a:tailEnd type="none" w="med" len="med"/>
-                    </a:lnR>
-                    <a:lnT w="12700" cap="flat" cmpd="sng" algn="ctr">
-                      <a:solidFill>
-                        <a:srgbClr val="D0CCE8"/>
-                      </a:solidFill>
-                      <a:prstDash val="solid"/>
-                      <a:round/>
-                      <a:headEnd type="none" w="med" len="med"/>
-                      <a:tailEnd type="none" w="med" len="med"/>
-                    </a:lnT>
-                    <a:lnB w="12700" cap="flat" cmpd="sng" algn="ctr">
-                      <a:solidFill>
-                        <a:srgbClr val="D0CCE8"/>
-                      </a:solidFill>
-                      <a:prstDash val="solid"/>
-                      <a:round/>
-                      <a:headEnd type="none" w="med" len="med"/>
-                      <a:tailEnd type="none" w="med" len="med"/>
-                    </a:lnB>
-                  </a:tcPr>
-                </a:tc>
-              </a:tr>
-              <a:tr h="438912">
-                <a:tc>
-                  <a:txBody>
-                    <a:bodyPr/>
-                    <a:lstStyle/>
-                    <a:p>
-                      <a:pPr indent="0" marL="0">
-                        <a:buNone/>
-                      </a:pPr>
-                      <a:r>
-                        <a:rPr lang="en-US" sz="1000" dirty="0">
-                          <a:solidFill>
-                            <a:srgbClr val="000000"/>
+                            <a:srgbClr val="F1F5F9"/>
                           </a:solidFill>
                           <a:latin typeface="Arial" pitchFamily="34" charset="0"/>
                           <a:ea typeface="Arial" pitchFamily="34" charset="-122"/>
@@ -8327,7 +8573,7 @@
                   <a:tcPr marL="91440" marR="91440" marT="45720" marB="45720">
                     <a:lnL w="12700" cap="flat" cmpd="sng" algn="ctr">
                       <a:solidFill>
-                        <a:srgbClr val="D0CCE8"/>
+                        <a:srgbClr val="232F48"/>
                       </a:solidFill>
                       <a:prstDash val="solid"/>
                       <a:round/>
@@ -8336,7 +8582,7 @@
                     </a:lnL>
                     <a:lnR w="12700" cap="flat" cmpd="sng" algn="ctr">
                       <a:solidFill>
-                        <a:srgbClr val="D0CCE8"/>
+                        <a:srgbClr val="232F48"/>
                       </a:solidFill>
                       <a:prstDash val="solid"/>
                       <a:round/>
@@ -8345,7 +8591,7 @@
                     </a:lnR>
                     <a:lnT w="12700" cap="flat" cmpd="sng" algn="ctr">
                       <a:solidFill>
-                        <a:srgbClr val="D0CCE8"/>
+                        <a:srgbClr val="232F48"/>
                       </a:solidFill>
                       <a:prstDash val="solid"/>
                       <a:round/>
@@ -8354,13 +8600,16 @@
                     </a:lnT>
                     <a:lnB w="12700" cap="flat" cmpd="sng" algn="ctr">
                       <a:solidFill>
-                        <a:srgbClr val="D0CCE8"/>
+                        <a:srgbClr val="232F48"/>
                       </a:solidFill>
                       <a:prstDash val="solid"/>
                       <a:round/>
                       <a:headEnd type="none" w="med" len="med"/>
                       <a:tailEnd type="none" w="med" len="med"/>
                     </a:lnB>
+                    <a:solidFill>
+                      <a:srgbClr val="121A2B"/>
+                    </a:solidFill>
                   </a:tcPr>
                 </a:tc>
                 <a:tc>
@@ -8374,13 +8623,13 @@
                       <a:r>
                         <a:rPr lang="en-US" sz="1000" dirty="0">
                           <a:solidFill>
-                            <a:srgbClr val="000000"/>
+                            <a:srgbClr val="F1F5F9"/>
                           </a:solidFill>
                           <a:latin typeface="Arial" pitchFamily="34" charset="0"/>
                           <a:ea typeface="Arial" pitchFamily="34" charset="-122"/>
                           <a:cs typeface="Arial" pitchFamily="34" charset="-120"/>
                         </a:rPr>
-                        <a:t>Contribution Contract + TraceMap + Claim Gate + ProofBundle + ProofBench</a:t>
+                        <a:t>Pre-edit Contribution Contract + 4-Node TraceMap + Claim Gate + ProofBundle</a:t>
                       </a:r>
                       <a:endParaRPr lang="en-US" sz="1000" dirty="0">
                         <a:latin typeface="Arial" charset="0"/>
@@ -8392,7 +8641,7 @@
                   <a:tcPr marL="91440" marR="91440" marT="45720" marB="45720">
                     <a:lnL w="12700" cap="flat" cmpd="sng" algn="ctr">
                       <a:solidFill>
-                        <a:srgbClr val="D0CCE8"/>
+                        <a:srgbClr val="232F48"/>
                       </a:solidFill>
                       <a:prstDash val="solid"/>
                       <a:round/>
@@ -8401,7 +8650,7 @@
                     </a:lnL>
                     <a:lnR w="12700" cap="flat" cmpd="sng" algn="ctr">
                       <a:solidFill>
-                        <a:srgbClr val="D0CCE8"/>
+                        <a:srgbClr val="232F48"/>
                       </a:solidFill>
                       <a:prstDash val="solid"/>
                       <a:round/>
@@ -8410,7 +8659,7 @@
                     </a:lnR>
                     <a:lnT w="12700" cap="flat" cmpd="sng" algn="ctr">
                       <a:solidFill>
-                        <a:srgbClr val="D0CCE8"/>
+                        <a:srgbClr val="232F48"/>
                       </a:solidFill>
                       <a:prstDash val="solid"/>
                       <a:round/>
@@ -8419,13 +8668,16 @@
                     </a:lnT>
                     <a:lnB w="12700" cap="flat" cmpd="sng" algn="ctr">
                       <a:solidFill>
-                        <a:srgbClr val="D0CCE8"/>
+                        <a:srgbClr val="232F48"/>
                       </a:solidFill>
                       <a:prstDash val="solid"/>
                       <a:round/>
                       <a:headEnd type="none" w="med" len="med"/>
                       <a:tailEnd type="none" w="med" len="med"/>
                     </a:lnB>
+                    <a:solidFill>
+                      <a:srgbClr val="121A2B"/>
+                    </a:solidFill>
                   </a:tcPr>
                 </a:tc>
                 <a:tc>
@@ -8439,7 +8691,7 @@
                       <a:r>
                         <a:rPr lang="en-US" sz="1000" dirty="0">
                           <a:solidFill>
-                            <a:srgbClr val="000000"/>
+                            <a:srgbClr val="A7F3D0"/>
                           </a:solidFill>
                           <a:latin typeface="Arial" pitchFamily="34" charset="0"/>
                           <a:ea typeface="Arial" pitchFamily="34" charset="-122"/>
@@ -8457,7 +8709,7 @@
                   <a:tcPr marL="91440" marR="91440" marT="45720" marB="45720">
                     <a:lnL w="12700" cap="flat" cmpd="sng" algn="ctr">
                       <a:solidFill>
-                        <a:srgbClr val="D0CCE8"/>
+                        <a:srgbClr val="232F48"/>
                       </a:solidFill>
                       <a:prstDash val="solid"/>
                       <a:round/>
@@ -8466,7 +8718,7 @@
                     </a:lnL>
                     <a:lnR w="12700" cap="flat" cmpd="sng" algn="ctr">
                       <a:solidFill>
-                        <a:srgbClr val="D0CCE8"/>
+                        <a:srgbClr val="232F48"/>
                       </a:solidFill>
                       <a:prstDash val="solid"/>
                       <a:round/>
@@ -8475,7 +8727,7 @@
                     </a:lnR>
                     <a:lnT w="12700" cap="flat" cmpd="sng" algn="ctr">
                       <a:solidFill>
-                        <a:srgbClr val="D0CCE8"/>
+                        <a:srgbClr val="232F48"/>
                       </a:solidFill>
                       <a:prstDash val="solid"/>
                       <a:round/>
@@ -8484,17 +8736,20 @@
                     </a:lnT>
                     <a:lnB w="12700" cap="flat" cmpd="sng" algn="ctr">
                       <a:solidFill>
-                        <a:srgbClr val="D0CCE8"/>
+                        <a:srgbClr val="232F48"/>
                       </a:solidFill>
                       <a:prstDash val="solid"/>
                       <a:round/>
                       <a:headEnd type="none" w="med" len="med"/>
                       <a:tailEnd type="none" w="med" len="med"/>
                     </a:lnB>
+                    <a:solidFill>
+                      <a:srgbClr val="121A2B"/>
+                    </a:solidFill>
                   </a:tcPr>
                 </a:tc>
               </a:tr>
-              <a:tr h="438912">
+              <a:tr h="457200">
                 <a:tc>
                   <a:txBody>
                     <a:bodyPr/>
@@ -8504,9 +8759,9 @@
                         <a:buNone/>
                       </a:pPr>
                       <a:r>
-                        <a:rPr lang="en-US" sz="1000" dirty="0">
+                        <a:rPr lang="en-US" sz="1000" b="1" dirty="0">
                           <a:solidFill>
-                            <a:srgbClr val="000000"/>
+                            <a:srgbClr val="F1F5F9"/>
                           </a:solidFill>
                           <a:latin typeface="Arial" pitchFamily="34" charset="0"/>
                           <a:ea typeface="Arial" pitchFamily="34" charset="-122"/>
@@ -8524,7 +8779,7 @@
                   <a:tcPr marL="91440" marR="91440" marT="45720" marB="45720">
                     <a:lnL w="12700" cap="flat" cmpd="sng" algn="ctr">
                       <a:solidFill>
-                        <a:srgbClr val="D0CCE8"/>
+                        <a:srgbClr val="232F48"/>
                       </a:solidFill>
                       <a:prstDash val="solid"/>
                       <a:round/>
@@ -8533,7 +8788,7 @@
                     </a:lnL>
                     <a:lnR w="12700" cap="flat" cmpd="sng" algn="ctr">
                       <a:solidFill>
-                        <a:srgbClr val="D0CCE8"/>
+                        <a:srgbClr val="232F48"/>
                       </a:solidFill>
                       <a:prstDash val="solid"/>
                       <a:round/>
@@ -8542,7 +8797,7 @@
                     </a:lnR>
                     <a:lnT w="12700" cap="flat" cmpd="sng" algn="ctr">
                       <a:solidFill>
-                        <a:srgbClr val="D0CCE8"/>
+                        <a:srgbClr val="232F48"/>
                       </a:solidFill>
                       <a:prstDash val="solid"/>
                       <a:round/>
@@ -8551,13 +8806,16 @@
                     </a:lnT>
                     <a:lnB w="12700" cap="flat" cmpd="sng" algn="ctr">
                       <a:solidFill>
-                        <a:srgbClr val="D0CCE8"/>
+                        <a:srgbClr val="232F48"/>
                       </a:solidFill>
                       <a:prstDash val="solid"/>
                       <a:round/>
                       <a:headEnd type="none" w="med" len="med"/>
                       <a:tailEnd type="none" w="med" len="med"/>
                     </a:lnB>
+                    <a:solidFill>
+                      <a:srgbClr val="121A2B"/>
+                    </a:solidFill>
                   </a:tcPr>
                 </a:tc>
                 <a:tc>
@@ -8571,13 +8829,13 @@
                       <a:r>
                         <a:rPr lang="en-US" sz="1000" dirty="0">
                           <a:solidFill>
-                            <a:srgbClr val="000000"/>
+                            <a:srgbClr val="F1F5F9"/>
                           </a:solidFill>
                           <a:latin typeface="Arial" pitchFamily="34" charset="0"/>
                           <a:ea typeface="Arial" pitchFamily="34" charset="-122"/>
                           <a:cs typeface="Arial" pitchFamily="34" charset="-120"/>
                         </a:rPr>
-                        <a:t>Explicit slide #7, README section, and docs/open-innovation.md</a:t>
+                        <a:t>Explicit Slide #7, README section, and docs/open-innovation.md</a:t>
                       </a:r>
                       <a:endParaRPr lang="en-US" sz="1000" dirty="0">
                         <a:latin typeface="Arial" charset="0"/>
@@ -8589,7 +8847,7 @@
                   <a:tcPr marL="91440" marR="91440" marT="45720" marB="45720">
                     <a:lnL w="12700" cap="flat" cmpd="sng" algn="ctr">
                       <a:solidFill>
-                        <a:srgbClr val="D0CCE8"/>
+                        <a:srgbClr val="232F48"/>
                       </a:solidFill>
                       <a:prstDash val="solid"/>
                       <a:round/>
@@ -8598,7 +8856,7 @@
                     </a:lnL>
                     <a:lnR w="12700" cap="flat" cmpd="sng" algn="ctr">
                       <a:solidFill>
-                        <a:srgbClr val="D0CCE8"/>
+                        <a:srgbClr val="232F48"/>
                       </a:solidFill>
                       <a:prstDash val="solid"/>
                       <a:round/>
@@ -8607,7 +8865,7 @@
                     </a:lnR>
                     <a:lnT w="12700" cap="flat" cmpd="sng" algn="ctr">
                       <a:solidFill>
-                        <a:srgbClr val="D0CCE8"/>
+                        <a:srgbClr val="232F48"/>
                       </a:solidFill>
                       <a:prstDash val="solid"/>
                       <a:round/>
@@ -8616,13 +8874,16 @@
                     </a:lnT>
                     <a:lnB w="12700" cap="flat" cmpd="sng" algn="ctr">
                       <a:solidFill>
-                        <a:srgbClr val="D0CCE8"/>
+                        <a:srgbClr val="232F48"/>
                       </a:solidFill>
                       <a:prstDash val="solid"/>
                       <a:round/>
                       <a:headEnd type="none" w="med" len="med"/>
                       <a:tailEnd type="none" w="med" len="med"/>
                     </a:lnB>
+                    <a:solidFill>
+                      <a:srgbClr val="121A2B"/>
+                    </a:solidFill>
                   </a:tcPr>
                 </a:tc>
                 <a:tc>
@@ -8636,7 +8897,7 @@
                       <a:r>
                         <a:rPr lang="en-US" sz="1000" dirty="0">
                           <a:solidFill>
-                            <a:srgbClr val="000000"/>
+                            <a:srgbClr val="A7F3D0"/>
                           </a:solidFill>
                           <a:latin typeface="Arial" pitchFamily="34" charset="0"/>
                           <a:ea typeface="Arial" pitchFamily="34" charset="-122"/>
@@ -8654,7 +8915,7 @@
                   <a:tcPr marL="91440" marR="91440" marT="45720" marB="45720">
                     <a:lnL w="12700" cap="flat" cmpd="sng" algn="ctr">
                       <a:solidFill>
-                        <a:srgbClr val="D0CCE8"/>
+                        <a:srgbClr val="232F48"/>
                       </a:solidFill>
                       <a:prstDash val="solid"/>
                       <a:round/>
@@ -8663,7 +8924,7 @@
                     </a:lnL>
                     <a:lnR w="12700" cap="flat" cmpd="sng" algn="ctr">
                       <a:solidFill>
-                        <a:srgbClr val="D0CCE8"/>
+                        <a:srgbClr val="232F48"/>
                       </a:solidFill>
                       <a:prstDash val="solid"/>
                       <a:round/>
@@ -8672,7 +8933,7 @@
                     </a:lnR>
                     <a:lnT w="12700" cap="flat" cmpd="sng" algn="ctr">
                       <a:solidFill>
-                        <a:srgbClr val="D0CCE8"/>
+                        <a:srgbClr val="232F48"/>
                       </a:solidFill>
                       <a:prstDash val="solid"/>
                       <a:round/>
@@ -8681,17 +8942,20 @@
                     </a:lnT>
                     <a:lnB w="12700" cap="flat" cmpd="sng" algn="ctr">
                       <a:solidFill>
-                        <a:srgbClr val="D0CCE8"/>
+                        <a:srgbClr val="232F48"/>
                       </a:solidFill>
                       <a:prstDash val="solid"/>
                       <a:round/>
                       <a:headEnd type="none" w="med" len="med"/>
                       <a:tailEnd type="none" w="med" len="med"/>
                     </a:lnB>
+                    <a:solidFill>
+                      <a:srgbClr val="121A2B"/>
+                    </a:solidFill>
                   </a:tcPr>
                 </a:tc>
               </a:tr>
-              <a:tr h="438912">
+              <a:tr h="457200">
                 <a:tc>
                   <a:txBody>
                     <a:bodyPr/>
@@ -8701,9 +8965,9 @@
                         <a:buNone/>
                       </a:pPr>
                       <a:r>
-                        <a:rPr lang="en-US" sz="1000" dirty="0">
+                        <a:rPr lang="en-US" sz="1000" b="1" dirty="0">
                           <a:solidFill>
-                            <a:srgbClr val="000000"/>
+                            <a:srgbClr val="F1F5F9"/>
                           </a:solidFill>
                           <a:latin typeface="Arial" pitchFamily="34" charset="0"/>
                           <a:ea typeface="Arial" pitchFamily="34" charset="-122"/>
@@ -8721,7 +8985,7 @@
                   <a:tcPr marL="91440" marR="91440" marT="45720" marB="45720">
                     <a:lnL w="12700" cap="flat" cmpd="sng" algn="ctr">
                       <a:solidFill>
-                        <a:srgbClr val="D0CCE8"/>
+                        <a:srgbClr val="232F48"/>
                       </a:solidFill>
                       <a:prstDash val="solid"/>
                       <a:round/>
@@ -8730,7 +8994,7 @@
                     </a:lnL>
                     <a:lnR w="12700" cap="flat" cmpd="sng" algn="ctr">
                       <a:solidFill>
-                        <a:srgbClr val="D0CCE8"/>
+                        <a:srgbClr val="232F48"/>
                       </a:solidFill>
                       <a:prstDash val="solid"/>
                       <a:round/>
@@ -8739,7 +9003,7 @@
                     </a:lnR>
                     <a:lnT w="12700" cap="flat" cmpd="sng" algn="ctr">
                       <a:solidFill>
-                        <a:srgbClr val="D0CCE8"/>
+                        <a:srgbClr val="232F48"/>
                       </a:solidFill>
                       <a:prstDash val="solid"/>
                       <a:round/>
@@ -8748,13 +9012,16 @@
                     </a:lnT>
                     <a:lnB w="12700" cap="flat" cmpd="sng" algn="ctr">
                       <a:solidFill>
-                        <a:srgbClr val="D0CCE8"/>
+                        <a:srgbClr val="232F48"/>
                       </a:solidFill>
                       <a:prstDash val="solid"/>
                       <a:round/>
                       <a:headEnd type="none" w="med" len="med"/>
                       <a:tailEnd type="none" w="med" len="med"/>
                     </a:lnB>
+                    <a:solidFill>
+                      <a:srgbClr val="121A2B"/>
+                    </a:solidFill>
                   </a:tcPr>
                 </a:tc>
                 <a:tc>
@@ -8768,7 +9035,7 @@
                       <a:r>
                         <a:rPr lang="en-US" sz="1000" dirty="0">
                           <a:solidFill>
-                            <a:srgbClr val="000000"/>
+                            <a:srgbClr val="F1F5F9"/>
                           </a:solidFill>
                           <a:latin typeface="Arial" pitchFamily="34" charset="0"/>
                           <a:ea typeface="Arial" pitchFamily="34" charset="-122"/>
@@ -8786,7 +9053,7 @@
                   <a:tcPr marL="91440" marR="91440" marT="45720" marB="45720">
                     <a:lnL w="12700" cap="flat" cmpd="sng" algn="ctr">
                       <a:solidFill>
-                        <a:srgbClr val="D0CCE8"/>
+                        <a:srgbClr val="232F48"/>
                       </a:solidFill>
                       <a:prstDash val="solid"/>
                       <a:round/>
@@ -8795,7 +9062,7 @@
                     </a:lnL>
                     <a:lnR w="12700" cap="flat" cmpd="sng" algn="ctr">
                       <a:solidFill>
-                        <a:srgbClr val="D0CCE8"/>
+                        <a:srgbClr val="232F48"/>
                       </a:solidFill>
                       <a:prstDash val="solid"/>
                       <a:round/>
@@ -8804,7 +9071,7 @@
                     </a:lnR>
                     <a:lnT w="12700" cap="flat" cmpd="sng" algn="ctr">
                       <a:solidFill>
-                        <a:srgbClr val="D0CCE8"/>
+                        <a:srgbClr val="232F48"/>
                       </a:solidFill>
                       <a:prstDash val="solid"/>
                       <a:round/>
@@ -8813,13 +9080,16 @@
                     </a:lnT>
                     <a:lnB w="12700" cap="flat" cmpd="sng" algn="ctr">
                       <a:solidFill>
-                        <a:srgbClr val="D0CCE8"/>
+                        <a:srgbClr val="232F48"/>
                       </a:solidFill>
                       <a:prstDash val="solid"/>
                       <a:round/>
                       <a:headEnd type="none" w="med" len="med"/>
                       <a:tailEnd type="none" w="med" len="med"/>
                     </a:lnB>
+                    <a:solidFill>
+                      <a:srgbClr val="121A2B"/>
+                    </a:solidFill>
                   </a:tcPr>
                 </a:tc>
                 <a:tc>
@@ -8833,7 +9103,7 @@
                       <a:r>
                         <a:rPr lang="en-US" sz="1000" dirty="0">
                           <a:solidFill>
-                            <a:srgbClr val="000000"/>
+                            <a:srgbClr val="A7F3D0"/>
                           </a:solidFill>
                           <a:latin typeface="Arial" pitchFamily="34" charset="0"/>
                           <a:ea typeface="Arial" pitchFamily="34" charset="-122"/>
@@ -8851,7 +9121,7 @@
                   <a:tcPr marL="91440" marR="91440" marT="45720" marB="45720">
                     <a:lnL w="12700" cap="flat" cmpd="sng" algn="ctr">
                       <a:solidFill>
-                        <a:srgbClr val="D0CCE8"/>
+                        <a:srgbClr val="232F48"/>
                       </a:solidFill>
                       <a:prstDash val="solid"/>
                       <a:round/>
@@ -8860,7 +9130,7 @@
                     </a:lnL>
                     <a:lnR w="12700" cap="flat" cmpd="sng" algn="ctr">
                       <a:solidFill>
-                        <a:srgbClr val="D0CCE8"/>
+                        <a:srgbClr val="232F48"/>
                       </a:solidFill>
                       <a:prstDash val="solid"/>
                       <a:round/>
@@ -8869,7 +9139,7 @@
                     </a:lnR>
                     <a:lnT w="12700" cap="flat" cmpd="sng" algn="ctr">
                       <a:solidFill>
-                        <a:srgbClr val="D0CCE8"/>
+                        <a:srgbClr val="232F48"/>
                       </a:solidFill>
                       <a:prstDash val="solid"/>
                       <a:round/>
@@ -8878,17 +9148,20 @@
                     </a:lnT>
                     <a:lnB w="12700" cap="flat" cmpd="sng" algn="ctr">
                       <a:solidFill>
-                        <a:srgbClr val="D0CCE8"/>
+                        <a:srgbClr val="232F48"/>
                       </a:solidFill>
                       <a:prstDash val="solid"/>
                       <a:round/>
                       <a:headEnd type="none" w="med" len="med"/>
                       <a:tailEnd type="none" w="med" len="med"/>
                     </a:lnB>
+                    <a:solidFill>
+                      <a:srgbClr val="121A2B"/>
+                    </a:solidFill>
                   </a:tcPr>
                 </a:tc>
               </a:tr>
-              <a:tr h="438912">
+              <a:tr h="457200">
                 <a:tc>
                   <a:txBody>
                     <a:bodyPr/>
@@ -8898,9 +9171,9 @@
                         <a:buNone/>
                       </a:pPr>
                       <a:r>
-                        <a:rPr lang="en-US" sz="1000" dirty="0">
+                        <a:rPr lang="en-US" sz="1000" b="1" dirty="0">
                           <a:solidFill>
-                            <a:srgbClr val="000000"/>
+                            <a:srgbClr val="F1F5F9"/>
                           </a:solidFill>
                           <a:latin typeface="Arial" pitchFamily="34" charset="0"/>
                           <a:ea typeface="Arial" pitchFamily="34" charset="-122"/>
@@ -8918,7 +9191,7 @@
                   <a:tcPr marL="91440" marR="91440" marT="45720" marB="45720">
                     <a:lnL w="12700" cap="flat" cmpd="sng" algn="ctr">
                       <a:solidFill>
-                        <a:srgbClr val="D0CCE8"/>
+                        <a:srgbClr val="232F48"/>
                       </a:solidFill>
                       <a:prstDash val="solid"/>
                       <a:round/>
@@ -8927,7 +9200,7 @@
                     </a:lnL>
                     <a:lnR w="12700" cap="flat" cmpd="sng" algn="ctr">
                       <a:solidFill>
-                        <a:srgbClr val="D0CCE8"/>
+                        <a:srgbClr val="232F48"/>
                       </a:solidFill>
                       <a:prstDash val="solid"/>
                       <a:round/>
@@ -8936,7 +9209,7 @@
                     </a:lnR>
                     <a:lnT w="12700" cap="flat" cmpd="sng" algn="ctr">
                       <a:solidFill>
-                        <a:srgbClr val="D0CCE8"/>
+                        <a:srgbClr val="232F48"/>
                       </a:solidFill>
                       <a:prstDash val="solid"/>
                       <a:round/>
@@ -8945,13 +9218,16 @@
                     </a:lnT>
                     <a:lnB w="12700" cap="flat" cmpd="sng" algn="ctr">
                       <a:solidFill>
-                        <a:srgbClr val="D0CCE8"/>
+                        <a:srgbClr val="232F48"/>
                       </a:solidFill>
                       <a:prstDash val="solid"/>
                       <a:round/>
                       <a:headEnd type="none" w="med" len="med"/>
                       <a:tailEnd type="none" w="med" len="med"/>
                     </a:lnB>
+                    <a:solidFill>
+                      <a:srgbClr val="121A2B"/>
+                    </a:solidFill>
                   </a:tcPr>
                 </a:tc>
                 <a:tc>
@@ -8965,13 +9241,13 @@
                       <a:r>
                         <a:rPr lang="en-US" sz="1000" dirty="0">
                           <a:solidFill>
-                            <a:srgbClr val="000000"/>
+                            <a:srgbClr val="F1F5F9"/>
                           </a:solidFill>
                           <a:latin typeface="Arial" pitchFamily="34" charset="0"/>
                           <a:ea typeface="Arial" pitchFamily="34" charset="-122"/>
                           <a:cs typeface="Arial" pitchFamily="34" charset="-120"/>
                         </a:rPr>
-                        <a:t>Editable submission/IssueLift_Submission.pptx + 60-90s demo script</a:t>
+                        <a:t>submission/IssueLift_Submission.pptx (8 slides) + 3-4 min demo in docs/demo-script.md</a:t>
                       </a:r>
                       <a:endParaRPr lang="en-US" sz="1000" dirty="0">
                         <a:latin typeface="Arial" charset="0"/>
@@ -8983,7 +9259,7 @@
                   <a:tcPr marL="91440" marR="91440" marT="45720" marB="45720">
                     <a:lnL w="12700" cap="flat" cmpd="sng" algn="ctr">
                       <a:solidFill>
-                        <a:srgbClr val="D0CCE8"/>
+                        <a:srgbClr val="232F48"/>
                       </a:solidFill>
                       <a:prstDash val="solid"/>
                       <a:round/>
@@ -8992,7 +9268,7 @@
                     </a:lnL>
                     <a:lnR w="12700" cap="flat" cmpd="sng" algn="ctr">
                       <a:solidFill>
-                        <a:srgbClr val="D0CCE8"/>
+                        <a:srgbClr val="232F48"/>
                       </a:solidFill>
                       <a:prstDash val="solid"/>
                       <a:round/>
@@ -9001,7 +9277,7 @@
                     </a:lnR>
                     <a:lnT w="12700" cap="flat" cmpd="sng" algn="ctr">
                       <a:solidFill>
-                        <a:srgbClr val="D0CCE8"/>
+                        <a:srgbClr val="232F48"/>
                       </a:solidFill>
                       <a:prstDash val="solid"/>
                       <a:round/>
@@ -9010,13 +9286,16 @@
                     </a:lnT>
                     <a:lnB w="12700" cap="flat" cmpd="sng" algn="ctr">
                       <a:solidFill>
-                        <a:srgbClr val="D0CCE8"/>
+                        <a:srgbClr val="232F48"/>
                       </a:solidFill>
                       <a:prstDash val="solid"/>
                       <a:round/>
                       <a:headEnd type="none" w="med" len="med"/>
                       <a:tailEnd type="none" w="med" len="med"/>
                     </a:lnB>
+                    <a:solidFill>
+                      <a:srgbClr val="121A2B"/>
+                    </a:solidFill>
                   </a:tcPr>
                 </a:tc>
                 <a:tc>
@@ -9030,7 +9309,7 @@
                       <a:r>
                         <a:rPr lang="en-US" sz="1000" dirty="0">
                           <a:solidFill>
-                            <a:srgbClr val="000000"/>
+                            <a:srgbClr val="A7F3D0"/>
                           </a:solidFill>
                           <a:latin typeface="Arial" pitchFamily="34" charset="0"/>
                           <a:ea typeface="Arial" pitchFamily="34" charset="-122"/>
@@ -9048,7 +9327,7 @@
                   <a:tcPr marL="91440" marR="91440" marT="45720" marB="45720">
                     <a:lnL w="12700" cap="flat" cmpd="sng" algn="ctr">
                       <a:solidFill>
-                        <a:srgbClr val="D0CCE8"/>
+                        <a:srgbClr val="232F48"/>
                       </a:solidFill>
                       <a:prstDash val="solid"/>
                       <a:round/>
@@ -9057,7 +9336,7 @@
                     </a:lnL>
                     <a:lnR w="12700" cap="flat" cmpd="sng" algn="ctr">
                       <a:solidFill>
-                        <a:srgbClr val="D0CCE8"/>
+                        <a:srgbClr val="232F48"/>
                       </a:solidFill>
                       <a:prstDash val="solid"/>
                       <a:round/>
@@ -9066,7 +9345,7 @@
                     </a:lnR>
                     <a:lnT w="12700" cap="flat" cmpd="sng" algn="ctr">
                       <a:solidFill>
-                        <a:srgbClr val="D0CCE8"/>
+                        <a:srgbClr val="232F48"/>
                       </a:solidFill>
                       <a:prstDash val="solid"/>
                       <a:round/>
@@ -9075,17 +9354,20 @@
                     </a:lnT>
                     <a:lnB w="12700" cap="flat" cmpd="sng" algn="ctr">
                       <a:solidFill>
-                        <a:srgbClr val="D0CCE8"/>
+                        <a:srgbClr val="232F48"/>
                       </a:solidFill>
                       <a:prstDash val="solid"/>
                       <a:round/>
                       <a:headEnd type="none" w="med" len="med"/>
                       <a:tailEnd type="none" w="med" len="med"/>
                     </a:lnB>
+                    <a:solidFill>
+                      <a:srgbClr val="121A2B"/>
+                    </a:solidFill>
                   </a:tcPr>
                 </a:tc>
               </a:tr>
-              <a:tr h="438912">
+              <a:tr h="457200">
                 <a:tc>
                   <a:txBody>
                     <a:bodyPr/>
@@ -9095,15 +9377,15 @@
                         <a:buNone/>
                       </a:pPr>
                       <a:r>
-                        <a:rPr lang="en-US" sz="1000" dirty="0">
+                        <a:rPr lang="en-US" sz="1000" b="1" dirty="0">
                           <a:solidFill>
-                            <a:srgbClr val="000000"/>
+                            <a:srgbClr val="F1F5F9"/>
                           </a:solidFill>
                           <a:latin typeface="Arial" pitchFamily="34" charset="0"/>
                           <a:ea typeface="Arial" pitchFamily="34" charset="-122"/>
                           <a:cs typeface="Arial" pitchFamily="34" charset="-120"/>
                         </a:rPr>
-                        <a:t>9. Setup Guide</a:t>
+                        <a:t>9. Setup &amp; ProofBench</a:t>
                       </a:r>
                       <a:endParaRPr lang="en-US" sz="1000" dirty="0">
                         <a:latin typeface="Arial" charset="0"/>
@@ -9115,7 +9397,7 @@
                   <a:tcPr marL="91440" marR="91440" marT="45720" marB="45720">
                     <a:lnL w="12700" cap="flat" cmpd="sng" algn="ctr">
                       <a:solidFill>
-                        <a:srgbClr val="D0CCE8"/>
+                        <a:srgbClr val="232F48"/>
                       </a:solidFill>
                       <a:prstDash val="solid"/>
                       <a:round/>
@@ -9124,7 +9406,7 @@
                     </a:lnL>
                     <a:lnR w="12700" cap="flat" cmpd="sng" algn="ctr">
                       <a:solidFill>
-                        <a:srgbClr val="D0CCE8"/>
+                        <a:srgbClr val="232F48"/>
                       </a:solidFill>
                       <a:prstDash val="solid"/>
                       <a:round/>
@@ -9133,7 +9415,7 @@
                     </a:lnR>
                     <a:lnT w="12700" cap="flat" cmpd="sng" algn="ctr">
                       <a:solidFill>
-                        <a:srgbClr val="D0CCE8"/>
+                        <a:srgbClr val="232F48"/>
                       </a:solidFill>
                       <a:prstDash val="solid"/>
                       <a:round/>
@@ -9142,13 +9424,16 @@
                     </a:lnT>
                     <a:lnB w="12700" cap="flat" cmpd="sng" algn="ctr">
                       <a:solidFill>
-                        <a:srgbClr val="D0CCE8"/>
+                        <a:srgbClr val="232F48"/>
                       </a:solidFill>
                       <a:prstDash val="solid"/>
                       <a:round/>
                       <a:headEnd type="none" w="med" len="med"/>
                       <a:tailEnd type="none" w="med" len="med"/>
                     </a:lnB>
+                    <a:solidFill>
+                      <a:srgbClr val="121A2B"/>
+                    </a:solidFill>
                   </a:tcPr>
                 </a:tc>
                 <a:tc>
@@ -9162,13 +9447,13 @@
                       <a:r>
                         <a:rPr lang="en-US" sz="1000" dirty="0">
                           <a:solidFill>
-                            <a:srgbClr val="000000"/>
+                            <a:srgbClr val="F1F5F9"/>
                           </a:solidFill>
                           <a:latin typeface="Arial" pitchFamily="34" charset="0"/>
                           <a:ea typeface="Arial" pitchFamily="34" charset="-122"/>
                           <a:cs typeface="Arial" pitchFamily="34" charset="-120"/>
                         </a:rPr>
-                        <a:t>.env.example, .env.local.example, clean install commands</a:t>
+                        <a:t>Clean install guide (Node 18.17+/20+) + 7/7 ProofBench evaluation fixtures</a:t>
                       </a:r>
                       <a:endParaRPr lang="en-US" sz="1000" dirty="0">
                         <a:latin typeface="Arial" charset="0"/>
@@ -9180,7 +9465,7 @@
                   <a:tcPr marL="91440" marR="91440" marT="45720" marB="45720">
                     <a:lnL w="12700" cap="flat" cmpd="sng" algn="ctr">
                       <a:solidFill>
-                        <a:srgbClr val="D0CCE8"/>
+                        <a:srgbClr val="232F48"/>
                       </a:solidFill>
                       <a:prstDash val="solid"/>
                       <a:round/>
@@ -9189,7 +9474,7 @@
                     </a:lnL>
                     <a:lnR w="12700" cap="flat" cmpd="sng" algn="ctr">
                       <a:solidFill>
-                        <a:srgbClr val="D0CCE8"/>
+                        <a:srgbClr val="232F48"/>
                       </a:solidFill>
                       <a:prstDash val="solid"/>
                       <a:round/>
@@ -9198,7 +9483,7 @@
                     </a:lnR>
                     <a:lnT w="12700" cap="flat" cmpd="sng" algn="ctr">
                       <a:solidFill>
-                        <a:srgbClr val="D0CCE8"/>
+                        <a:srgbClr val="232F48"/>
                       </a:solidFill>
                       <a:prstDash val="solid"/>
                       <a:round/>
@@ -9207,13 +9492,16 @@
                     </a:lnT>
                     <a:lnB w="12700" cap="flat" cmpd="sng" algn="ctr">
                       <a:solidFill>
-                        <a:srgbClr val="D0CCE8"/>
+                        <a:srgbClr val="232F48"/>
                       </a:solidFill>
                       <a:prstDash val="solid"/>
                       <a:round/>
                       <a:headEnd type="none" w="med" len="med"/>
                       <a:tailEnd type="none" w="med" len="med"/>
                     </a:lnB>
+                    <a:solidFill>
+                      <a:srgbClr val="121A2B"/>
+                    </a:solidFill>
                   </a:tcPr>
                 </a:tc>
                 <a:tc>
@@ -9227,13 +9515,13 @@
                       <a:r>
                         <a:rPr lang="en-US" sz="1000" dirty="0">
                           <a:solidFill>
-                            <a:srgbClr val="000000"/>
+                            <a:srgbClr val="A7F3D0"/>
                           </a:solidFill>
                           <a:latin typeface="Arial" pitchFamily="34" charset="0"/>
                           <a:ea typeface="Arial" pitchFamily="34" charset="-122"/>
                           <a:cs typeface="Arial" pitchFamily="34" charset="-120"/>
                         </a:rPr>
-                        <a:t>PASS (Verified)</a:t>
+                        <a:t>PASS (7/7 Fixtures)</a:t>
                       </a:r>
                       <a:endParaRPr lang="en-US" sz="1000" dirty="0">
                         <a:latin typeface="Arial" charset="0"/>
@@ -9245,7 +9533,7 @@
                   <a:tcPr marL="91440" marR="91440" marT="45720" marB="45720">
                     <a:lnL w="12700" cap="flat" cmpd="sng" algn="ctr">
                       <a:solidFill>
-                        <a:srgbClr val="D0CCE8"/>
+                        <a:srgbClr val="232F48"/>
                       </a:solidFill>
                       <a:prstDash val="solid"/>
                       <a:round/>
@@ -9254,7 +9542,7 @@
                     </a:lnL>
                     <a:lnR w="12700" cap="flat" cmpd="sng" algn="ctr">
                       <a:solidFill>
-                        <a:srgbClr val="D0CCE8"/>
+                        <a:srgbClr val="232F48"/>
                       </a:solidFill>
                       <a:prstDash val="solid"/>
                       <a:round/>
@@ -9263,7 +9551,7 @@
                     </a:lnR>
                     <a:lnT w="12700" cap="flat" cmpd="sng" algn="ctr">
                       <a:solidFill>
-                        <a:srgbClr val="D0CCE8"/>
+                        <a:srgbClr val="232F48"/>
                       </a:solidFill>
                       <a:prstDash val="solid"/>
                       <a:round/>
@@ -9272,13 +9560,16 @@
                     </a:lnT>
                     <a:lnB w="12700" cap="flat" cmpd="sng" algn="ctr">
                       <a:solidFill>
-                        <a:srgbClr val="D0CCE8"/>
+                        <a:srgbClr val="232F48"/>
                       </a:solidFill>
                       <a:prstDash val="solid"/>
                       <a:round/>
                       <a:headEnd type="none" w="med" len="med"/>
                       <a:tailEnd type="none" w="med" len="med"/>
                     </a:lnB>
+                    <a:solidFill>
+                      <a:srgbClr val="121A2B"/>
+                    </a:solidFill>
                   </a:tcPr>
                 </a:tc>
               </a:tr>

--- a/submission/IssueLift_Submission.pptx
+++ b/submission/IssueLift_Submission.pptx
@@ -1858,8 +1858,8 @@
         </p:nvSpPr>
         <p:spPr>
           <a:xfrm>
-            <a:off x="731520" y="457200"/>
-            <a:ext cx="10515600" cy="274320"/>
+            <a:off x="658368" y="393192"/>
+            <a:ext cx="5486400" cy="256032"/>
           </a:xfrm>
           <a:prstGeom prst="rect">
             <a:avLst/>
@@ -1883,7 +1883,7 @@
                 <a:ea typeface="Arial" pitchFamily="34" charset="-122"/>
                 <a:cs typeface="Arial" pitchFamily="34" charset="-120"/>
               </a:rPr>
-              <a:t>MARKET SNAPSHOT &amp; POSITIONING</a:t>
+              <a:t>THE ISSUE LIFT WORKFLOW</a:t>
             </a:r>
             <a:endParaRPr lang="en-US" sz="1200" dirty="0"/>
           </a:p>
@@ -1897,8 +1897,8 @@
         </p:nvSpPr>
         <p:spPr>
           <a:xfrm>
-            <a:off x="731520" y="822960"/>
-            <a:ext cx="10515600" cy="548640"/>
+            <a:off x="658368" y="731520"/>
+            <a:ext cx="10881360" cy="530352"/>
           </a:xfrm>
           <a:prstGeom prst="rect">
             <a:avLst/>
@@ -1914,7 +1914,7 @@
               <a:buNone/>
             </a:pPr>
             <a:r>
-              <a:rPr lang="en-US" sz="2600" b="1" dirty="0">
+              <a:rPr lang="en-US" sz="2800" b="1" dirty="0">
                 <a:solidFill>
                   <a:srgbClr val="F1F5F9"/>
                 </a:solidFill>
@@ -1922,1414 +1922,1348 @@
                 <a:ea typeface="Arial" pitchFamily="34" charset="-122"/>
                 <a:cs typeface="Arial" pitchFamily="34" charset="-120"/>
               </a:rPr>
-              <a:t>Adjacent Categories vs. IssueLift Pre-Edit Contract</a:t>
+              <a:t>How IssueLift works before coding</a:t>
             </a:r>
-            <a:endParaRPr lang="en-US" sz="2600" dirty="0"/>
+            <a:endParaRPr lang="en-US" sz="2800" dirty="0"/>
           </a:p>
         </p:txBody>
       </p:sp>
-      <p:graphicFrame>
-        <p:nvGraphicFramePr>
-          <p:cNvPr id="3" name="Table 0"/>
-          <p:cNvGraphicFramePr>
-            <a:graphicFrameLocks noGrp="1"/>
-          </p:cNvGraphicFramePr>
-          <p:nvPr>
-            <p:extLst>
-              <p:ext uri="{D42A27DB-BD31-4B8C-83A1-F6EECF244321}">
-                <p14:modId xmlns:p14="http://schemas.microsoft.com/office/powerpoint/2010/main" val="1579011935"/>
-              </p:ext>
-            </p:extLst>
-          </p:nvPr>
-        </p:nvGraphicFramePr>
-        <p:xfrm>
-          <a:off x="731520" y="1554480"/>
-          <a:ext cx="10698480" cy="4572000"/>
-        </p:xfrm>
-        <a:graphic>
-          <a:graphicData uri="http://schemas.openxmlformats.org/drawingml/2006/table">
-            <a:tbl>
-              <a:tblPr/>
-              <a:tblGrid>
-                <a:gridCol w="2674620"/>
-                <a:gridCol w="2674620"/>
-                <a:gridCol w="2674620"/>
-                <a:gridCol w="2674620"/>
-              </a:tblGrid>
-              <a:tr h="914400">
-                <a:tc>
-                  <a:txBody>
-                    <a:bodyPr/>
-                    <a:lstStyle/>
-                    <a:p>
-                      <a:pPr indent="0" marL="0">
-                        <a:buNone/>
-                      </a:pPr>
-                      <a:r>
-                        <a:rPr lang="en-US" sz="1100" b="1" dirty="0">
-                          <a:solidFill>
-                            <a:srgbClr val="FFFFFF"/>
-                          </a:solidFill>
-                          <a:latin typeface="Arial" pitchFamily="34" charset="0"/>
-                          <a:ea typeface="Arial" pitchFamily="34" charset="-122"/>
-                          <a:cs typeface="Arial" pitchFamily="34" charset="-120"/>
-                        </a:rPr>
-                        <a:t>Tool / Category</a:t>
-                      </a:r>
-                      <a:endParaRPr lang="en-US" sz="1100" dirty="0">
-                        <a:latin typeface="Arial" charset="0"/>
-                        <a:ea typeface="Arial" charset="0"/>
-                        <a:cs typeface="Arial" charset="0"/>
-                      </a:endParaRPr>
-                    </a:p>
-                  </a:txBody>
-                  <a:tcPr marL="91440" marR="91440" marT="45720" marB="45720">
-                    <a:lnL w="12700" cap="flat" cmpd="sng" algn="ctr">
-                      <a:solidFill>
-                        <a:srgbClr val="232F48"/>
-                      </a:solidFill>
-                      <a:prstDash val="solid"/>
-                      <a:round/>
-                      <a:headEnd type="none" w="med" len="med"/>
-                      <a:tailEnd type="none" w="med" len="med"/>
-                    </a:lnL>
-                    <a:lnR w="12700" cap="flat" cmpd="sng" algn="ctr">
-                      <a:solidFill>
-                        <a:srgbClr val="232F48"/>
-                      </a:solidFill>
-                      <a:prstDash val="solid"/>
-                      <a:round/>
-                      <a:headEnd type="none" w="med" len="med"/>
-                      <a:tailEnd type="none" w="med" len="med"/>
-                    </a:lnR>
-                    <a:lnT w="12700" cap="flat" cmpd="sng" algn="ctr">
-                      <a:solidFill>
-                        <a:srgbClr val="232F48"/>
-                      </a:solidFill>
-                      <a:prstDash val="solid"/>
-                      <a:round/>
-                      <a:headEnd type="none" w="med" len="med"/>
-                      <a:tailEnd type="none" w="med" len="med"/>
-                    </a:lnT>
-                    <a:lnB w="12700" cap="flat" cmpd="sng" algn="ctr">
-                      <a:solidFill>
-                        <a:srgbClr val="232F48"/>
-                      </a:solidFill>
-                      <a:prstDash val="solid"/>
-                      <a:round/>
-                      <a:headEnd type="none" w="med" len="med"/>
-                      <a:tailEnd type="none" w="med" len="med"/>
-                    </a:lnB>
-                    <a:solidFill>
-                      <a:srgbClr val="1E293B"/>
-                    </a:solidFill>
-                  </a:tcPr>
-                </a:tc>
-                <a:tc>
-                  <a:txBody>
-                    <a:bodyPr/>
-                    <a:lstStyle/>
-                    <a:p>
-                      <a:pPr indent="0" marL="0">
-                        <a:buNone/>
-                      </a:pPr>
-                      <a:r>
-                        <a:rPr lang="en-US" sz="1100" b="1" dirty="0">
-                          <a:solidFill>
-                            <a:srgbClr val="FFFFFF"/>
-                          </a:solidFill>
-                          <a:latin typeface="Arial" pitchFamily="34" charset="0"/>
-                          <a:ea typeface="Arial" pitchFamily="34" charset="-122"/>
-                          <a:cs typeface="Arial" pitchFamily="34" charset="-120"/>
-                        </a:rPr>
-                        <a:t>What It Does Well</a:t>
-                      </a:r>
-                      <a:endParaRPr lang="en-US" sz="1100" dirty="0">
-                        <a:latin typeface="Arial" charset="0"/>
-                        <a:ea typeface="Arial" charset="0"/>
-                        <a:cs typeface="Arial" charset="0"/>
-                      </a:endParaRPr>
-                    </a:p>
-                  </a:txBody>
-                  <a:tcPr marL="91440" marR="91440" marT="45720" marB="45720">
-                    <a:lnL w="12700" cap="flat" cmpd="sng" algn="ctr">
-                      <a:solidFill>
-                        <a:srgbClr val="232F48"/>
-                      </a:solidFill>
-                      <a:prstDash val="solid"/>
-                      <a:round/>
-                      <a:headEnd type="none" w="med" len="med"/>
-                      <a:tailEnd type="none" w="med" len="med"/>
-                    </a:lnL>
-                    <a:lnR w="12700" cap="flat" cmpd="sng" algn="ctr">
-                      <a:solidFill>
-                        <a:srgbClr val="232F48"/>
-                      </a:solidFill>
-                      <a:prstDash val="solid"/>
-                      <a:round/>
-                      <a:headEnd type="none" w="med" len="med"/>
-                      <a:tailEnd type="none" w="med" len="med"/>
-                    </a:lnR>
-                    <a:lnT w="12700" cap="flat" cmpd="sng" algn="ctr">
-                      <a:solidFill>
-                        <a:srgbClr val="232F48"/>
-                      </a:solidFill>
-                      <a:prstDash val="solid"/>
-                      <a:round/>
-                      <a:headEnd type="none" w="med" len="med"/>
-                      <a:tailEnd type="none" w="med" len="med"/>
-                    </a:lnT>
-                    <a:lnB w="12700" cap="flat" cmpd="sng" algn="ctr">
-                      <a:solidFill>
-                        <a:srgbClr val="232F48"/>
-                      </a:solidFill>
-                      <a:prstDash val="solid"/>
-                      <a:round/>
-                      <a:headEnd type="none" w="med" len="med"/>
-                      <a:tailEnd type="none" w="med" len="med"/>
-                    </a:lnB>
-                    <a:solidFill>
-                      <a:srgbClr val="1E293B"/>
-                    </a:solidFill>
-                  </a:tcPr>
-                </a:tc>
-                <a:tc>
-                  <a:txBody>
-                    <a:bodyPr/>
-                    <a:lstStyle/>
-                    <a:p>
-                      <a:pPr indent="0" marL="0">
-                        <a:buNone/>
-                      </a:pPr>
-                      <a:r>
-                        <a:rPr lang="en-US" sz="1100" b="1" dirty="0">
-                          <a:solidFill>
-                            <a:srgbClr val="FFFFFF"/>
-                          </a:solidFill>
-                          <a:latin typeface="Arial" pitchFamily="34" charset="0"/>
-                          <a:ea typeface="Arial" pitchFamily="34" charset="-122"/>
-                          <a:cs typeface="Arial" pitchFamily="34" charset="-120"/>
-                        </a:rPr>
-                        <a:t>What IssueLift Does NOT Copy</a:t>
-                      </a:r>
-                      <a:endParaRPr lang="en-US" sz="1100" dirty="0">
-                        <a:latin typeface="Arial" charset="0"/>
-                        <a:ea typeface="Arial" charset="0"/>
-                        <a:cs typeface="Arial" charset="0"/>
-                      </a:endParaRPr>
-                    </a:p>
-                  </a:txBody>
-                  <a:tcPr marL="91440" marR="91440" marT="45720" marB="45720">
-                    <a:lnL w="12700" cap="flat" cmpd="sng" algn="ctr">
-                      <a:solidFill>
-                        <a:srgbClr val="232F48"/>
-                      </a:solidFill>
-                      <a:prstDash val="solid"/>
-                      <a:round/>
-                      <a:headEnd type="none" w="med" len="med"/>
-                      <a:tailEnd type="none" w="med" len="med"/>
-                    </a:lnL>
-                    <a:lnR w="12700" cap="flat" cmpd="sng" algn="ctr">
-                      <a:solidFill>
-                        <a:srgbClr val="232F48"/>
-                      </a:solidFill>
-                      <a:prstDash val="solid"/>
-                      <a:round/>
-                      <a:headEnd type="none" w="med" len="med"/>
-                      <a:tailEnd type="none" w="med" len="med"/>
-                    </a:lnR>
-                    <a:lnT w="12700" cap="flat" cmpd="sng" algn="ctr">
-                      <a:solidFill>
-                        <a:srgbClr val="232F48"/>
-                      </a:solidFill>
-                      <a:prstDash val="solid"/>
-                      <a:round/>
-                      <a:headEnd type="none" w="med" len="med"/>
-                      <a:tailEnd type="none" w="med" len="med"/>
-                    </a:lnT>
-                    <a:lnB w="12700" cap="flat" cmpd="sng" algn="ctr">
-                      <a:solidFill>
-                        <a:srgbClr val="232F48"/>
-                      </a:solidFill>
-                      <a:prstDash val="solid"/>
-                      <a:round/>
-                      <a:headEnd type="none" w="med" len="med"/>
-                      <a:tailEnd type="none" w="med" len="med"/>
-                    </a:lnB>
-                    <a:solidFill>
-                      <a:srgbClr val="1E293B"/>
-                    </a:solidFill>
-                  </a:tcPr>
-                </a:tc>
-                <a:tc>
-                  <a:txBody>
-                    <a:bodyPr/>
-                    <a:lstStyle/>
-                    <a:p>
-                      <a:pPr indent="0" marL="0">
-                        <a:buNone/>
-                      </a:pPr>
-                      <a:r>
-                        <a:rPr lang="en-US" sz="1100" b="1" dirty="0">
-                          <a:solidFill>
-                            <a:srgbClr val="FFFFFF"/>
-                          </a:solidFill>
-                          <a:latin typeface="Arial" pitchFamily="34" charset="0"/>
-                          <a:ea typeface="Arial" pitchFamily="34" charset="-122"/>
-                          <a:cs typeface="Arial" pitchFamily="34" charset="-120"/>
-                        </a:rPr>
-                        <a:t>IssueLift Differentiation</a:t>
-                      </a:r>
-                      <a:endParaRPr lang="en-US" sz="1100" dirty="0">
-                        <a:latin typeface="Arial" charset="0"/>
-                        <a:ea typeface="Arial" charset="0"/>
-                        <a:cs typeface="Arial" charset="0"/>
-                      </a:endParaRPr>
-                    </a:p>
-                  </a:txBody>
-                  <a:tcPr marL="91440" marR="91440" marT="45720" marB="45720">
-                    <a:lnL w="12700" cap="flat" cmpd="sng" algn="ctr">
-                      <a:solidFill>
-                        <a:srgbClr val="232F48"/>
-                      </a:solidFill>
-                      <a:prstDash val="solid"/>
-                      <a:round/>
-                      <a:headEnd type="none" w="med" len="med"/>
-                      <a:tailEnd type="none" w="med" len="med"/>
-                    </a:lnL>
-                    <a:lnR w="12700" cap="flat" cmpd="sng" algn="ctr">
-                      <a:solidFill>
-                        <a:srgbClr val="232F48"/>
-                      </a:solidFill>
-                      <a:prstDash val="solid"/>
-                      <a:round/>
-                      <a:headEnd type="none" w="med" len="med"/>
-                      <a:tailEnd type="none" w="med" len="med"/>
-                    </a:lnR>
-                    <a:lnT w="12700" cap="flat" cmpd="sng" algn="ctr">
-                      <a:solidFill>
-                        <a:srgbClr val="232F48"/>
-                      </a:solidFill>
-                      <a:prstDash val="solid"/>
-                      <a:round/>
-                      <a:headEnd type="none" w="med" len="med"/>
-                      <a:tailEnd type="none" w="med" len="med"/>
-                    </a:lnT>
-                    <a:lnB w="12700" cap="flat" cmpd="sng" algn="ctr">
-                      <a:solidFill>
-                        <a:srgbClr val="232F48"/>
-                      </a:solidFill>
-                      <a:prstDash val="solid"/>
-                      <a:round/>
-                      <a:headEnd type="none" w="med" len="med"/>
-                      <a:tailEnd type="none" w="med" len="med"/>
-                    </a:lnB>
-                    <a:solidFill>
-                      <a:srgbClr val="1E293B"/>
-                    </a:solidFill>
-                  </a:tcPr>
-                </a:tc>
-              </a:tr>
-              <a:tr h="914400">
-                <a:tc>
-                  <a:txBody>
-                    <a:bodyPr/>
-                    <a:lstStyle/>
-                    <a:p>
-                      <a:pPr indent="0" marL="0">
-                        <a:buNone/>
-                      </a:pPr>
-                      <a:r>
-                        <a:rPr lang="en-US" sz="1100" b="1" dirty="0">
-                          <a:solidFill>
-                            <a:srgbClr val="F1F5F9"/>
-                          </a:solidFill>
-                          <a:latin typeface="Arial" pitchFamily="34" charset="0"/>
-                          <a:ea typeface="Arial" pitchFamily="34" charset="-122"/>
-                          <a:cs typeface="Arial" pitchFamily="34" charset="-120"/>
-                        </a:rPr>
-                        <a:t>GoodFirst / IssueScout</a:t>
-                      </a:r>
-                      <a:endParaRPr lang="en-US" sz="1100" dirty="0">
-                        <a:latin typeface="Arial" charset="0"/>
-                        <a:ea typeface="Arial" charset="0"/>
-                        <a:cs typeface="Arial" charset="0"/>
-                      </a:endParaRPr>
-                    </a:p>
-                  </a:txBody>
-                  <a:tcPr marL="91440" marR="91440" marT="45720" marB="45720">
-                    <a:lnL w="12700" cap="flat" cmpd="sng" algn="ctr">
-                      <a:solidFill>
-                        <a:srgbClr val="232F48"/>
-                      </a:solidFill>
-                      <a:prstDash val="solid"/>
-                      <a:round/>
-                      <a:headEnd type="none" w="med" len="med"/>
-                      <a:tailEnd type="none" w="med" len="med"/>
-                    </a:lnL>
-                    <a:lnR w="12700" cap="flat" cmpd="sng" algn="ctr">
-                      <a:solidFill>
-                        <a:srgbClr val="232F48"/>
-                      </a:solidFill>
-                      <a:prstDash val="solid"/>
-                      <a:round/>
-                      <a:headEnd type="none" w="med" len="med"/>
-                      <a:tailEnd type="none" w="med" len="med"/>
-                    </a:lnR>
-                    <a:lnT w="12700" cap="flat" cmpd="sng" algn="ctr">
-                      <a:solidFill>
-                        <a:srgbClr val="232F48"/>
-                      </a:solidFill>
-                      <a:prstDash val="solid"/>
-                      <a:round/>
-                      <a:headEnd type="none" w="med" len="med"/>
-                      <a:tailEnd type="none" w="med" len="med"/>
-                    </a:lnT>
-                    <a:lnB w="12700" cap="flat" cmpd="sng" algn="ctr">
-                      <a:solidFill>
-                        <a:srgbClr val="232F48"/>
-                      </a:solidFill>
-                      <a:prstDash val="solid"/>
-                      <a:round/>
-                      <a:headEnd type="none" w="med" len="med"/>
-                      <a:tailEnd type="none" w="med" len="med"/>
-                    </a:lnB>
-                    <a:solidFill>
-                      <a:srgbClr val="121A2B"/>
-                    </a:solidFill>
-                  </a:tcPr>
-                </a:tc>
-                <a:tc>
-                  <a:txBody>
-                    <a:bodyPr/>
-                    <a:lstStyle/>
-                    <a:p>
-                      <a:pPr indent="0" marL="0">
-                        <a:buNone/>
-                      </a:pPr>
-                      <a:r>
-                        <a:rPr lang="en-US" sz="1100" dirty="0">
-                          <a:solidFill>
-                            <a:srgbClr val="F1F5F9"/>
-                          </a:solidFill>
-                          <a:latin typeface="Arial" pitchFamily="34" charset="0"/>
-                          <a:ea typeface="Arial" pitchFamily="34" charset="-122"/>
-                          <a:cs typeface="Arial" pitchFamily="34" charset="-120"/>
-                        </a:rPr>
-                        <a:t>Issue discovery, beginner issue pickers, difficulty tags.</a:t>
-                      </a:r>
-                      <a:endParaRPr lang="en-US" sz="1100" dirty="0">
-                        <a:latin typeface="Arial" charset="0"/>
-                        <a:ea typeface="Arial" charset="0"/>
-                        <a:cs typeface="Arial" charset="0"/>
-                      </a:endParaRPr>
-                    </a:p>
-                  </a:txBody>
-                  <a:tcPr marL="91440" marR="91440" marT="45720" marB="45720">
-                    <a:lnL w="12700" cap="flat" cmpd="sng" algn="ctr">
-                      <a:solidFill>
-                        <a:srgbClr val="232F48"/>
-                      </a:solidFill>
-                      <a:prstDash val="solid"/>
-                      <a:round/>
-                      <a:headEnd type="none" w="med" len="med"/>
-                      <a:tailEnd type="none" w="med" len="med"/>
-                    </a:lnL>
-                    <a:lnR w="12700" cap="flat" cmpd="sng" algn="ctr">
-                      <a:solidFill>
-                        <a:srgbClr val="232F48"/>
-                      </a:solidFill>
-                      <a:prstDash val="solid"/>
-                      <a:round/>
-                      <a:headEnd type="none" w="med" len="med"/>
-                      <a:tailEnd type="none" w="med" len="med"/>
-                    </a:lnR>
-                    <a:lnT w="12700" cap="flat" cmpd="sng" algn="ctr">
-                      <a:solidFill>
-                        <a:srgbClr val="232F48"/>
-                      </a:solidFill>
-                      <a:prstDash val="solid"/>
-                      <a:round/>
-                      <a:headEnd type="none" w="med" len="med"/>
-                      <a:tailEnd type="none" w="med" len="med"/>
-                    </a:lnT>
-                    <a:lnB w="12700" cap="flat" cmpd="sng" algn="ctr">
-                      <a:solidFill>
-                        <a:srgbClr val="232F48"/>
-                      </a:solidFill>
-                      <a:prstDash val="solid"/>
-                      <a:round/>
-                      <a:headEnd type="none" w="med" len="med"/>
-                      <a:tailEnd type="none" w="med" len="med"/>
-                    </a:lnB>
-                    <a:solidFill>
-                      <a:srgbClr val="121A2B"/>
-                    </a:solidFill>
-                  </a:tcPr>
-                </a:tc>
-                <a:tc>
-                  <a:txBody>
-                    <a:bodyPr/>
-                    <a:lstStyle/>
-                    <a:p>
-                      <a:pPr indent="0" marL="0">
-                        <a:buNone/>
-                      </a:pPr>
-                      <a:r>
-                        <a:rPr lang="en-US" sz="1100" dirty="0">
-                          <a:solidFill>
-                            <a:srgbClr val="F1F5F9"/>
-                          </a:solidFill>
-                          <a:latin typeface="Arial" pitchFamily="34" charset="0"/>
-                          <a:ea typeface="Arial" pitchFamily="34" charset="-122"/>
-                          <a:cs typeface="Arial" pitchFamily="34" charset="-120"/>
-                        </a:rPr>
-                        <a:t>Do not build another issue directory or generic difficulty score.</a:t>
-                      </a:r>
-                      <a:endParaRPr lang="en-US" sz="1100" dirty="0">
-                        <a:latin typeface="Arial" charset="0"/>
-                        <a:ea typeface="Arial" charset="0"/>
-                        <a:cs typeface="Arial" charset="0"/>
-                      </a:endParaRPr>
-                    </a:p>
-                  </a:txBody>
-                  <a:tcPr marL="91440" marR="91440" marT="45720" marB="45720">
-                    <a:lnL w="12700" cap="flat" cmpd="sng" algn="ctr">
-                      <a:solidFill>
-                        <a:srgbClr val="232F48"/>
-                      </a:solidFill>
-                      <a:prstDash val="solid"/>
-                      <a:round/>
-                      <a:headEnd type="none" w="med" len="med"/>
-                      <a:tailEnd type="none" w="med" len="med"/>
-                    </a:lnL>
-                    <a:lnR w="12700" cap="flat" cmpd="sng" algn="ctr">
-                      <a:solidFill>
-                        <a:srgbClr val="232F48"/>
-                      </a:solidFill>
-                      <a:prstDash val="solid"/>
-                      <a:round/>
-                      <a:headEnd type="none" w="med" len="med"/>
-                      <a:tailEnd type="none" w="med" len="med"/>
-                    </a:lnR>
-                    <a:lnT w="12700" cap="flat" cmpd="sng" algn="ctr">
-                      <a:solidFill>
-                        <a:srgbClr val="232F48"/>
-                      </a:solidFill>
-                      <a:prstDash val="solid"/>
-                      <a:round/>
-                      <a:headEnd type="none" w="med" len="med"/>
-                      <a:tailEnd type="none" w="med" len="med"/>
-                    </a:lnT>
-                    <a:lnB w="12700" cap="flat" cmpd="sng" algn="ctr">
-                      <a:solidFill>
-                        <a:srgbClr val="232F48"/>
-                      </a:solidFill>
-                      <a:prstDash val="solid"/>
-                      <a:round/>
-                      <a:headEnd type="none" w="med" len="med"/>
-                      <a:tailEnd type="none" w="med" len="med"/>
-                    </a:lnB>
-                    <a:solidFill>
-                      <a:srgbClr val="121A2B"/>
-                    </a:solidFill>
-                  </a:tcPr>
-                </a:tc>
-                <a:tc>
-                  <a:txBody>
-                    <a:bodyPr/>
-                    <a:lstStyle/>
-                    <a:p>
-                      <a:pPr indent="0" marL="0">
-                        <a:buNone/>
-                      </a:pPr>
-                      <a:r>
-                        <a:rPr lang="en-US" sz="1100" dirty="0">
-                          <a:solidFill>
-                            <a:srgbClr val="F1F5F9"/>
-                          </a:solidFill>
-                          <a:latin typeface="Arial" pitchFamily="34" charset="0"/>
-                          <a:ea typeface="Arial" pitchFamily="34" charset="-122"/>
-                          <a:cs typeface="Arial" pitchFamily="34" charset="-120"/>
-                        </a:rPr>
-                        <a:t>Starts AFTER the issue is picked; defines contract before code edits.</a:t>
-                      </a:r>
-                      <a:endParaRPr lang="en-US" sz="1100" dirty="0">
-                        <a:latin typeface="Arial" charset="0"/>
-                        <a:ea typeface="Arial" charset="0"/>
-                        <a:cs typeface="Arial" charset="0"/>
-                      </a:endParaRPr>
-                    </a:p>
-                  </a:txBody>
-                  <a:tcPr marL="91440" marR="91440" marT="45720" marB="45720">
-                    <a:lnL w="12700" cap="flat" cmpd="sng" algn="ctr">
-                      <a:solidFill>
-                        <a:srgbClr val="232F48"/>
-                      </a:solidFill>
-                      <a:prstDash val="solid"/>
-                      <a:round/>
-                      <a:headEnd type="none" w="med" len="med"/>
-                      <a:tailEnd type="none" w="med" len="med"/>
-                    </a:lnL>
-                    <a:lnR w="12700" cap="flat" cmpd="sng" algn="ctr">
-                      <a:solidFill>
-                        <a:srgbClr val="232F48"/>
-                      </a:solidFill>
-                      <a:prstDash val="solid"/>
-                      <a:round/>
-                      <a:headEnd type="none" w="med" len="med"/>
-                      <a:tailEnd type="none" w="med" len="med"/>
-                    </a:lnR>
-                    <a:lnT w="12700" cap="flat" cmpd="sng" algn="ctr">
-                      <a:solidFill>
-                        <a:srgbClr val="232F48"/>
-                      </a:solidFill>
-                      <a:prstDash val="solid"/>
-                      <a:round/>
-                      <a:headEnd type="none" w="med" len="med"/>
-                      <a:tailEnd type="none" w="med" len="med"/>
-                    </a:lnT>
-                    <a:lnB w="12700" cap="flat" cmpd="sng" algn="ctr">
-                      <a:solidFill>
-                        <a:srgbClr val="232F48"/>
-                      </a:solidFill>
-                      <a:prstDash val="solid"/>
-                      <a:round/>
-                      <a:headEnd type="none" w="med" len="med"/>
-                      <a:tailEnd type="none" w="med" len="med"/>
-                    </a:lnB>
-                    <a:solidFill>
-                      <a:srgbClr val="121A2B"/>
-                    </a:solidFill>
-                  </a:tcPr>
-                </a:tc>
-              </a:tr>
-              <a:tr h="914400">
-                <a:tc>
-                  <a:txBody>
-                    <a:bodyPr/>
-                    <a:lstStyle/>
-                    <a:p>
-                      <a:pPr indent="0" marL="0">
-                        <a:buNone/>
-                      </a:pPr>
-                      <a:r>
-                        <a:rPr lang="en-US" sz="1100" b="1" dirty="0">
-                          <a:solidFill>
-                            <a:srgbClr val="F1F5F9"/>
-                          </a:solidFill>
-                          <a:latin typeface="Arial" pitchFamily="34" charset="0"/>
-                          <a:ea typeface="Arial" pitchFamily="34" charset="-122"/>
-                          <a:cs typeface="Arial" pitchFamily="34" charset="-120"/>
-                        </a:rPr>
-                        <a:t>Ossistant</a:t>
-                      </a:r>
-                      <a:endParaRPr lang="en-US" sz="1100" dirty="0">
-                        <a:latin typeface="Arial" charset="0"/>
-                        <a:ea typeface="Arial" charset="0"/>
-                        <a:cs typeface="Arial" charset="0"/>
-                      </a:endParaRPr>
-                    </a:p>
-                  </a:txBody>
-                  <a:tcPr marL="91440" marR="91440" marT="45720" marB="45720">
-                    <a:lnL w="12700" cap="flat" cmpd="sng" algn="ctr">
-                      <a:solidFill>
-                        <a:srgbClr val="232F48"/>
-                      </a:solidFill>
-                      <a:prstDash val="solid"/>
-                      <a:round/>
-                      <a:headEnd type="none" w="med" len="med"/>
-                      <a:tailEnd type="none" w="med" len="med"/>
-                    </a:lnL>
-                    <a:lnR w="12700" cap="flat" cmpd="sng" algn="ctr">
-                      <a:solidFill>
-                        <a:srgbClr val="232F48"/>
-                      </a:solidFill>
-                      <a:prstDash val="solid"/>
-                      <a:round/>
-                      <a:headEnd type="none" w="med" len="med"/>
-                      <a:tailEnd type="none" w="med" len="med"/>
-                    </a:lnR>
-                    <a:lnT w="12700" cap="flat" cmpd="sng" algn="ctr">
-                      <a:solidFill>
-                        <a:srgbClr val="232F48"/>
-                      </a:solidFill>
-                      <a:prstDash val="solid"/>
-                      <a:round/>
-                      <a:headEnd type="none" w="med" len="med"/>
-                      <a:tailEnd type="none" w="med" len="med"/>
-                    </a:lnT>
-                    <a:lnB w="12700" cap="flat" cmpd="sng" algn="ctr">
-                      <a:solidFill>
-                        <a:srgbClr val="232F48"/>
-                      </a:solidFill>
-                      <a:prstDash val="solid"/>
-                      <a:round/>
-                      <a:headEnd type="none" w="med" len="med"/>
-                      <a:tailEnd type="none" w="med" len="med"/>
-                    </a:lnB>
-                    <a:solidFill>
-                      <a:srgbClr val="121A2B"/>
-                    </a:solidFill>
-                  </a:tcPr>
-                </a:tc>
-                <a:tc>
-                  <a:txBody>
-                    <a:bodyPr/>
-                    <a:lstStyle/>
-                    <a:p>
-                      <a:pPr indent="0" marL="0">
-                        <a:buNone/>
-                      </a:pPr>
-                      <a:r>
-                        <a:rPr lang="en-US" sz="1100" dirty="0">
-                          <a:solidFill>
-                            <a:srgbClr val="F1F5F9"/>
-                          </a:solidFill>
-                          <a:latin typeface="Arial" pitchFamily="34" charset="0"/>
-                          <a:ea typeface="Arial" pitchFamily="34" charset="-122"/>
-                          <a:cs typeface="Arial" pitchFamily="34" charset="-120"/>
-                        </a:rPr>
-                        <a:t>Repo chatbot, general explanation of open source programs.</a:t>
-                      </a:r>
-                      <a:endParaRPr lang="en-US" sz="1100" dirty="0">
-                        <a:latin typeface="Arial" charset="0"/>
-                        <a:ea typeface="Arial" charset="0"/>
-                        <a:cs typeface="Arial" charset="0"/>
-                      </a:endParaRPr>
-                    </a:p>
-                  </a:txBody>
-                  <a:tcPr marL="91440" marR="91440" marT="45720" marB="45720">
-                    <a:lnL w="12700" cap="flat" cmpd="sng" algn="ctr">
-                      <a:solidFill>
-                        <a:srgbClr val="232F48"/>
-                      </a:solidFill>
-                      <a:prstDash val="solid"/>
-                      <a:round/>
-                      <a:headEnd type="none" w="med" len="med"/>
-                      <a:tailEnd type="none" w="med" len="med"/>
-                    </a:lnL>
-                    <a:lnR w="12700" cap="flat" cmpd="sng" algn="ctr">
-                      <a:solidFill>
-                        <a:srgbClr val="232F48"/>
-                      </a:solidFill>
-                      <a:prstDash val="solid"/>
-                      <a:round/>
-                      <a:headEnd type="none" w="med" len="med"/>
-                      <a:tailEnd type="none" w="med" len="med"/>
-                    </a:lnR>
-                    <a:lnT w="12700" cap="flat" cmpd="sng" algn="ctr">
-                      <a:solidFill>
-                        <a:srgbClr val="232F48"/>
-                      </a:solidFill>
-                      <a:prstDash val="solid"/>
-                      <a:round/>
-                      <a:headEnd type="none" w="med" len="med"/>
-                      <a:tailEnd type="none" w="med" len="med"/>
-                    </a:lnT>
-                    <a:lnB w="12700" cap="flat" cmpd="sng" algn="ctr">
-                      <a:solidFill>
-                        <a:srgbClr val="232F48"/>
-                      </a:solidFill>
-                      <a:prstDash val="solid"/>
-                      <a:round/>
-                      <a:headEnd type="none" w="med" len="med"/>
-                      <a:tailEnd type="none" w="med" len="med"/>
-                    </a:lnB>
-                    <a:solidFill>
-                      <a:srgbClr val="121A2B"/>
-                    </a:solidFill>
-                  </a:tcPr>
-                </a:tc>
-                <a:tc>
-                  <a:txBody>
-                    <a:bodyPr/>
-                    <a:lstStyle/>
-                    <a:p>
-                      <a:pPr indent="0" marL="0">
-                        <a:buNone/>
-                      </a:pPr>
-                      <a:r>
-                        <a:rPr lang="en-US" sz="1100" dirty="0">
-                          <a:solidFill>
-                            <a:srgbClr val="F1F5F9"/>
-                          </a:solidFill>
-                          <a:latin typeface="Arial" pitchFamily="34" charset="0"/>
-                          <a:ea typeface="Arial" pitchFamily="34" charset="-122"/>
-                          <a:cs typeface="Arial" pitchFamily="34" charset="-120"/>
-                        </a:rPr>
-                        <a:t>Do not build a conversational chat assistant.</a:t>
-                      </a:r>
-                      <a:endParaRPr lang="en-US" sz="1100" dirty="0">
-                        <a:latin typeface="Arial" charset="0"/>
-                        <a:ea typeface="Arial" charset="0"/>
-                        <a:cs typeface="Arial" charset="0"/>
-                      </a:endParaRPr>
-                    </a:p>
-                  </a:txBody>
-                  <a:tcPr marL="91440" marR="91440" marT="45720" marB="45720">
-                    <a:lnL w="12700" cap="flat" cmpd="sng" algn="ctr">
-                      <a:solidFill>
-                        <a:srgbClr val="232F48"/>
-                      </a:solidFill>
-                      <a:prstDash val="solid"/>
-                      <a:round/>
-                      <a:headEnd type="none" w="med" len="med"/>
-                      <a:tailEnd type="none" w="med" len="med"/>
-                    </a:lnL>
-                    <a:lnR w="12700" cap="flat" cmpd="sng" algn="ctr">
-                      <a:solidFill>
-                        <a:srgbClr val="232F48"/>
-                      </a:solidFill>
-                      <a:prstDash val="solid"/>
-                      <a:round/>
-                      <a:headEnd type="none" w="med" len="med"/>
-                      <a:tailEnd type="none" w="med" len="med"/>
-                    </a:lnR>
-                    <a:lnT w="12700" cap="flat" cmpd="sng" algn="ctr">
-                      <a:solidFill>
-                        <a:srgbClr val="232F48"/>
-                      </a:solidFill>
-                      <a:prstDash val="solid"/>
-                      <a:round/>
-                      <a:headEnd type="none" w="med" len="med"/>
-                      <a:tailEnd type="none" w="med" len="med"/>
-                    </a:lnT>
-                    <a:lnB w="12700" cap="flat" cmpd="sng" algn="ctr">
-                      <a:solidFill>
-                        <a:srgbClr val="232F48"/>
-                      </a:solidFill>
-                      <a:prstDash val="solid"/>
-                      <a:round/>
-                      <a:headEnd type="none" w="med" len="med"/>
-                      <a:tailEnd type="none" w="med" len="med"/>
-                    </a:lnB>
-                    <a:solidFill>
-                      <a:srgbClr val="121A2B"/>
-                    </a:solidFill>
-                  </a:tcPr>
-                </a:tc>
-                <a:tc>
-                  <a:txBody>
-                    <a:bodyPr/>
-                    <a:lstStyle/>
-                    <a:p>
-                      <a:pPr indent="0" marL="0">
-                        <a:buNone/>
-                      </a:pPr>
-                      <a:r>
-                        <a:rPr lang="en-US" sz="1100" dirty="0">
-                          <a:solidFill>
-                            <a:srgbClr val="F1F5F9"/>
-                          </a:solidFill>
-                          <a:latin typeface="Arial" pitchFamily="34" charset="0"/>
-                          <a:ea typeface="Arial" pitchFamily="34" charset="-122"/>
-                          <a:cs typeface="Arial" pitchFamily="34" charset="-120"/>
-                        </a:rPr>
-                        <a:t>Deterministic, structured, exportable Proof Bundle artifacts.</a:t>
-                      </a:r>
-                      <a:endParaRPr lang="en-US" sz="1100" dirty="0">
-                        <a:latin typeface="Arial" charset="0"/>
-                        <a:ea typeface="Arial" charset="0"/>
-                        <a:cs typeface="Arial" charset="0"/>
-                      </a:endParaRPr>
-                    </a:p>
-                  </a:txBody>
-                  <a:tcPr marL="91440" marR="91440" marT="45720" marB="45720">
-                    <a:lnL w="12700" cap="flat" cmpd="sng" algn="ctr">
-                      <a:solidFill>
-                        <a:srgbClr val="232F48"/>
-                      </a:solidFill>
-                      <a:prstDash val="solid"/>
-                      <a:round/>
-                      <a:headEnd type="none" w="med" len="med"/>
-                      <a:tailEnd type="none" w="med" len="med"/>
-                    </a:lnL>
-                    <a:lnR w="12700" cap="flat" cmpd="sng" algn="ctr">
-                      <a:solidFill>
-                        <a:srgbClr val="232F48"/>
-                      </a:solidFill>
-                      <a:prstDash val="solid"/>
-                      <a:round/>
-                      <a:headEnd type="none" w="med" len="med"/>
-                      <a:tailEnd type="none" w="med" len="med"/>
-                    </a:lnR>
-                    <a:lnT w="12700" cap="flat" cmpd="sng" algn="ctr">
-                      <a:solidFill>
-                        <a:srgbClr val="232F48"/>
-                      </a:solidFill>
-                      <a:prstDash val="solid"/>
-                      <a:round/>
-                      <a:headEnd type="none" w="med" len="med"/>
-                      <a:tailEnd type="none" w="med" len="med"/>
-                    </a:lnT>
-                    <a:lnB w="12700" cap="flat" cmpd="sng" algn="ctr">
-                      <a:solidFill>
-                        <a:srgbClr val="232F48"/>
-                      </a:solidFill>
-                      <a:prstDash val="solid"/>
-                      <a:round/>
-                      <a:headEnd type="none" w="med" len="med"/>
-                      <a:tailEnd type="none" w="med" len="med"/>
-                    </a:lnB>
-                    <a:solidFill>
-                      <a:srgbClr val="121A2B"/>
-                    </a:solidFill>
-                  </a:tcPr>
-                </a:tc>
-              </a:tr>
-              <a:tr h="914400">
-                <a:tc>
-                  <a:txBody>
-                    <a:bodyPr/>
-                    <a:lstStyle/>
-                    <a:p>
-                      <a:pPr indent="0" marL="0">
-                        <a:buNone/>
-                      </a:pPr>
-                      <a:r>
-                        <a:rPr lang="en-US" sz="1100" b="1" dirty="0">
-                          <a:solidFill>
-                            <a:srgbClr val="F1F5F9"/>
-                          </a:solidFill>
-                          <a:latin typeface="Arial" pitchFamily="34" charset="0"/>
-                          <a:ea typeface="Arial" pitchFamily="34" charset="-122"/>
-                          <a:cs typeface="Arial" pitchFamily="34" charset="-120"/>
-                        </a:rPr>
-                        <a:t>CodeRabbit</a:t>
-                      </a:r>
-                      <a:endParaRPr lang="en-US" sz="1100" dirty="0">
-                        <a:latin typeface="Arial" charset="0"/>
-                        <a:ea typeface="Arial" charset="0"/>
-                        <a:cs typeface="Arial" charset="0"/>
-                      </a:endParaRPr>
-                    </a:p>
-                  </a:txBody>
-                  <a:tcPr marL="91440" marR="91440" marT="45720" marB="45720">
-                    <a:lnL w="12700" cap="flat" cmpd="sng" algn="ctr">
-                      <a:solidFill>
-                        <a:srgbClr val="232F48"/>
-                      </a:solidFill>
-                      <a:prstDash val="solid"/>
-                      <a:round/>
-                      <a:headEnd type="none" w="med" len="med"/>
-                      <a:tailEnd type="none" w="med" len="med"/>
-                    </a:lnL>
-                    <a:lnR w="12700" cap="flat" cmpd="sng" algn="ctr">
-                      <a:solidFill>
-                        <a:srgbClr val="232F48"/>
-                      </a:solidFill>
-                      <a:prstDash val="solid"/>
-                      <a:round/>
-                      <a:headEnd type="none" w="med" len="med"/>
-                      <a:tailEnd type="none" w="med" len="med"/>
-                    </a:lnR>
-                    <a:lnT w="12700" cap="flat" cmpd="sng" algn="ctr">
-                      <a:solidFill>
-                        <a:srgbClr val="232F48"/>
-                      </a:solidFill>
-                      <a:prstDash val="solid"/>
-                      <a:round/>
-                      <a:headEnd type="none" w="med" len="med"/>
-                      <a:tailEnd type="none" w="med" len="med"/>
-                    </a:lnT>
-                    <a:lnB w="12700" cap="flat" cmpd="sng" algn="ctr">
-                      <a:solidFill>
-                        <a:srgbClr val="232F48"/>
-                      </a:solidFill>
-                      <a:prstDash val="solid"/>
-                      <a:round/>
-                      <a:headEnd type="none" w="med" len="med"/>
-                      <a:tailEnd type="none" w="med" len="med"/>
-                    </a:lnB>
-                    <a:solidFill>
-                      <a:srgbClr val="121A2B"/>
-                    </a:solidFill>
-                  </a:tcPr>
-                </a:tc>
-                <a:tc>
-                  <a:txBody>
-                    <a:bodyPr/>
-                    <a:lstStyle/>
-                    <a:p>
-                      <a:pPr indent="0" marL="0">
-                        <a:buNone/>
-                      </a:pPr>
-                      <a:r>
-                        <a:rPr lang="en-US" sz="1100" dirty="0">
-                          <a:solidFill>
-                            <a:srgbClr val="F1F5F9"/>
-                          </a:solidFill>
-                          <a:latin typeface="Arial" pitchFamily="34" charset="0"/>
-                          <a:ea typeface="Arial" pitchFamily="34" charset="-122"/>
-                          <a:cs typeface="Arial" pitchFamily="34" charset="-120"/>
-                        </a:rPr>
-                        <a:t>Automated post-PR code review and pre-merge checks.</a:t>
-                      </a:r>
-                      <a:endParaRPr lang="en-US" sz="1100" dirty="0">
-                        <a:latin typeface="Arial" charset="0"/>
-                        <a:ea typeface="Arial" charset="0"/>
-                        <a:cs typeface="Arial" charset="0"/>
-                      </a:endParaRPr>
-                    </a:p>
-                  </a:txBody>
-                  <a:tcPr marL="91440" marR="91440" marT="45720" marB="45720">
-                    <a:lnL w="12700" cap="flat" cmpd="sng" algn="ctr">
-                      <a:solidFill>
-                        <a:srgbClr val="232F48"/>
-                      </a:solidFill>
-                      <a:prstDash val="solid"/>
-                      <a:round/>
-                      <a:headEnd type="none" w="med" len="med"/>
-                      <a:tailEnd type="none" w="med" len="med"/>
-                    </a:lnL>
-                    <a:lnR w="12700" cap="flat" cmpd="sng" algn="ctr">
-                      <a:solidFill>
-                        <a:srgbClr val="232F48"/>
-                      </a:solidFill>
-                      <a:prstDash val="solid"/>
-                      <a:round/>
-                      <a:headEnd type="none" w="med" len="med"/>
-                      <a:tailEnd type="none" w="med" len="med"/>
-                    </a:lnR>
-                    <a:lnT w="12700" cap="flat" cmpd="sng" algn="ctr">
-                      <a:solidFill>
-                        <a:srgbClr val="232F48"/>
-                      </a:solidFill>
-                      <a:prstDash val="solid"/>
-                      <a:round/>
-                      <a:headEnd type="none" w="med" len="med"/>
-                      <a:tailEnd type="none" w="med" len="med"/>
-                    </a:lnT>
-                    <a:lnB w="12700" cap="flat" cmpd="sng" algn="ctr">
-                      <a:solidFill>
-                        <a:srgbClr val="232F48"/>
-                      </a:solidFill>
-                      <a:prstDash val="solid"/>
-                      <a:round/>
-                      <a:headEnd type="none" w="med" len="med"/>
-                      <a:tailEnd type="none" w="med" len="med"/>
-                    </a:lnB>
-                    <a:solidFill>
-                      <a:srgbClr val="121A2B"/>
-                    </a:solidFill>
-                  </a:tcPr>
-                </a:tc>
-                <a:tc>
-                  <a:txBody>
-                    <a:bodyPr/>
-                    <a:lstStyle/>
-                    <a:p>
-                      <a:pPr indent="0" marL="0">
-                        <a:buNone/>
-                      </a:pPr>
-                      <a:r>
-                        <a:rPr lang="en-US" sz="1100" dirty="0">
-                          <a:solidFill>
-                            <a:srgbClr val="F1F5F9"/>
-                          </a:solidFill>
-                          <a:latin typeface="Arial" pitchFamily="34" charset="0"/>
-                          <a:ea typeface="Arial" pitchFamily="34" charset="-122"/>
-                          <a:cs typeface="Arial" pitchFamily="34" charset="-120"/>
-                        </a:rPr>
-                        <a:t>Do not build post-PR code review.</a:t>
-                      </a:r>
-                      <a:endParaRPr lang="en-US" sz="1100" dirty="0">
-                        <a:latin typeface="Arial" charset="0"/>
-                        <a:ea typeface="Arial" charset="0"/>
-                        <a:cs typeface="Arial" charset="0"/>
-                      </a:endParaRPr>
-                    </a:p>
-                  </a:txBody>
-                  <a:tcPr marL="91440" marR="91440" marT="45720" marB="45720">
-                    <a:lnL w="12700" cap="flat" cmpd="sng" algn="ctr">
-                      <a:solidFill>
-                        <a:srgbClr val="232F48"/>
-                      </a:solidFill>
-                      <a:prstDash val="solid"/>
-                      <a:round/>
-                      <a:headEnd type="none" w="med" len="med"/>
-                      <a:tailEnd type="none" w="med" len="med"/>
-                    </a:lnL>
-                    <a:lnR w="12700" cap="flat" cmpd="sng" algn="ctr">
-                      <a:solidFill>
-                        <a:srgbClr val="232F48"/>
-                      </a:solidFill>
-                      <a:prstDash val="solid"/>
-                      <a:round/>
-                      <a:headEnd type="none" w="med" len="med"/>
-                      <a:tailEnd type="none" w="med" len="med"/>
-                    </a:lnR>
-                    <a:lnT w="12700" cap="flat" cmpd="sng" algn="ctr">
-                      <a:solidFill>
-                        <a:srgbClr val="232F48"/>
-                      </a:solidFill>
-                      <a:prstDash val="solid"/>
-                      <a:round/>
-                      <a:headEnd type="none" w="med" len="med"/>
-                      <a:tailEnd type="none" w="med" len="med"/>
-                    </a:lnT>
-                    <a:lnB w="12700" cap="flat" cmpd="sng" algn="ctr">
-                      <a:solidFill>
-                        <a:srgbClr val="232F48"/>
-                      </a:solidFill>
-                      <a:prstDash val="solid"/>
-                      <a:round/>
-                      <a:headEnd type="none" w="med" len="med"/>
-                      <a:tailEnd type="none" w="med" len="med"/>
-                    </a:lnB>
-                    <a:solidFill>
-                      <a:srgbClr val="121A2B"/>
-                    </a:solidFill>
-                  </a:tcPr>
-                </a:tc>
-                <a:tc>
-                  <a:txBody>
-                    <a:bodyPr/>
-                    <a:lstStyle/>
-                    <a:p>
-                      <a:pPr indent="0" marL="0">
-                        <a:buNone/>
-                      </a:pPr>
-                      <a:r>
-                        <a:rPr lang="en-US" sz="1100" dirty="0">
-                          <a:solidFill>
-                            <a:srgbClr val="F1F5F9"/>
-                          </a:solidFill>
-                          <a:latin typeface="Arial" pitchFamily="34" charset="0"/>
-                          <a:ea typeface="Arial" pitchFamily="34" charset="-122"/>
-                          <a:cs typeface="Arial" pitchFamily="34" charset="-120"/>
-                        </a:rPr>
-                        <a:t>Pre-PR clarification: align on "done" before submitting PRs.</a:t>
-                      </a:r>
-                      <a:endParaRPr lang="en-US" sz="1100" dirty="0">
-                        <a:latin typeface="Arial" charset="0"/>
-                        <a:ea typeface="Arial" charset="0"/>
-                        <a:cs typeface="Arial" charset="0"/>
-                      </a:endParaRPr>
-                    </a:p>
-                  </a:txBody>
-                  <a:tcPr marL="91440" marR="91440" marT="45720" marB="45720">
-                    <a:lnL w="12700" cap="flat" cmpd="sng" algn="ctr">
-                      <a:solidFill>
-                        <a:srgbClr val="232F48"/>
-                      </a:solidFill>
-                      <a:prstDash val="solid"/>
-                      <a:round/>
-                      <a:headEnd type="none" w="med" len="med"/>
-                      <a:tailEnd type="none" w="med" len="med"/>
-                    </a:lnL>
-                    <a:lnR w="12700" cap="flat" cmpd="sng" algn="ctr">
-                      <a:solidFill>
-                        <a:srgbClr val="232F48"/>
-                      </a:solidFill>
-                      <a:prstDash val="solid"/>
-                      <a:round/>
-                      <a:headEnd type="none" w="med" len="med"/>
-                      <a:tailEnd type="none" w="med" len="med"/>
-                    </a:lnR>
-                    <a:lnT w="12700" cap="flat" cmpd="sng" algn="ctr">
-                      <a:solidFill>
-                        <a:srgbClr val="232F48"/>
-                      </a:solidFill>
-                      <a:prstDash val="solid"/>
-                      <a:round/>
-                      <a:headEnd type="none" w="med" len="med"/>
-                      <a:tailEnd type="none" w="med" len="med"/>
-                    </a:lnT>
-                    <a:lnB w="12700" cap="flat" cmpd="sng" algn="ctr">
-                      <a:solidFill>
-                        <a:srgbClr val="232F48"/>
-                      </a:solidFill>
-                      <a:prstDash val="solid"/>
-                      <a:round/>
-                      <a:headEnd type="none" w="med" len="med"/>
-                      <a:tailEnd type="none" w="med" len="med"/>
-                    </a:lnB>
-                    <a:solidFill>
-                      <a:srgbClr val="121A2B"/>
-                    </a:solidFill>
-                  </a:tcPr>
-                </a:tc>
-              </a:tr>
-              <a:tr h="914400">
-                <a:tc>
-                  <a:txBody>
-                    <a:bodyPr/>
-                    <a:lstStyle/>
-                    <a:p>
-                      <a:pPr indent="0" marL="0">
-                        <a:buNone/>
-                      </a:pPr>
-                      <a:r>
-                        <a:rPr lang="en-US" sz="1100" b="1" dirty="0">
-                          <a:solidFill>
-                            <a:srgbClr val="F1F5F9"/>
-                          </a:solidFill>
-                          <a:latin typeface="Arial" pitchFamily="34" charset="0"/>
-                          <a:ea typeface="Arial" pitchFamily="34" charset="-122"/>
-                          <a:cs typeface="Arial" pitchFamily="34" charset="-120"/>
-                        </a:rPr>
-                        <a:t>GitHub Copilot / SWE-agent</a:t>
-                      </a:r>
-                      <a:endParaRPr lang="en-US" sz="1100" dirty="0">
-                        <a:latin typeface="Arial" charset="0"/>
-                        <a:ea typeface="Arial" charset="0"/>
-                        <a:cs typeface="Arial" charset="0"/>
-                      </a:endParaRPr>
-                    </a:p>
-                  </a:txBody>
-                  <a:tcPr marL="91440" marR="91440" marT="45720" marB="45720">
-                    <a:lnL w="12700" cap="flat" cmpd="sng" algn="ctr">
-                      <a:solidFill>
-                        <a:srgbClr val="232F48"/>
-                      </a:solidFill>
-                      <a:prstDash val="solid"/>
-                      <a:round/>
-                      <a:headEnd type="none" w="med" len="med"/>
-                      <a:tailEnd type="none" w="med" len="med"/>
-                    </a:lnL>
-                    <a:lnR w="12700" cap="flat" cmpd="sng" algn="ctr">
-                      <a:solidFill>
-                        <a:srgbClr val="232F48"/>
-                      </a:solidFill>
-                      <a:prstDash val="solid"/>
-                      <a:round/>
-                      <a:headEnd type="none" w="med" len="med"/>
-                      <a:tailEnd type="none" w="med" len="med"/>
-                    </a:lnR>
-                    <a:lnT w="12700" cap="flat" cmpd="sng" algn="ctr">
-                      <a:solidFill>
-                        <a:srgbClr val="232F48"/>
-                      </a:solidFill>
-                      <a:prstDash val="solid"/>
-                      <a:round/>
-                      <a:headEnd type="none" w="med" len="med"/>
-                      <a:tailEnd type="none" w="med" len="med"/>
-                    </a:lnT>
-                    <a:lnB w="12700" cap="flat" cmpd="sng" algn="ctr">
-                      <a:solidFill>
-                        <a:srgbClr val="232F48"/>
-                      </a:solidFill>
-                      <a:prstDash val="solid"/>
-                      <a:round/>
-                      <a:headEnd type="none" w="med" len="med"/>
-                      <a:tailEnd type="none" w="med" len="med"/>
-                    </a:lnB>
-                    <a:solidFill>
-                      <a:srgbClr val="121A2B"/>
-                    </a:solidFill>
-                  </a:tcPr>
-                </a:tc>
-                <a:tc>
-                  <a:txBody>
-                    <a:bodyPr/>
-                    <a:lstStyle/>
-                    <a:p>
-                      <a:pPr indent="0" marL="0">
-                        <a:buNone/>
-                      </a:pPr>
-                      <a:r>
-                        <a:rPr lang="en-US" sz="1100" dirty="0">
-                          <a:solidFill>
-                            <a:srgbClr val="F1F5F9"/>
-                          </a:solidFill>
-                          <a:latin typeface="Arial" pitchFamily="34" charset="0"/>
-                          <a:ea typeface="Arial" pitchFamily="34" charset="-122"/>
-                          <a:cs typeface="Arial" pitchFamily="34" charset="-120"/>
-                        </a:rPr>
-                        <a:t>Autonomous coding agents creating automated pull requests.</a:t>
-                      </a:r>
-                      <a:endParaRPr lang="en-US" sz="1100" dirty="0">
-                        <a:latin typeface="Arial" charset="0"/>
-                        <a:ea typeface="Arial" charset="0"/>
-                        <a:cs typeface="Arial" charset="0"/>
-                      </a:endParaRPr>
-                    </a:p>
-                  </a:txBody>
-                  <a:tcPr marL="91440" marR="91440" marT="45720" marB="45720">
-                    <a:lnL w="12700" cap="flat" cmpd="sng" algn="ctr">
-                      <a:solidFill>
-                        <a:srgbClr val="232F48"/>
-                      </a:solidFill>
-                      <a:prstDash val="solid"/>
-                      <a:round/>
-                      <a:headEnd type="none" w="med" len="med"/>
-                      <a:tailEnd type="none" w="med" len="med"/>
-                    </a:lnL>
-                    <a:lnR w="12700" cap="flat" cmpd="sng" algn="ctr">
-                      <a:solidFill>
-                        <a:srgbClr val="232F48"/>
-                      </a:solidFill>
-                      <a:prstDash val="solid"/>
-                      <a:round/>
-                      <a:headEnd type="none" w="med" len="med"/>
-                      <a:tailEnd type="none" w="med" len="med"/>
-                    </a:lnR>
-                    <a:lnT w="12700" cap="flat" cmpd="sng" algn="ctr">
-                      <a:solidFill>
-                        <a:srgbClr val="232F48"/>
-                      </a:solidFill>
-                      <a:prstDash val="solid"/>
-                      <a:round/>
-                      <a:headEnd type="none" w="med" len="med"/>
-                      <a:tailEnd type="none" w="med" len="med"/>
-                    </a:lnT>
-                    <a:lnB w="12700" cap="flat" cmpd="sng" algn="ctr">
-                      <a:solidFill>
-                        <a:srgbClr val="232F48"/>
-                      </a:solidFill>
-                      <a:prstDash val="solid"/>
-                      <a:round/>
-                      <a:headEnd type="none" w="med" len="med"/>
-                      <a:tailEnd type="none" w="med" len="med"/>
-                    </a:lnB>
-                    <a:solidFill>
-                      <a:srgbClr val="121A2B"/>
-                    </a:solidFill>
-                  </a:tcPr>
-                </a:tc>
-                <a:tc>
-                  <a:txBody>
-                    <a:bodyPr/>
-                    <a:lstStyle/>
-                    <a:p>
-                      <a:pPr indent="0" marL="0">
-                        <a:buNone/>
-                      </a:pPr>
-                      <a:r>
-                        <a:rPr lang="en-US" sz="1100" dirty="0">
-                          <a:solidFill>
-                            <a:srgbClr val="F1F5F9"/>
-                          </a:solidFill>
-                          <a:latin typeface="Arial" pitchFamily="34" charset="0"/>
-                          <a:ea typeface="Arial" pitchFamily="34" charset="-122"/>
-                          <a:cs typeface="Arial" pitchFamily="34" charset="-120"/>
-                        </a:rPr>
-                        <a:t>Do not compete as an autonomous patch agent.</a:t>
-                      </a:r>
-                      <a:endParaRPr lang="en-US" sz="1100" dirty="0">
-                        <a:latin typeface="Arial" charset="0"/>
-                        <a:ea typeface="Arial" charset="0"/>
-                        <a:cs typeface="Arial" charset="0"/>
-                      </a:endParaRPr>
-                    </a:p>
-                  </a:txBody>
-                  <a:tcPr marL="91440" marR="91440" marT="45720" marB="45720">
-                    <a:lnL w="12700" cap="flat" cmpd="sng" algn="ctr">
-                      <a:solidFill>
-                        <a:srgbClr val="232F48"/>
-                      </a:solidFill>
-                      <a:prstDash val="solid"/>
-                      <a:round/>
-                      <a:headEnd type="none" w="med" len="med"/>
-                      <a:tailEnd type="none" w="med" len="med"/>
-                    </a:lnL>
-                    <a:lnR w="12700" cap="flat" cmpd="sng" algn="ctr">
-                      <a:solidFill>
-                        <a:srgbClr val="232F48"/>
-                      </a:solidFill>
-                      <a:prstDash val="solid"/>
-                      <a:round/>
-                      <a:headEnd type="none" w="med" len="med"/>
-                      <a:tailEnd type="none" w="med" len="med"/>
-                    </a:lnR>
-                    <a:lnT w="12700" cap="flat" cmpd="sng" algn="ctr">
-                      <a:solidFill>
-                        <a:srgbClr val="232F48"/>
-                      </a:solidFill>
-                      <a:prstDash val="solid"/>
-                      <a:round/>
-                      <a:headEnd type="none" w="med" len="med"/>
-                      <a:tailEnd type="none" w="med" len="med"/>
-                    </a:lnT>
-                    <a:lnB w="12700" cap="flat" cmpd="sng" algn="ctr">
-                      <a:solidFill>
-                        <a:srgbClr val="232F48"/>
-                      </a:solidFill>
-                      <a:prstDash val="solid"/>
-                      <a:round/>
-                      <a:headEnd type="none" w="med" len="med"/>
-                      <a:tailEnd type="none" w="med" len="med"/>
-                    </a:lnB>
-                    <a:solidFill>
-                      <a:srgbClr val="121A2B"/>
-                    </a:solidFill>
-                  </a:tcPr>
-                </a:tc>
-                <a:tc>
-                  <a:txBody>
-                    <a:bodyPr/>
-                    <a:lstStyle/>
-                    <a:p>
-                      <a:pPr indent="0" marL="0">
-                        <a:buNone/>
-                      </a:pPr>
-                      <a:r>
-                        <a:rPr lang="en-US" sz="1100" dirty="0">
-                          <a:solidFill>
-                            <a:srgbClr val="F1F5F9"/>
-                          </a:solidFill>
-                          <a:latin typeface="Arial" pitchFamily="34" charset="0"/>
-                          <a:ea typeface="Arial" pitchFamily="34" charset="-122"/>
-                          <a:cs typeface="Arial" pitchFamily="34" charset="-120"/>
-                        </a:rPr>
-                        <a:t>Human contributor empowerment: verifiable truth trail &amp; test radar.</a:t>
-                      </a:r>
-                      <a:endParaRPr lang="en-US" sz="1100" dirty="0">
-                        <a:latin typeface="Arial" charset="0"/>
-                        <a:ea typeface="Arial" charset="0"/>
-                        <a:cs typeface="Arial" charset="0"/>
-                      </a:endParaRPr>
-                    </a:p>
-                  </a:txBody>
-                  <a:tcPr marL="91440" marR="91440" marT="45720" marB="45720">
-                    <a:lnL w="12700" cap="flat" cmpd="sng" algn="ctr">
-                      <a:solidFill>
-                        <a:srgbClr val="232F48"/>
-                      </a:solidFill>
-                      <a:prstDash val="solid"/>
-                      <a:round/>
-                      <a:headEnd type="none" w="med" len="med"/>
-                      <a:tailEnd type="none" w="med" len="med"/>
-                    </a:lnL>
-                    <a:lnR w="12700" cap="flat" cmpd="sng" algn="ctr">
-                      <a:solidFill>
-                        <a:srgbClr val="232F48"/>
-                      </a:solidFill>
-                      <a:prstDash val="solid"/>
-                      <a:round/>
-                      <a:headEnd type="none" w="med" len="med"/>
-                      <a:tailEnd type="none" w="med" len="med"/>
-                    </a:lnR>
-                    <a:lnT w="12700" cap="flat" cmpd="sng" algn="ctr">
-                      <a:solidFill>
-                        <a:srgbClr val="232F48"/>
-                      </a:solidFill>
-                      <a:prstDash val="solid"/>
-                      <a:round/>
-                      <a:headEnd type="none" w="med" len="med"/>
-                      <a:tailEnd type="none" w="med" len="med"/>
-                    </a:lnT>
-                    <a:lnB w="12700" cap="flat" cmpd="sng" algn="ctr">
-                      <a:solidFill>
-                        <a:srgbClr val="232F48"/>
-                      </a:solidFill>
-                      <a:prstDash val="solid"/>
-                      <a:round/>
-                      <a:headEnd type="none" w="med" len="med"/>
-                      <a:tailEnd type="none" w="med" len="med"/>
-                    </a:lnB>
-                    <a:solidFill>
-                      <a:srgbClr val="121A2B"/>
-                    </a:solidFill>
-                  </a:tcPr>
-                </a:tc>
-              </a:tr>
-            </a:tbl>
-          </a:graphicData>
-        </a:graphic>
-      </p:graphicFrame>
+      <p:sp>
+        <p:nvSpPr>
+          <p:cNvPr id="4" name="Text 2"/>
+          <p:cNvSpPr/>
+          <p:nvPr/>
+        </p:nvSpPr>
+        <p:spPr>
+          <a:xfrm>
+            <a:off x="676656" y="1335024"/>
+            <a:ext cx="10789920" cy="310896"/>
+          </a:xfrm>
+          <a:prstGeom prst="rect">
+            <a:avLst/>
+          </a:prstGeom>
+          <a:noFill/>
+          <a:ln/>
+        </p:spPr>
+        <p:txBody>
+          <a:bodyPr wrap="square" rtlCol="0" anchor="ctr"/>
+          <a:lstStyle/>
+          <a:p>
+            <a:pPr indent="0" marL="0">
+              <a:buNone/>
+            </a:pPr>
+            <a:r>
+              <a:rPr lang="en-US" sz="1400" dirty="0">
+                <a:solidFill>
+                  <a:srgbClr val="B5C0D3"/>
+                </a:solidFill>
+                <a:latin typeface="Arial" pitchFamily="34" charset="0"/>
+                <a:ea typeface="Arial" pitchFamily="34" charset="-122"/>
+                <a:cs typeface="Arial" pitchFamily="34" charset="-120"/>
+              </a:rPr>
+              <a:t>Turn a public GitHub issue into a reviewable plan with evidence—not guesswork.</a:t>
+            </a:r>
+            <a:endParaRPr lang="en-US" sz="1400" dirty="0"/>
+          </a:p>
+        </p:txBody>
+      </p:sp>
+      <p:sp>
+        <p:nvSpPr>
+          <p:cNvPr id="5" name="Shape 3"/>
+          <p:cNvSpPr/>
+          <p:nvPr/>
+        </p:nvSpPr>
+        <p:spPr>
+          <a:xfrm>
+            <a:off x="658368" y="1993392"/>
+            <a:ext cx="2048256" cy="2980944"/>
+          </a:xfrm>
+          <a:prstGeom prst="roundRect">
+            <a:avLst/>
+          </a:prstGeom>
+          <a:solidFill>
+            <a:srgbClr val="121A2B"/>
+          </a:solidFill>
+          <a:ln w="12700">
+            <a:solidFill>
+              <a:srgbClr val="2A3953"/>
+            </a:solidFill>
+            <a:prstDash val="solid"/>
+          </a:ln>
+        </p:spPr>
+      </p:sp>
+      <p:sp>
+        <p:nvSpPr>
+          <p:cNvPr id="6" name="Shape 4"/>
+          <p:cNvSpPr/>
+          <p:nvPr/>
+        </p:nvSpPr>
+        <p:spPr>
+          <a:xfrm>
+            <a:off x="676656" y="2011680"/>
+            <a:ext cx="2011680" cy="50292"/>
+          </a:xfrm>
+          <a:prstGeom prst="rect">
+            <a:avLst/>
+          </a:prstGeom>
+          <a:solidFill>
+            <a:srgbClr val="A78BFA"/>
+          </a:solidFill>
+          <a:ln w="12700">
+            <a:solidFill>
+              <a:srgbClr val="A78BFA"/>
+            </a:solidFill>
+            <a:prstDash val="solid"/>
+          </a:ln>
+        </p:spPr>
+      </p:sp>
+      <p:sp>
+        <p:nvSpPr>
+          <p:cNvPr id="7" name="Text 5"/>
+          <p:cNvSpPr/>
+          <p:nvPr/>
+        </p:nvSpPr>
+        <p:spPr>
+          <a:xfrm>
+            <a:off x="822960" y="2249424"/>
+            <a:ext cx="475488" cy="475488"/>
+          </a:xfrm>
+          <a:prstGeom prst="ellipse">
+            <a:avLst/>
+          </a:prstGeom>
+          <a:solidFill>
+            <a:srgbClr val="A78BFA"/>
+          </a:solidFill>
+          <a:ln/>
+        </p:spPr>
+        <p:txBody>
+          <a:bodyPr wrap="square" rtlCol="0" anchor="ctr"/>
+          <a:lstStyle/>
+          <a:p>
+            <a:pPr algn="ctr" indent="0" marL="0">
+              <a:buNone/>
+            </a:pPr>
+            <a:r>
+              <a:rPr lang="en-US" sz="1300" b="1" dirty="0">
+                <a:solidFill>
+                  <a:srgbClr val="0A0F1F"/>
+                </a:solidFill>
+                <a:latin typeface="Arial" pitchFamily="34" charset="0"/>
+                <a:ea typeface="Arial" pitchFamily="34" charset="-122"/>
+                <a:cs typeface="Arial" pitchFamily="34" charset="-120"/>
+              </a:rPr>
+              <a:t>01</a:t>
+            </a:r>
+            <a:endParaRPr lang="en-US" sz="1300" dirty="0"/>
+          </a:p>
+        </p:txBody>
+      </p:sp>
+      <p:sp>
+        <p:nvSpPr>
+          <p:cNvPr id="8" name="Text 6"/>
+          <p:cNvSpPr/>
+          <p:nvPr/>
+        </p:nvSpPr>
+        <p:spPr>
+          <a:xfrm>
+            <a:off x="822960" y="2907792"/>
+            <a:ext cx="1719072" cy="420624"/>
+          </a:xfrm>
+          <a:prstGeom prst="rect">
+            <a:avLst/>
+          </a:prstGeom>
+          <a:noFill/>
+          <a:ln/>
+        </p:spPr>
+        <p:txBody>
+          <a:bodyPr wrap="square" rtlCol="0" anchor="ctr"/>
+          <a:lstStyle/>
+          <a:p>
+            <a:pPr indent="0" marL="0">
+              <a:buNone/>
+            </a:pPr>
+            <a:r>
+              <a:rPr lang="en-US" sz="1700" b="1" dirty="0">
+                <a:solidFill>
+                  <a:srgbClr val="F1F5F9"/>
+                </a:solidFill>
+                <a:latin typeface="Arial" pitchFamily="34" charset="0"/>
+                <a:ea typeface="Arial" pitchFamily="34" charset="-122"/>
+                <a:cs typeface="Arial" pitchFamily="34" charset="-120"/>
+              </a:rPr>
+              <a:t>Submit issue</a:t>
+            </a:r>
+            <a:endParaRPr lang="en-US" sz="1700" dirty="0"/>
+          </a:p>
+        </p:txBody>
+      </p:sp>
+      <p:sp>
+        <p:nvSpPr>
+          <p:cNvPr id="9" name="Text 7"/>
+          <p:cNvSpPr/>
+          <p:nvPr/>
+        </p:nvSpPr>
+        <p:spPr>
+          <a:xfrm>
+            <a:off x="822960" y="3419856"/>
+            <a:ext cx="1719072" cy="1161288"/>
+          </a:xfrm>
+          <a:prstGeom prst="rect">
+            <a:avLst/>
+          </a:prstGeom>
+          <a:noFill/>
+          <a:ln/>
+        </p:spPr>
+        <p:txBody>
+          <a:bodyPr wrap="square" rtlCol="0" anchor="ctr"/>
+          <a:lstStyle/>
+          <a:p>
+            <a:pPr indent="0" marL="0">
+              <a:lnSpc>
+                <a:spcPts val="1600"/>
+              </a:lnSpc>
+              <a:buNone/>
+            </a:pPr>
+            <a:r>
+              <a:rPr lang="en-US" sz="1200" dirty="0">
+                <a:solidFill>
+                  <a:srgbClr val="B5C0D3"/>
+                </a:solidFill>
+                <a:latin typeface="Arial" pitchFamily="34" charset="0"/>
+                <a:ea typeface="Arial" pitchFamily="34" charset="-122"/>
+                <a:cs typeface="Arial" pitchFamily="34" charset="-120"/>
+              </a:rPr>
+              <a:t>Paste a public GitHub issue URL. Check issue status and context.</a:t>
+            </a:r>
+            <a:endParaRPr lang="en-US" sz="1200" dirty="0"/>
+          </a:p>
+        </p:txBody>
+      </p:sp>
+      <p:sp>
+        <p:nvSpPr>
+          <p:cNvPr id="10" name="Shape 8"/>
+          <p:cNvSpPr/>
+          <p:nvPr/>
+        </p:nvSpPr>
+        <p:spPr>
+          <a:xfrm>
+            <a:off x="2738628" y="3419856"/>
+            <a:ext cx="109728" cy="228600"/>
+          </a:xfrm>
+          <a:prstGeom prst="chevron">
+            <a:avLst/>
+          </a:prstGeom>
+          <a:solidFill>
+            <a:srgbClr val="2A3953"/>
+          </a:solidFill>
+          <a:ln w="12700">
+            <a:solidFill>
+              <a:srgbClr val="2A3953"/>
+            </a:solidFill>
+            <a:prstDash val="solid"/>
+          </a:ln>
+        </p:spPr>
+      </p:sp>
+      <p:sp>
+        <p:nvSpPr>
+          <p:cNvPr id="11" name="Shape 9"/>
+          <p:cNvSpPr/>
+          <p:nvPr/>
+        </p:nvSpPr>
+        <p:spPr>
+          <a:xfrm>
+            <a:off x="2871216" y="1993392"/>
+            <a:ext cx="2048256" cy="2980944"/>
+          </a:xfrm>
+          <a:prstGeom prst="roundRect">
+            <a:avLst/>
+          </a:prstGeom>
+          <a:solidFill>
+            <a:srgbClr val="121A2B"/>
+          </a:solidFill>
+          <a:ln w="12700">
+            <a:solidFill>
+              <a:srgbClr val="2A3953"/>
+            </a:solidFill>
+            <a:prstDash val="solid"/>
+          </a:ln>
+        </p:spPr>
+      </p:sp>
+      <p:sp>
+        <p:nvSpPr>
+          <p:cNvPr id="12" name="Shape 10"/>
+          <p:cNvSpPr/>
+          <p:nvPr/>
+        </p:nvSpPr>
+        <p:spPr>
+          <a:xfrm>
+            <a:off x="2889504" y="2011680"/>
+            <a:ext cx="2011680" cy="50292"/>
+          </a:xfrm>
+          <a:prstGeom prst="rect">
+            <a:avLst/>
+          </a:prstGeom>
+          <a:solidFill>
+            <a:srgbClr val="67E8F9"/>
+          </a:solidFill>
+          <a:ln w="12700">
+            <a:solidFill>
+              <a:srgbClr val="67E8F9"/>
+            </a:solidFill>
+            <a:prstDash val="solid"/>
+          </a:ln>
+        </p:spPr>
+      </p:sp>
+      <p:sp>
+        <p:nvSpPr>
+          <p:cNvPr id="13" name="Text 11"/>
+          <p:cNvSpPr/>
+          <p:nvPr/>
+        </p:nvSpPr>
+        <p:spPr>
+          <a:xfrm>
+            <a:off x="3035808" y="2249424"/>
+            <a:ext cx="475488" cy="475488"/>
+          </a:xfrm>
+          <a:prstGeom prst="ellipse">
+            <a:avLst/>
+          </a:prstGeom>
+          <a:solidFill>
+            <a:srgbClr val="67E8F9"/>
+          </a:solidFill>
+          <a:ln/>
+        </p:spPr>
+        <p:txBody>
+          <a:bodyPr wrap="square" rtlCol="0" anchor="ctr"/>
+          <a:lstStyle/>
+          <a:p>
+            <a:pPr algn="ctr" indent="0" marL="0">
+              <a:buNone/>
+            </a:pPr>
+            <a:r>
+              <a:rPr lang="en-US" sz="1300" b="1" dirty="0">
+                <a:solidFill>
+                  <a:srgbClr val="0A0F1F"/>
+                </a:solidFill>
+                <a:latin typeface="Arial" pitchFamily="34" charset="0"/>
+                <a:ea typeface="Arial" pitchFamily="34" charset="-122"/>
+                <a:cs typeface="Arial" pitchFamily="34" charset="-120"/>
+              </a:rPr>
+              <a:t>02</a:t>
+            </a:r>
+            <a:endParaRPr lang="en-US" sz="1300" dirty="0"/>
+          </a:p>
+        </p:txBody>
+      </p:sp>
+      <p:sp>
+        <p:nvSpPr>
+          <p:cNvPr id="14" name="Text 12"/>
+          <p:cNvSpPr/>
+          <p:nvPr/>
+        </p:nvSpPr>
+        <p:spPr>
+          <a:xfrm>
+            <a:off x="3035808" y="2907792"/>
+            <a:ext cx="1719072" cy="420624"/>
+          </a:xfrm>
+          <a:prstGeom prst="rect">
+            <a:avLst/>
+          </a:prstGeom>
+          <a:noFill/>
+          <a:ln/>
+        </p:spPr>
+        <p:txBody>
+          <a:bodyPr wrap="square" rtlCol="0" anchor="ctr"/>
+          <a:lstStyle/>
+          <a:p>
+            <a:pPr indent="0" marL="0">
+              <a:buNone/>
+            </a:pPr>
+            <a:r>
+              <a:rPr lang="en-US" sz="1700" b="1" dirty="0">
+                <a:solidFill>
+                  <a:srgbClr val="F1F5F9"/>
+                </a:solidFill>
+                <a:latin typeface="Arial" pitchFamily="34" charset="0"/>
+                <a:ea typeface="Arial" pitchFamily="34" charset="-122"/>
+                <a:cs typeface="Arial" pitchFamily="34" charset="-120"/>
+              </a:rPr>
+              <a:t>Bounded scan</a:t>
+            </a:r>
+            <a:endParaRPr lang="en-US" sz="1700" dirty="0"/>
+          </a:p>
+        </p:txBody>
+      </p:sp>
+      <p:sp>
+        <p:nvSpPr>
+          <p:cNvPr id="15" name="Text 13"/>
+          <p:cNvSpPr/>
+          <p:nvPr/>
+        </p:nvSpPr>
+        <p:spPr>
+          <a:xfrm>
+            <a:off x="3035808" y="3419856"/>
+            <a:ext cx="1719072" cy="1161288"/>
+          </a:xfrm>
+          <a:prstGeom prst="rect">
+            <a:avLst/>
+          </a:prstGeom>
+          <a:noFill/>
+          <a:ln/>
+        </p:spPr>
+        <p:txBody>
+          <a:bodyPr wrap="square" rtlCol="0" anchor="ctr"/>
+          <a:lstStyle/>
+          <a:p>
+            <a:pPr indent="0" marL="0">
+              <a:lnSpc>
+                <a:spcPts val="1600"/>
+              </a:lnSpc>
+              <a:buNone/>
+            </a:pPr>
+            <a:r>
+              <a:rPr lang="en-US" sz="1200" dirty="0">
+                <a:solidFill>
+                  <a:srgbClr val="B5C0D3"/>
+                </a:solidFill>
+                <a:latin typeface="Arial" pitchFamily="34" charset="0"/>
+                <a:ea typeface="Arial" pitchFamily="34" charset="-122"/>
+                <a:cs typeface="Arial" pitchFamily="34" charset="-120"/>
+              </a:rPr>
+              <a:t>Read repository files, manifests and docs within API limits.</a:t>
+            </a:r>
+            <a:endParaRPr lang="en-US" sz="1200" dirty="0"/>
+          </a:p>
+        </p:txBody>
+      </p:sp>
+      <p:sp>
+        <p:nvSpPr>
+          <p:cNvPr id="16" name="Shape 14"/>
+          <p:cNvSpPr/>
+          <p:nvPr/>
+        </p:nvSpPr>
+        <p:spPr>
+          <a:xfrm>
+            <a:off x="4951476" y="3419856"/>
+            <a:ext cx="109728" cy="228600"/>
+          </a:xfrm>
+          <a:prstGeom prst="chevron">
+            <a:avLst/>
+          </a:prstGeom>
+          <a:solidFill>
+            <a:srgbClr val="2A3953"/>
+          </a:solidFill>
+          <a:ln w="12700">
+            <a:solidFill>
+              <a:srgbClr val="2A3953"/>
+            </a:solidFill>
+            <a:prstDash val="solid"/>
+          </a:ln>
+        </p:spPr>
+      </p:sp>
+      <p:sp>
+        <p:nvSpPr>
+          <p:cNvPr id="17" name="Shape 15"/>
+          <p:cNvSpPr/>
+          <p:nvPr/>
+        </p:nvSpPr>
+        <p:spPr>
+          <a:xfrm>
+            <a:off x="5084064" y="1993392"/>
+            <a:ext cx="2048256" cy="2980944"/>
+          </a:xfrm>
+          <a:prstGeom prst="roundRect">
+            <a:avLst/>
+          </a:prstGeom>
+          <a:solidFill>
+            <a:srgbClr val="121A2B"/>
+          </a:solidFill>
+          <a:ln w="12700">
+            <a:solidFill>
+              <a:srgbClr val="2A3953"/>
+            </a:solidFill>
+            <a:prstDash val="solid"/>
+          </a:ln>
+        </p:spPr>
+      </p:sp>
+      <p:sp>
+        <p:nvSpPr>
+          <p:cNvPr id="18" name="Shape 16"/>
+          <p:cNvSpPr/>
+          <p:nvPr/>
+        </p:nvSpPr>
+        <p:spPr>
+          <a:xfrm>
+            <a:off x="5102352" y="2011680"/>
+            <a:ext cx="2011680" cy="50292"/>
+          </a:xfrm>
+          <a:prstGeom prst="rect">
+            <a:avLst/>
+          </a:prstGeom>
+          <a:solidFill>
+            <a:srgbClr val="5EEAD4"/>
+          </a:solidFill>
+          <a:ln w="12700">
+            <a:solidFill>
+              <a:srgbClr val="5EEAD4"/>
+            </a:solidFill>
+            <a:prstDash val="solid"/>
+          </a:ln>
+        </p:spPr>
+      </p:sp>
+      <p:sp>
+        <p:nvSpPr>
+          <p:cNvPr id="19" name="Text 17"/>
+          <p:cNvSpPr/>
+          <p:nvPr/>
+        </p:nvSpPr>
+        <p:spPr>
+          <a:xfrm>
+            <a:off x="5248656" y="2249424"/>
+            <a:ext cx="475488" cy="475488"/>
+          </a:xfrm>
+          <a:prstGeom prst="ellipse">
+            <a:avLst/>
+          </a:prstGeom>
+          <a:solidFill>
+            <a:srgbClr val="5EEAD4"/>
+          </a:solidFill>
+          <a:ln/>
+        </p:spPr>
+        <p:txBody>
+          <a:bodyPr wrap="square" rtlCol="0" anchor="ctr"/>
+          <a:lstStyle/>
+          <a:p>
+            <a:pPr algn="ctr" indent="0" marL="0">
+              <a:buNone/>
+            </a:pPr>
+            <a:r>
+              <a:rPr lang="en-US" sz="1300" b="1" dirty="0">
+                <a:solidFill>
+                  <a:srgbClr val="0A0F1F"/>
+                </a:solidFill>
+                <a:latin typeface="Arial" pitchFamily="34" charset="0"/>
+                <a:ea typeface="Arial" pitchFamily="34" charset="-122"/>
+                <a:cs typeface="Arial" pitchFamily="34" charset="-120"/>
+              </a:rPr>
+              <a:t>03</a:t>
+            </a:r>
+            <a:endParaRPr lang="en-US" sz="1300" dirty="0"/>
+          </a:p>
+        </p:txBody>
+      </p:sp>
+      <p:sp>
+        <p:nvSpPr>
+          <p:cNvPr id="20" name="Text 18"/>
+          <p:cNvSpPr/>
+          <p:nvPr/>
+        </p:nvSpPr>
+        <p:spPr>
+          <a:xfrm>
+            <a:off x="5248656" y="2907792"/>
+            <a:ext cx="1719072" cy="420624"/>
+          </a:xfrm>
+          <a:prstGeom prst="rect">
+            <a:avLst/>
+          </a:prstGeom>
+          <a:noFill/>
+          <a:ln/>
+        </p:spPr>
+        <p:txBody>
+          <a:bodyPr wrap="square" rtlCol="0" anchor="ctr"/>
+          <a:lstStyle/>
+          <a:p>
+            <a:pPr indent="0" marL="0">
+              <a:buNone/>
+            </a:pPr>
+            <a:r>
+              <a:rPr lang="en-US" sz="1700" b="1" dirty="0">
+                <a:solidFill>
+                  <a:srgbClr val="F1F5F9"/>
+                </a:solidFill>
+                <a:latin typeface="Arial" pitchFamily="34" charset="0"/>
+                <a:ea typeface="Arial" pitchFamily="34" charset="-122"/>
+                <a:cs typeface="Arial" pitchFamily="34" charset="-120"/>
+              </a:rPr>
+              <a:t>Draft contract</a:t>
+            </a:r>
+            <a:endParaRPr lang="en-US" sz="1700" dirty="0"/>
+          </a:p>
+        </p:txBody>
+      </p:sp>
+      <p:sp>
+        <p:nvSpPr>
+          <p:cNvPr id="21" name="Text 19"/>
+          <p:cNvSpPr/>
+          <p:nvPr/>
+        </p:nvSpPr>
+        <p:spPr>
+          <a:xfrm>
+            <a:off x="5248656" y="3419856"/>
+            <a:ext cx="1719072" cy="1161288"/>
+          </a:xfrm>
+          <a:prstGeom prst="rect">
+            <a:avLst/>
+          </a:prstGeom>
+          <a:noFill/>
+          <a:ln/>
+        </p:spPr>
+        <p:txBody>
+          <a:bodyPr wrap="square" rtlCol="0" anchor="ctr"/>
+          <a:lstStyle/>
+          <a:p>
+            <a:pPr indent="0" marL="0">
+              <a:lnSpc>
+                <a:spcPts val="1600"/>
+              </a:lnSpc>
+              <a:buNone/>
+            </a:pPr>
+            <a:r>
+              <a:rPr lang="en-US" sz="1200" dirty="0">
+                <a:solidFill>
+                  <a:srgbClr val="B5C0D3"/>
+                </a:solidFill>
+                <a:latin typeface="Arial" pitchFamily="34" charset="0"/>
+                <a:ea typeface="Arial" pitchFamily="34" charset="-122"/>
+                <a:cs typeface="Arial" pitchFamily="34" charset="-120"/>
+              </a:rPr>
+              <a:t>Gemma 4 extracts explicit criteria and labels inferred proposals.</a:t>
+            </a:r>
+            <a:endParaRPr lang="en-US" sz="1200" dirty="0"/>
+          </a:p>
+        </p:txBody>
+      </p:sp>
+      <p:sp>
+        <p:nvSpPr>
+          <p:cNvPr id="22" name="Shape 20"/>
+          <p:cNvSpPr/>
+          <p:nvPr/>
+        </p:nvSpPr>
+        <p:spPr>
+          <a:xfrm>
+            <a:off x="7164324" y="3419856"/>
+            <a:ext cx="109728" cy="228600"/>
+          </a:xfrm>
+          <a:prstGeom prst="chevron">
+            <a:avLst/>
+          </a:prstGeom>
+          <a:solidFill>
+            <a:srgbClr val="2A3953"/>
+          </a:solidFill>
+          <a:ln w="12700">
+            <a:solidFill>
+              <a:srgbClr val="2A3953"/>
+            </a:solidFill>
+            <a:prstDash val="solid"/>
+          </a:ln>
+        </p:spPr>
+      </p:sp>
+      <p:sp>
+        <p:nvSpPr>
+          <p:cNvPr id="23" name="Shape 21"/>
+          <p:cNvSpPr/>
+          <p:nvPr/>
+        </p:nvSpPr>
+        <p:spPr>
+          <a:xfrm>
+            <a:off x="7296912" y="1993392"/>
+            <a:ext cx="2048256" cy="2980944"/>
+          </a:xfrm>
+          <a:prstGeom prst="roundRect">
+            <a:avLst/>
+          </a:prstGeom>
+          <a:solidFill>
+            <a:srgbClr val="121A2B"/>
+          </a:solidFill>
+          <a:ln w="12700">
+            <a:solidFill>
+              <a:srgbClr val="2A3953"/>
+            </a:solidFill>
+            <a:prstDash val="solid"/>
+          </a:ln>
+        </p:spPr>
+      </p:sp>
+      <p:sp>
+        <p:nvSpPr>
+          <p:cNvPr id="24" name="Shape 22"/>
+          <p:cNvSpPr/>
+          <p:nvPr/>
+        </p:nvSpPr>
+        <p:spPr>
+          <a:xfrm>
+            <a:off x="7315200" y="2011680"/>
+            <a:ext cx="2011680" cy="50292"/>
+          </a:xfrm>
+          <a:prstGeom prst="rect">
+            <a:avLst/>
+          </a:prstGeom>
+          <a:solidFill>
+            <a:srgbClr val="A78BFA"/>
+          </a:solidFill>
+          <a:ln w="12700">
+            <a:solidFill>
+              <a:srgbClr val="A78BFA"/>
+            </a:solidFill>
+            <a:prstDash val="solid"/>
+          </a:ln>
+        </p:spPr>
+      </p:sp>
+      <p:sp>
+        <p:nvSpPr>
+          <p:cNvPr id="25" name="Text 23"/>
+          <p:cNvSpPr/>
+          <p:nvPr/>
+        </p:nvSpPr>
+        <p:spPr>
+          <a:xfrm>
+            <a:off x="7461504" y="2249424"/>
+            <a:ext cx="475488" cy="475488"/>
+          </a:xfrm>
+          <a:prstGeom prst="ellipse">
+            <a:avLst/>
+          </a:prstGeom>
+          <a:solidFill>
+            <a:srgbClr val="A78BFA"/>
+          </a:solidFill>
+          <a:ln/>
+        </p:spPr>
+        <p:txBody>
+          <a:bodyPr wrap="square" rtlCol="0" anchor="ctr"/>
+          <a:lstStyle/>
+          <a:p>
+            <a:pPr algn="ctr" indent="0" marL="0">
+              <a:buNone/>
+            </a:pPr>
+            <a:r>
+              <a:rPr lang="en-US" sz="1300" b="1" dirty="0">
+                <a:solidFill>
+                  <a:srgbClr val="0A0F1F"/>
+                </a:solidFill>
+                <a:latin typeface="Arial" pitchFamily="34" charset="0"/>
+                <a:ea typeface="Arial" pitchFamily="34" charset="-122"/>
+                <a:cs typeface="Arial" pitchFamily="34" charset="-120"/>
+              </a:rPr>
+              <a:t>04</a:t>
+            </a:r>
+            <a:endParaRPr lang="en-US" sz="1300" dirty="0"/>
+          </a:p>
+        </p:txBody>
+      </p:sp>
+      <p:sp>
+        <p:nvSpPr>
+          <p:cNvPr id="26" name="Text 24"/>
+          <p:cNvSpPr/>
+          <p:nvPr/>
+        </p:nvSpPr>
+        <p:spPr>
+          <a:xfrm>
+            <a:off x="7461504" y="2907792"/>
+            <a:ext cx="1719072" cy="420624"/>
+          </a:xfrm>
+          <a:prstGeom prst="rect">
+            <a:avLst/>
+          </a:prstGeom>
+          <a:noFill/>
+          <a:ln/>
+        </p:spPr>
+        <p:txBody>
+          <a:bodyPr wrap="square" rtlCol="0" anchor="ctr"/>
+          <a:lstStyle/>
+          <a:p>
+            <a:pPr indent="0" marL="0">
+              <a:buNone/>
+            </a:pPr>
+            <a:r>
+              <a:rPr lang="en-US" sz="1700" b="1" dirty="0">
+                <a:solidFill>
+                  <a:srgbClr val="F1F5F9"/>
+                </a:solidFill>
+                <a:latin typeface="Arial" pitchFamily="34" charset="0"/>
+                <a:ea typeface="Arial" pitchFamily="34" charset="-122"/>
+                <a:cs typeface="Arial" pitchFamily="34" charset="-120"/>
+              </a:rPr>
+              <a:t>Trace evidence</a:t>
+            </a:r>
+            <a:endParaRPr lang="en-US" sz="1700" dirty="0"/>
+          </a:p>
+        </p:txBody>
+      </p:sp>
+      <p:sp>
+        <p:nvSpPr>
+          <p:cNvPr id="27" name="Text 25"/>
+          <p:cNvSpPr/>
+          <p:nvPr/>
+        </p:nvSpPr>
+        <p:spPr>
+          <a:xfrm>
+            <a:off x="7461504" y="3419856"/>
+            <a:ext cx="1719072" cy="1161288"/>
+          </a:xfrm>
+          <a:prstGeom prst="rect">
+            <a:avLst/>
+          </a:prstGeom>
+          <a:noFill/>
+          <a:ln/>
+        </p:spPr>
+        <p:txBody>
+          <a:bodyPr wrap="square" rtlCol="0" anchor="ctr"/>
+          <a:lstStyle/>
+          <a:p>
+            <a:pPr indent="0" marL="0">
+              <a:lnSpc>
+                <a:spcPts val="1600"/>
+              </a:lnSpc>
+              <a:buNone/>
+            </a:pPr>
+            <a:r>
+              <a:rPr lang="en-US" sz="1200" dirty="0">
+                <a:solidFill>
+                  <a:srgbClr val="B5C0D3"/>
+                </a:solidFill>
+                <a:latin typeface="Arial" pitchFamily="34" charset="0"/>
+                <a:ea typeface="Arial" pitchFamily="34" charset="-122"/>
+                <a:cs typeface="Arial" pitchFamily="34" charset="-120"/>
+              </a:rPr>
+              <a:t>Map criteria to candidate source/test files and documented commands.</a:t>
+            </a:r>
+            <a:endParaRPr lang="en-US" sz="1200" dirty="0"/>
+          </a:p>
+        </p:txBody>
+      </p:sp>
+      <p:sp>
+        <p:nvSpPr>
+          <p:cNvPr id="28" name="Shape 26"/>
+          <p:cNvSpPr/>
+          <p:nvPr/>
+        </p:nvSpPr>
+        <p:spPr>
+          <a:xfrm>
+            <a:off x="9377172" y="3419856"/>
+            <a:ext cx="109728" cy="228600"/>
+          </a:xfrm>
+          <a:prstGeom prst="chevron">
+            <a:avLst/>
+          </a:prstGeom>
+          <a:solidFill>
+            <a:srgbClr val="2A3953"/>
+          </a:solidFill>
+          <a:ln w="12700">
+            <a:solidFill>
+              <a:srgbClr val="2A3953"/>
+            </a:solidFill>
+            <a:prstDash val="solid"/>
+          </a:ln>
+        </p:spPr>
+      </p:sp>
+      <p:sp>
+        <p:nvSpPr>
+          <p:cNvPr id="29" name="Shape 27"/>
+          <p:cNvSpPr/>
+          <p:nvPr/>
+        </p:nvSpPr>
+        <p:spPr>
+          <a:xfrm>
+            <a:off x="9509760" y="1993392"/>
+            <a:ext cx="2048256" cy="2980944"/>
+          </a:xfrm>
+          <a:prstGeom prst="roundRect">
+            <a:avLst/>
+          </a:prstGeom>
+          <a:solidFill>
+            <a:srgbClr val="121A2B"/>
+          </a:solidFill>
+          <a:ln w="12700">
+            <a:solidFill>
+              <a:srgbClr val="2A3953"/>
+            </a:solidFill>
+            <a:prstDash val="solid"/>
+          </a:ln>
+        </p:spPr>
+      </p:sp>
+      <p:sp>
+        <p:nvSpPr>
+          <p:cNvPr id="30" name="Shape 28"/>
+          <p:cNvSpPr/>
+          <p:nvPr/>
+        </p:nvSpPr>
+        <p:spPr>
+          <a:xfrm>
+            <a:off x="9528048" y="2011680"/>
+            <a:ext cx="2011680" cy="50292"/>
+          </a:xfrm>
+          <a:prstGeom prst="rect">
+            <a:avLst/>
+          </a:prstGeom>
+          <a:solidFill>
+            <a:srgbClr val="67E8F9"/>
+          </a:solidFill>
+          <a:ln w="12700">
+            <a:solidFill>
+              <a:srgbClr val="67E8F9"/>
+            </a:solidFill>
+            <a:prstDash val="solid"/>
+          </a:ln>
+        </p:spPr>
+      </p:sp>
+      <p:sp>
+        <p:nvSpPr>
+          <p:cNvPr id="31" name="Text 29"/>
+          <p:cNvSpPr/>
+          <p:nvPr/>
+        </p:nvSpPr>
+        <p:spPr>
+          <a:xfrm>
+            <a:off x="9674352" y="2249424"/>
+            <a:ext cx="475488" cy="475488"/>
+          </a:xfrm>
+          <a:prstGeom prst="ellipse">
+            <a:avLst/>
+          </a:prstGeom>
+          <a:solidFill>
+            <a:srgbClr val="67E8F9"/>
+          </a:solidFill>
+          <a:ln/>
+        </p:spPr>
+        <p:txBody>
+          <a:bodyPr wrap="square" rtlCol="0" anchor="ctr"/>
+          <a:lstStyle/>
+          <a:p>
+            <a:pPr algn="ctr" indent="0" marL="0">
+              <a:buNone/>
+            </a:pPr>
+            <a:r>
+              <a:rPr lang="en-US" sz="1300" b="1" dirty="0">
+                <a:solidFill>
+                  <a:srgbClr val="0A0F1F"/>
+                </a:solidFill>
+                <a:latin typeface="Arial" pitchFamily="34" charset="0"/>
+                <a:ea typeface="Arial" pitchFamily="34" charset="-122"/>
+                <a:cs typeface="Arial" pitchFamily="34" charset="-120"/>
+              </a:rPr>
+              <a:t>05</a:t>
+            </a:r>
+            <a:endParaRPr lang="en-US" sz="1300" dirty="0"/>
+          </a:p>
+        </p:txBody>
+      </p:sp>
+      <p:sp>
+        <p:nvSpPr>
+          <p:cNvPr id="32" name="Text 30"/>
+          <p:cNvSpPr/>
+          <p:nvPr/>
+        </p:nvSpPr>
+        <p:spPr>
+          <a:xfrm>
+            <a:off x="9674352" y="2907792"/>
+            <a:ext cx="1719072" cy="420624"/>
+          </a:xfrm>
+          <a:prstGeom prst="rect">
+            <a:avLst/>
+          </a:prstGeom>
+          <a:noFill/>
+          <a:ln/>
+        </p:spPr>
+        <p:txBody>
+          <a:bodyPr wrap="square" rtlCol="0" anchor="ctr"/>
+          <a:lstStyle/>
+          <a:p>
+            <a:pPr indent="0" marL="0">
+              <a:buNone/>
+            </a:pPr>
+            <a:r>
+              <a:rPr lang="en-US" sz="1700" b="1" dirty="0">
+                <a:solidFill>
+                  <a:srgbClr val="F1F5F9"/>
+                </a:solidFill>
+                <a:latin typeface="Arial" pitchFamily="34" charset="0"/>
+                <a:ea typeface="Arial" pitchFamily="34" charset="-122"/>
+                <a:cs typeface="Arial" pitchFamily="34" charset="-120"/>
+              </a:rPr>
+              <a:t>Verify &amp; export</a:t>
+            </a:r>
+            <a:endParaRPr lang="en-US" sz="1700" dirty="0"/>
+          </a:p>
+        </p:txBody>
+      </p:sp>
+      <p:sp>
+        <p:nvSpPr>
+          <p:cNvPr id="33" name="Text 31"/>
+          <p:cNvSpPr/>
+          <p:nvPr/>
+        </p:nvSpPr>
+        <p:spPr>
+          <a:xfrm>
+            <a:off x="9674352" y="3419856"/>
+            <a:ext cx="1719072" cy="1161288"/>
+          </a:xfrm>
+          <a:prstGeom prst="rect">
+            <a:avLst/>
+          </a:prstGeom>
+          <a:noFill/>
+          <a:ln/>
+        </p:spPr>
+        <p:txBody>
+          <a:bodyPr wrap="square" rtlCol="0" anchor="ctr"/>
+          <a:lstStyle/>
+          <a:p>
+            <a:pPr indent="0" marL="0">
+              <a:lnSpc>
+                <a:spcPts val="1600"/>
+              </a:lnSpc>
+              <a:buNone/>
+            </a:pPr>
+            <a:r>
+              <a:rPr lang="en-US" sz="1200" dirty="0">
+                <a:solidFill>
+                  <a:srgbClr val="B5C0D3"/>
+                </a:solidFill>
+                <a:latin typeface="Arial" pitchFamily="34" charset="0"/>
+                <a:ea typeface="Arial" pitchFamily="34" charset="-122"/>
+                <a:cs typeface="Arial" pitchFamily="34" charset="-120"/>
+              </a:rPr>
+              <a:t>Claim Gate rejects fabricated paths; export a Proof Bundle and handoff.</a:t>
+            </a:r>
+            <a:endParaRPr lang="en-US" sz="1200" dirty="0"/>
+          </a:p>
+        </p:txBody>
+      </p:sp>
+      <p:sp>
+        <p:nvSpPr>
+          <p:cNvPr id="34" name="Shape 32"/>
+          <p:cNvSpPr/>
+          <p:nvPr/>
+        </p:nvSpPr>
+        <p:spPr>
+          <a:xfrm>
+            <a:off x="658368" y="5285232"/>
+            <a:ext cx="10881360" cy="713232"/>
+          </a:xfrm>
+          <a:prstGeom prst="roundRect">
+            <a:avLst/>
+          </a:prstGeom>
+          <a:solidFill>
+            <a:srgbClr val="141E31"/>
+          </a:solidFill>
+          <a:ln w="12700">
+            <a:solidFill>
+              <a:srgbClr val="2A3953"/>
+            </a:solidFill>
+            <a:prstDash val="solid"/>
+          </a:ln>
+        </p:spPr>
+      </p:sp>
+      <p:sp>
+        <p:nvSpPr>
+          <p:cNvPr id="35" name="Text 33"/>
+          <p:cNvSpPr/>
+          <p:nvPr/>
+        </p:nvSpPr>
+        <p:spPr>
+          <a:xfrm>
+            <a:off x="896112" y="5495544"/>
+            <a:ext cx="1965960" cy="228600"/>
+          </a:xfrm>
+          <a:prstGeom prst="rect">
+            <a:avLst/>
+          </a:prstGeom>
+          <a:noFill/>
+          <a:ln/>
+        </p:spPr>
+        <p:txBody>
+          <a:bodyPr wrap="square" rtlCol="0" anchor="ctr"/>
+          <a:lstStyle/>
+          <a:p>
+            <a:pPr indent="0" marL="0">
+              <a:buNone/>
+            </a:pPr>
+            <a:r>
+              <a:rPr lang="en-US" sz="1200" b="1" dirty="0">
+                <a:solidFill>
+                  <a:srgbClr val="67E8F9"/>
+                </a:solidFill>
+                <a:latin typeface="Arial" pitchFamily="34" charset="0"/>
+                <a:ea typeface="Arial" pitchFamily="34" charset="-122"/>
+                <a:cs typeface="Arial" pitchFamily="34" charset="-120"/>
+              </a:rPr>
+              <a:t>GEMMA 4 PROPOSES</a:t>
+            </a:r>
+            <a:endParaRPr lang="en-US" sz="1200" dirty="0"/>
+          </a:p>
+        </p:txBody>
+      </p:sp>
+      <p:sp>
+        <p:nvSpPr>
+          <p:cNvPr id="36" name="Text 34"/>
+          <p:cNvSpPr/>
+          <p:nvPr/>
+        </p:nvSpPr>
+        <p:spPr>
+          <a:xfrm>
+            <a:off x="2788920" y="5472684"/>
+            <a:ext cx="182880" cy="274320"/>
+          </a:xfrm>
+          <a:prstGeom prst="rect">
+            <a:avLst/>
+          </a:prstGeom>
+          <a:noFill/>
+          <a:ln/>
+        </p:spPr>
+        <p:txBody>
+          <a:bodyPr wrap="square" rtlCol="0" anchor="ctr"/>
+          <a:lstStyle/>
+          <a:p>
+            <a:pPr algn="ctr" indent="0" marL="0">
+              <a:buNone/>
+            </a:pPr>
+            <a:r>
+              <a:rPr lang="en-US" sz="1600" b="1" dirty="0">
+                <a:solidFill>
+                  <a:srgbClr val="B5C0D3"/>
+                </a:solidFill>
+                <a:latin typeface="Arial" pitchFamily="34" charset="0"/>
+                <a:ea typeface="Arial" pitchFamily="34" charset="-122"/>
+                <a:cs typeface="Arial" pitchFamily="34" charset="-120"/>
+              </a:rPr>
+              <a:t>•</a:t>
+            </a:r>
+            <a:endParaRPr lang="en-US" sz="1600" dirty="0"/>
+          </a:p>
+        </p:txBody>
+      </p:sp>
+      <p:sp>
+        <p:nvSpPr>
+          <p:cNvPr id="37" name="Text 35"/>
+          <p:cNvSpPr/>
+          <p:nvPr/>
+        </p:nvSpPr>
+        <p:spPr>
+          <a:xfrm>
+            <a:off x="3127248" y="5495544"/>
+            <a:ext cx="2331720" cy="228600"/>
+          </a:xfrm>
+          <a:prstGeom prst="rect">
+            <a:avLst/>
+          </a:prstGeom>
+          <a:noFill/>
+          <a:ln/>
+        </p:spPr>
+        <p:txBody>
+          <a:bodyPr wrap="square" rtlCol="0" anchor="ctr"/>
+          <a:lstStyle/>
+          <a:p>
+            <a:pPr indent="0" marL="0">
+              <a:buNone/>
+            </a:pPr>
+            <a:r>
+              <a:rPr lang="en-US" sz="1200" b="1" dirty="0">
+                <a:solidFill>
+                  <a:srgbClr val="5EEAD4"/>
+                </a:solidFill>
+                <a:latin typeface="Arial" pitchFamily="34" charset="0"/>
+                <a:ea typeface="Arial" pitchFamily="34" charset="-122"/>
+                <a:cs typeface="Arial" pitchFamily="34" charset="-120"/>
+              </a:rPr>
+              <a:t>CLAIM GATE VERIFIES</a:t>
+            </a:r>
+            <a:endParaRPr lang="en-US" sz="1200" dirty="0"/>
+          </a:p>
+        </p:txBody>
+      </p:sp>
+      <p:sp>
+        <p:nvSpPr>
+          <p:cNvPr id="38" name="Text 36"/>
+          <p:cNvSpPr/>
+          <p:nvPr/>
+        </p:nvSpPr>
+        <p:spPr>
+          <a:xfrm>
+            <a:off x="5495544" y="5472684"/>
+            <a:ext cx="182880" cy="274320"/>
+          </a:xfrm>
+          <a:prstGeom prst="rect">
+            <a:avLst/>
+          </a:prstGeom>
+          <a:noFill/>
+          <a:ln/>
+        </p:spPr>
+        <p:txBody>
+          <a:bodyPr wrap="square" rtlCol="0" anchor="ctr"/>
+          <a:lstStyle/>
+          <a:p>
+            <a:pPr algn="ctr" indent="0" marL="0">
+              <a:buNone/>
+            </a:pPr>
+            <a:r>
+              <a:rPr lang="en-US" sz="1600" b="1" dirty="0">
+                <a:solidFill>
+                  <a:srgbClr val="B5C0D3"/>
+                </a:solidFill>
+                <a:latin typeface="Arial" pitchFamily="34" charset="0"/>
+                <a:ea typeface="Arial" pitchFamily="34" charset="-122"/>
+                <a:cs typeface="Arial" pitchFamily="34" charset="-120"/>
+              </a:rPr>
+              <a:t>•</a:t>
+            </a:r>
+            <a:endParaRPr lang="en-US" sz="1600" dirty="0"/>
+          </a:p>
+        </p:txBody>
+      </p:sp>
+      <p:sp>
+        <p:nvSpPr>
+          <p:cNvPr id="39" name="Text 37"/>
+          <p:cNvSpPr/>
+          <p:nvPr/>
+        </p:nvSpPr>
+        <p:spPr>
+          <a:xfrm>
+            <a:off x="5833872" y="5495544"/>
+            <a:ext cx="2331720" cy="228600"/>
+          </a:xfrm>
+          <a:prstGeom prst="rect">
+            <a:avLst/>
+          </a:prstGeom>
+          <a:noFill/>
+          <a:ln/>
+        </p:spPr>
+        <p:txBody>
+          <a:bodyPr wrap="square" rtlCol="0" anchor="ctr"/>
+          <a:lstStyle/>
+          <a:p>
+            <a:pPr indent="0" marL="0">
+              <a:buNone/>
+            </a:pPr>
+            <a:r>
+              <a:rPr lang="en-US" sz="1200" b="1" dirty="0">
+                <a:solidFill>
+                  <a:srgbClr val="A78BFA"/>
+                </a:solidFill>
+                <a:latin typeface="Arial" pitchFamily="34" charset="0"/>
+                <a:ea typeface="Arial" pitchFamily="34" charset="-122"/>
+                <a:cs typeface="Arial" pitchFamily="34" charset="-120"/>
+              </a:rPr>
+              <a:t>CONTRIBUTOR DECIDES</a:t>
+            </a:r>
+            <a:endParaRPr lang="en-US" sz="1200" dirty="0"/>
+          </a:p>
+        </p:txBody>
+      </p:sp>
+      <p:sp>
+        <p:nvSpPr>
+          <p:cNvPr id="40" name="Text 38"/>
+          <p:cNvSpPr/>
+          <p:nvPr/>
+        </p:nvSpPr>
+        <p:spPr>
+          <a:xfrm>
+            <a:off x="8028432" y="5468112"/>
+            <a:ext cx="3246120" cy="310896"/>
+          </a:xfrm>
+          <a:prstGeom prst="rect">
+            <a:avLst/>
+          </a:prstGeom>
+          <a:noFill/>
+          <a:ln/>
+        </p:spPr>
+        <p:txBody>
+          <a:bodyPr wrap="square" rtlCol="0" anchor="ctr"/>
+          <a:lstStyle/>
+          <a:p>
+            <a:pPr indent="0" marL="0">
+              <a:buNone/>
+            </a:pPr>
+            <a:r>
+              <a:rPr lang="en-US" sz="1000" dirty="0">
+                <a:solidFill>
+                  <a:srgbClr val="B5C0D3"/>
+                </a:solidFill>
+                <a:latin typeface="Arial" pitchFamily="34" charset="0"/>
+                <a:ea typeface="Arial" pitchFamily="34" charset="-122"/>
+                <a:cs typeface="Arial" pitchFamily="34" charset="-120"/>
+              </a:rPr>
+              <a:t>Scans are bounded; unverified evidence stays explicitly uncertain.</a:t>
+            </a:r>
+            <a:endParaRPr lang="en-US" sz="1000" dirty="0"/>
+          </a:p>
+        </p:txBody>
+      </p:sp>
+      <p:sp>
+        <p:nvSpPr>
+          <p:cNvPr id="41" name="Text 39"/>
+          <p:cNvSpPr/>
+          <p:nvPr/>
+        </p:nvSpPr>
+        <p:spPr>
+          <a:xfrm>
+            <a:off x="658368" y="6510528"/>
+            <a:ext cx="5120640" cy="146304"/>
+          </a:xfrm>
+          <a:prstGeom prst="rect">
+            <a:avLst/>
+          </a:prstGeom>
+          <a:noFill/>
+          <a:ln/>
+        </p:spPr>
+        <p:txBody>
+          <a:bodyPr wrap="square" rtlCol="0" anchor="ctr"/>
+          <a:lstStyle/>
+          <a:p>
+            <a:pPr indent="0" marL="0">
+              <a:buNone/>
+            </a:pPr>
+            <a:r>
+              <a:rPr lang="en-US" sz="800" dirty="0">
+                <a:solidFill>
+                  <a:srgbClr val="B5C0D3"/>
+                </a:solidFill>
+                <a:latin typeface="Arial" pitchFamily="34" charset="0"/>
+                <a:ea typeface="Arial" pitchFamily="34" charset="-122"/>
+                <a:cs typeface="Arial" pitchFamily="34" charset="-120"/>
+              </a:rPr>
+              <a:t>ISSUELIFT  •  HACKTOBERFEST 2026</a:t>
+            </a:r>
+            <a:endParaRPr lang="en-US" sz="800" dirty="0"/>
+          </a:p>
+        </p:txBody>
+      </p:sp>
+      <p:sp>
+        <p:nvSpPr>
+          <p:cNvPr id="42" name="Text 40"/>
+          <p:cNvSpPr/>
+          <p:nvPr/>
+        </p:nvSpPr>
+        <p:spPr>
+          <a:xfrm>
+            <a:off x="11283696" y="6492240"/>
+            <a:ext cx="201168" cy="164592"/>
+          </a:xfrm>
+          <a:prstGeom prst="rect">
+            <a:avLst/>
+          </a:prstGeom>
+          <a:noFill/>
+          <a:ln/>
+        </p:spPr>
+        <p:txBody>
+          <a:bodyPr wrap="square" rtlCol="0" anchor="ctr"/>
+          <a:lstStyle/>
+          <a:p>
+            <a:pPr algn="r" indent="0" marL="0">
+              <a:buNone/>
+            </a:pPr>
+            <a:r>
+              <a:rPr lang="en-US" sz="800" dirty="0">
+                <a:solidFill>
+                  <a:srgbClr val="B5C0D3"/>
+                </a:solidFill>
+                <a:latin typeface="Arial" pitchFamily="34" charset="0"/>
+                <a:ea typeface="Arial" pitchFamily="34" charset="-122"/>
+                <a:cs typeface="Arial" pitchFamily="34" charset="-120"/>
+              </a:rPr>
+              <a:t>2</a:t>
+            </a:r>
+            <a:endParaRPr lang="en-US" sz="800" dirty="0"/>
+          </a:p>
+        </p:txBody>
+      </p:sp>
     </p:spTree>
   </p:cSld>
   <p:clrMapOvr>

--- a/submission/IssueLift_Submission.pptx
+++ b/submission/IssueLift_Submission.pptx
@@ -4779,7 +4779,7 @@
                 <a:ea typeface="Arial" pitchFamily="34" charset="-122"/>
                 <a:cs typeface="Arial" pitchFamily="34" charset="-120"/>
               </a:rPr>
-              <a:t>*ProofBench evaluates 7 deterministic guardrail fixtures in eval/fixtures/ — distinct from the 78 unit tests in tests/ (Vitest).*</a:t>
+              <a:t>*ProofBench evaluates 7 deterministic guardrail fixtures in eval/fixtures/ — distinct from the 80 unit tests in tests/ (Vitest).*</a:t>
             </a:r>
             <a:endParaRPr lang="en-US" sz="1100" dirty="0"/>
           </a:p>
@@ -7739,7 +7739,7 @@
                           <a:ea typeface="Arial" pitchFamily="34" charset="-122"/>
                           <a:cs typeface="Arial" pitchFamily="34" charset="-120"/>
                         </a:rPr>
-                        <a:t>README.md verified; 78 unit tests passing across 4 suites (vitest in tests/)</a:t>
+                        <a:t>README.md verified; 80 unit tests passing across 4 suites (vitest in tests/)</a:t>
                       </a:r>
                       <a:endParaRPr lang="en-US" sz="1000" dirty="0">
                         <a:latin typeface="Arial" charset="0"/>
@@ -7807,7 +7807,7 @@
                           <a:ea typeface="Arial" pitchFamily="34" charset="-122"/>
                           <a:cs typeface="Arial" pitchFamily="34" charset="-120"/>
                         </a:rPr>
-                        <a:t>PASS (78/78 Passing)</a:t>
+                        <a:t>PASS (80/80 Passing)</a:t>
                       </a:r>
                       <a:endParaRPr lang="en-US" sz="1000" dirty="0">
                         <a:latin typeface="Arial" charset="0"/>
